--- a/docs/presentation/Highpass_MediQ_Pitch_5min.pptx
+++ b/docs/presentation/Highpass_MediQ_Pitch_5min.pptx
@@ -15,6 +15,12 @@
     <p:sldId id="263" r:id="rId15"/>
     <p:sldId id="264" r:id="rId16"/>
     <p:sldId id="265" r:id="rId17"/>
+    <p:sldId id="266" r:id="rId18"/>
+    <p:sldId id="267" r:id="rId19"/>
+    <p:sldId id="268" r:id="rId20"/>
+    <p:sldId id="269" r:id="rId21"/>
+    <p:sldId id="270" r:id="rId22"/>
+    <p:sldId id="271" r:id="rId23"/>
   </p:sldIdLst>
   <p:sldSz cx="18288000" cy="10287000" type="screen4x3"/>
   <p:notesSz cx="6858000" cy="9144000"/>
@@ -521,12 +527,12 @@
           </a:p>
           <a:p>
             <a:r>
-              <a:t>저희 프로젝트는 기존 병원 간 의료영상 이동 방식인 'CD 발급과 재촬영'의 고질적인 비효율과 방사선 피폭 문제를 해결하기 위해 기획되었습니다.</a:t>
-            </a:r>
-          </a:p>
-          <a:p>
-            <a:r>
-              <a:t>클라우드에 원본 영상을 저장하지 않는 'Zero Cloud Storage' 원칙과 11단계 ABAC 인가, 그리고 700장 복부 CT 무지연 스트리밍을 실제로 구현하고 검증한 성과를 지금부터 5분간 핵심 위주로 발표해 드리겠습니다." </a:t>
+              <a:t>저희 프로젝트는 물리적 CD 발급과 재촬영의 비효율 및 방사선 피폭 문제를 해결하기 위해, Zero Cloud Storage 원칙과 엄격한 11단계 인가, 그리고 700장 복부 CT 무지연 스트리밍을 구현했습니다.</a:t>
+            </a:r>
+          </a:p>
+          <a:p>
+            <a:r>
+              <a:t>지금부터 핵심 문제와 솔루션, 그리고 8단계 시스템 아키텍처 워크스루를 생생하게 보여드리겠습니다." </a:t>
             </a:r>
           </a:p>
         </p:txBody>
@@ -596,27 +602,462 @@
           <a:lstStyle/>
           <a:p>
             <a:r>
-              <a:t>[발표 04:30 ~ 05:00 | 마무리 및 결론]</a:t>
-            </a:r>
-          </a:p>
-          <a:p>
-            <a:r>
-              <a:t>"정리하겠습니다.</a:t>
-            </a:r>
-          </a:p>
-          <a:p>
-            <a:r>
-              <a:t>하이패스 MediQ는 환자에게는 CD 발급 비용과 방사선 피폭 위험을 없애주고, 의료진에게는 지체 없는 진료 연속성을 제공하며, 병원과 사회에는 의료 재정 절감과 완벽한 데이터 보안을 약속하는 실증 플랫폼입니다.</a:t>
-            </a:r>
-          </a:p>
-          <a:p>
-            <a:r>
-              <a:t>'환자 동의로 열고, 증거와 감사로 닫는다'는 확고한 원칙을 지키며 대한민국 의료 영상 교류의 새로운 지평을 열겠습니다.</a:t>
-            </a:r>
-          </a:p>
-          <a:p>
-            <a:r>
-              <a:t>경청해 주셔서 대단히 감사합니다." </a:t>
+              <a:t>[STEP 07 / 08 발표 대본]</a:t>
+            </a:r>
+          </a:p>
+          <a:p>
+            <a:r>
+              <a:t>"7단계로, B병원 게이트웨이가 수신된 단기 토큰의 서명과 유효기간을 다시 한번 철저히 검증하여 안전성을 확증합니다."</a:t>
+            </a:r>
+          </a:p>
+        </p:txBody>
+      </p:sp>
+      <p:sp>
+        <p:nvSpPr>
+          <p:cNvPr id="4" name="Slide Number Placeholder 3"/>
+          <p:cNvSpPr>
+            <a:spLocks noGrp="1"/>
+          </p:cNvSpPr>
+          <p:nvPr>
+            <p:ph type="sldNum" idx="5" sz="quarter"/>
+          </p:nvPr>
+        </p:nvSpPr>
+        <p:spPr/>
+      </p:sp>
+    </p:spTree>
+  </p:cSld>
+  <p:clrMapOvr>
+    <a:masterClrMapping/>
+  </p:clrMapOvr>
+</p:notes>
+</file>
+
+<file path=ppt/notesSlides/notesSlide11.xml><?xml version="1.0" encoding="utf-8"?>
+<p:notes xmlns:a="http://schemas.openxmlformats.org/drawingml/2006/main" xmlns:p="http://schemas.openxmlformats.org/presentationml/2006/main" xmlns:r="http://schemas.openxmlformats.org/officeDocument/2006/relationships">
+  <p:cSld>
+    <p:spTree>
+      <p:nvGrpSpPr>
+        <p:cNvPr id="1" name=""/>
+        <p:cNvGrpSpPr/>
+        <p:nvPr/>
+      </p:nvGrpSpPr>
+      <p:grpSpPr>
+        <a:xfrm>
+          <a:off x="0" y="0"/>
+          <a:ext cx="0" cy="0"/>
+          <a:chOff x="0" y="0"/>
+          <a:chExt cx="0" cy="0"/>
+        </a:xfrm>
+      </p:grpSpPr>
+      <p:sp>
+        <p:nvSpPr>
+          <p:cNvPr id="2" name="Slide Image Placeholder 1"/>
+          <p:cNvSpPr>
+            <a:spLocks noGrp="1"/>
+          </p:cNvSpPr>
+          <p:nvPr>
+            <p:ph type="sldImg" idx="2"/>
+          </p:nvPr>
+        </p:nvSpPr>
+        <p:spPr/>
+      </p:sp>
+      <p:sp>
+        <p:nvSpPr>
+          <p:cNvPr id="3" name="Notes Placeholder 2"/>
+          <p:cNvSpPr>
+            <a:spLocks noGrp="1"/>
+          </p:cNvSpPr>
+          <p:nvPr>
+            <p:ph type="body" idx="3" sz="quarter"/>
+          </p:nvPr>
+        </p:nvSpPr>
+        <p:spPr/>
+        <p:txBody>
+          <a:bodyPr/>
+          <a:lstStyle/>
+          <a:p>
+            <a:r>
+              <a:t>[STEP 08 / 08 발표 대본]</a:t>
+            </a:r>
+          </a:p>
+          <a:p>
+            <a:r>
+              <a:t>"마지막 8단계입니다. A병원 PACS에 안전하게 보관되어 있던 700장의 복부 CT 영상이 WireGuard 사설망을 타고 B병원 진료실 뷰어로 무지연 스트리밍되어 의사가 즉시 정밀 판독을 진행합니다."</a:t>
+            </a:r>
+          </a:p>
+        </p:txBody>
+      </p:sp>
+      <p:sp>
+        <p:nvSpPr>
+          <p:cNvPr id="4" name="Slide Number Placeholder 3"/>
+          <p:cNvSpPr>
+            <a:spLocks noGrp="1"/>
+          </p:cNvSpPr>
+          <p:nvPr>
+            <p:ph type="sldNum" idx="5" sz="quarter"/>
+          </p:nvPr>
+        </p:nvSpPr>
+        <p:spPr/>
+      </p:sp>
+    </p:spTree>
+  </p:cSld>
+  <p:clrMapOvr>
+    <a:masterClrMapping/>
+  </p:clrMapOvr>
+</p:notes>
+</file>
+
+<file path=ppt/notesSlides/notesSlide12.xml><?xml version="1.0" encoding="utf-8"?>
+<p:notes xmlns:a="http://schemas.openxmlformats.org/drawingml/2006/main" xmlns:p="http://schemas.openxmlformats.org/presentationml/2006/main" xmlns:r="http://schemas.openxmlformats.org/officeDocument/2006/relationships">
+  <p:cSld>
+    <p:spTree>
+      <p:nvGrpSpPr>
+        <p:cNvPr id="1" name=""/>
+        <p:cNvGrpSpPr/>
+        <p:nvPr/>
+      </p:nvGrpSpPr>
+      <p:grpSpPr>
+        <a:xfrm>
+          <a:off x="0" y="0"/>
+          <a:ext cx="0" cy="0"/>
+          <a:chOff x="0" y="0"/>
+          <a:chExt cx="0" cy="0"/>
+        </a:xfrm>
+      </p:grpSpPr>
+      <p:sp>
+        <p:nvSpPr>
+          <p:cNvPr id="2" name="Slide Image Placeholder 1"/>
+          <p:cNvSpPr>
+            <a:spLocks noGrp="1"/>
+          </p:cNvSpPr>
+          <p:nvPr>
+            <p:ph type="sldImg" idx="2"/>
+          </p:nvPr>
+        </p:nvSpPr>
+        <p:spPr/>
+      </p:sp>
+      <p:sp>
+        <p:nvSpPr>
+          <p:cNvPr id="3" name="Notes Placeholder 2"/>
+          <p:cNvSpPr>
+            <a:spLocks noGrp="1"/>
+          </p:cNvSpPr>
+          <p:nvPr>
+            <p:ph type="body" idx="3" sz="quarter"/>
+          </p:nvPr>
+        </p:nvSpPr>
+        <p:spPr/>
+        <p:txBody>
+          <a:bodyPr/>
+          <a:lstStyle/>
+          <a:p>
+            <a:r>
+              <a:t>[환자 포털 대본]</a:t>
+            </a:r>
+          </a:p>
+          <a:p>
+            <a:r>
+              <a:t>"실제 클라우드에 배포된 환자의 의료 공유 지갑 화면입니다. 환자가 직접 수신할 B대학병원과 유효기간, 복부 CT를 선택하며 언제든 1초 만에 권한을 철회할 수 있습니다."</a:t>
+            </a:r>
+          </a:p>
+        </p:txBody>
+      </p:sp>
+      <p:sp>
+        <p:nvSpPr>
+          <p:cNvPr id="4" name="Slide Number Placeholder 3"/>
+          <p:cNvSpPr>
+            <a:spLocks noGrp="1"/>
+          </p:cNvSpPr>
+          <p:nvPr>
+            <p:ph type="sldNum" idx="5" sz="quarter"/>
+          </p:nvPr>
+        </p:nvSpPr>
+        <p:spPr/>
+      </p:sp>
+    </p:spTree>
+  </p:cSld>
+  <p:clrMapOvr>
+    <a:masterClrMapping/>
+  </p:clrMapOvr>
+</p:notes>
+</file>
+
+<file path=ppt/notesSlides/notesSlide13.xml><?xml version="1.0" encoding="utf-8"?>
+<p:notes xmlns:a="http://schemas.openxmlformats.org/drawingml/2006/main" xmlns:p="http://schemas.openxmlformats.org/presentationml/2006/main" xmlns:r="http://schemas.openxmlformats.org/officeDocument/2006/relationships">
+  <p:cSld>
+    <p:spTree>
+      <p:nvGrpSpPr>
+        <p:cNvPr id="1" name=""/>
+        <p:cNvGrpSpPr/>
+        <p:nvPr/>
+      </p:nvGrpSpPr>
+      <p:grpSpPr>
+        <a:xfrm>
+          <a:off x="0" y="0"/>
+          <a:ext cx="0" cy="0"/>
+          <a:chOff x="0" y="0"/>
+          <a:chExt cx="0" cy="0"/>
+        </a:xfrm>
+      </p:grpSpPr>
+      <p:sp>
+        <p:nvSpPr>
+          <p:cNvPr id="2" name="Slide Image Placeholder 1"/>
+          <p:cNvSpPr>
+            <a:spLocks noGrp="1"/>
+          </p:cNvSpPr>
+          <p:nvPr>
+            <p:ph type="sldImg" idx="2"/>
+          </p:nvPr>
+        </p:nvSpPr>
+        <p:spPr/>
+      </p:sp>
+      <p:sp>
+        <p:nvSpPr>
+          <p:cNvPr id="3" name="Notes Placeholder 2"/>
+          <p:cNvSpPr>
+            <a:spLocks noGrp="1"/>
+          </p:cNvSpPr>
+          <p:nvPr>
+            <p:ph type="body" idx="3" sz="quarter"/>
+          </p:nvPr>
+        </p:nvSpPr>
+        <p:spPr/>
+        <p:txBody>
+          <a:bodyPr/>
+          <a:lstStyle/>
+          <a:p>
+            <a:r>
+              <a:t>[AI 건강도우미 대본]</a:t>
+            </a:r>
+          </a:p>
+          <a:p>
+            <a:r>
+              <a:t>"환자가 결과지에 적힌 어려운 용어에 불안해하지 않도록, AI가 알파태아단백(AFP)을 알기 쉽게 설명하고 진료실에서 물어볼 질문 카드를 만들어줍니다."</a:t>
+            </a:r>
+          </a:p>
+        </p:txBody>
+      </p:sp>
+      <p:sp>
+        <p:nvSpPr>
+          <p:cNvPr id="4" name="Slide Number Placeholder 3"/>
+          <p:cNvSpPr>
+            <a:spLocks noGrp="1"/>
+          </p:cNvSpPr>
+          <p:nvPr>
+            <p:ph type="sldNum" idx="5" sz="quarter"/>
+          </p:nvPr>
+        </p:nvSpPr>
+        <p:spPr/>
+      </p:sp>
+    </p:spTree>
+  </p:cSld>
+  <p:clrMapOvr>
+    <a:masterClrMapping/>
+  </p:clrMapOvr>
+</p:notes>
+</file>
+
+<file path=ppt/notesSlides/notesSlide14.xml><?xml version="1.0" encoding="utf-8"?>
+<p:notes xmlns:a="http://schemas.openxmlformats.org/drawingml/2006/main" xmlns:p="http://schemas.openxmlformats.org/presentationml/2006/main" xmlns:r="http://schemas.openxmlformats.org/officeDocument/2006/relationships">
+  <p:cSld>
+    <p:spTree>
+      <p:nvGrpSpPr>
+        <p:cNvPr id="1" name=""/>
+        <p:cNvGrpSpPr/>
+        <p:nvPr/>
+      </p:nvGrpSpPr>
+      <p:grpSpPr>
+        <a:xfrm>
+          <a:off x="0" y="0"/>
+          <a:ext cx="0" cy="0"/>
+          <a:chOff x="0" y="0"/>
+          <a:chExt cx="0" cy="0"/>
+        </a:xfrm>
+      </p:grpSpPr>
+      <p:sp>
+        <p:nvSpPr>
+          <p:cNvPr id="2" name="Slide Image Placeholder 1"/>
+          <p:cNvSpPr>
+            <a:spLocks noGrp="1"/>
+          </p:cNvSpPr>
+          <p:nvPr>
+            <p:ph type="sldImg" idx="2"/>
+          </p:nvPr>
+        </p:nvSpPr>
+        <p:spPr/>
+      </p:sp>
+      <p:sp>
+        <p:nvSpPr>
+          <p:cNvPr id="3" name="Notes Placeholder 2"/>
+          <p:cNvSpPr>
+            <a:spLocks noGrp="1"/>
+          </p:cNvSpPr>
+          <p:nvPr>
+            <p:ph type="body" idx="3" sz="quarter"/>
+          </p:nvPr>
+        </p:nvSpPr>
+        <p:spPr/>
+        <p:txBody>
+          <a:bodyPr/>
+          <a:lstStyle/>
+          <a:p>
+            <a:r>
+              <a:t>[의료진 뷰어 대본]</a:t>
+            </a:r>
+          </a:p>
+          <a:p>
+            <a:r>
+              <a:t>"B병원 의사가 5분 단기 토큰으로 700장에 달하는 복부 CT 슬라이스를 초고속으로 스크롤하며 간 병변을 정밀 판독하는 실제 데스크톱 PACS 뷰어 화면입니다."</a:t>
+            </a:r>
+          </a:p>
+        </p:txBody>
+      </p:sp>
+      <p:sp>
+        <p:nvSpPr>
+          <p:cNvPr id="4" name="Slide Number Placeholder 3"/>
+          <p:cNvSpPr>
+            <a:spLocks noGrp="1"/>
+          </p:cNvSpPr>
+          <p:nvPr>
+            <p:ph type="sldNum" idx="5" sz="quarter"/>
+          </p:nvPr>
+        </p:nvSpPr>
+        <p:spPr/>
+      </p:sp>
+    </p:spTree>
+  </p:cSld>
+  <p:clrMapOvr>
+    <a:masterClrMapping/>
+  </p:clrMapOvr>
+</p:notes>
+</file>
+
+<file path=ppt/notesSlides/notesSlide15.xml><?xml version="1.0" encoding="utf-8"?>
+<p:notes xmlns:a="http://schemas.openxmlformats.org/drawingml/2006/main" xmlns:p="http://schemas.openxmlformats.org/presentationml/2006/main" xmlns:r="http://schemas.openxmlformats.org/officeDocument/2006/relationships">
+  <p:cSld>
+    <p:spTree>
+      <p:nvGrpSpPr>
+        <p:cNvPr id="1" name=""/>
+        <p:cNvGrpSpPr/>
+        <p:nvPr/>
+      </p:nvGrpSpPr>
+      <p:grpSpPr>
+        <a:xfrm>
+          <a:off x="0" y="0"/>
+          <a:ext cx="0" cy="0"/>
+          <a:chOff x="0" y="0"/>
+          <a:chExt cx="0" cy="0"/>
+        </a:xfrm>
+      </p:grpSpPr>
+      <p:sp>
+        <p:nvSpPr>
+          <p:cNvPr id="2" name="Slide Image Placeholder 1"/>
+          <p:cNvSpPr>
+            <a:spLocks noGrp="1"/>
+          </p:cNvSpPr>
+          <p:nvPr>
+            <p:ph type="sldImg" idx="2"/>
+          </p:nvPr>
+        </p:nvSpPr>
+        <p:spPr/>
+      </p:sp>
+      <p:sp>
+        <p:nvSpPr>
+          <p:cNvPr id="3" name="Notes Placeholder 2"/>
+          <p:cNvSpPr>
+            <a:spLocks noGrp="1"/>
+          </p:cNvSpPr>
+          <p:nvPr>
+            <p:ph type="body" idx="3" sz="quarter"/>
+          </p:nvPr>
+        </p:nvSpPr>
+        <p:spPr/>
+        <p:txBody>
+          <a:bodyPr/>
+          <a:lstStyle/>
+          <a:p>
+            <a:r>
+              <a:t>[보안 관제 대본]</a:t>
+            </a:r>
+          </a:p>
+          <a:p>
+            <a:r>
+              <a:t>"모든 열람 행위와 접근 거부 사유가 1초 단위로 불변 감사로그에 기록되며 관리자조차 삭제할 수 없어 완전한 법적 증거력을 지닙니다."</a:t>
+            </a:r>
+          </a:p>
+        </p:txBody>
+      </p:sp>
+      <p:sp>
+        <p:nvSpPr>
+          <p:cNvPr id="4" name="Slide Number Placeholder 3"/>
+          <p:cNvSpPr>
+            <a:spLocks noGrp="1"/>
+          </p:cNvSpPr>
+          <p:nvPr>
+            <p:ph type="sldNum" idx="5" sz="quarter"/>
+          </p:nvPr>
+        </p:nvSpPr>
+        <p:spPr/>
+      </p:sp>
+    </p:spTree>
+  </p:cSld>
+  <p:clrMapOvr>
+    <a:masterClrMapping/>
+  </p:clrMapOvr>
+</p:notes>
+</file>
+
+<file path=ppt/notesSlides/notesSlide16.xml><?xml version="1.0" encoding="utf-8"?>
+<p:notes xmlns:a="http://schemas.openxmlformats.org/drawingml/2006/main" xmlns:p="http://schemas.openxmlformats.org/presentationml/2006/main" xmlns:r="http://schemas.openxmlformats.org/officeDocument/2006/relationships">
+  <p:cSld>
+    <p:spTree>
+      <p:nvGrpSpPr>
+        <p:cNvPr id="1" name=""/>
+        <p:cNvGrpSpPr/>
+        <p:nvPr/>
+      </p:nvGrpSpPr>
+      <p:grpSpPr>
+        <a:xfrm>
+          <a:off x="0" y="0"/>
+          <a:ext cx="0" cy="0"/>
+          <a:chOff x="0" y="0"/>
+          <a:chExt cx="0" cy="0"/>
+        </a:xfrm>
+      </p:grpSpPr>
+      <p:sp>
+        <p:nvSpPr>
+          <p:cNvPr id="2" name="Slide Image Placeholder 1"/>
+          <p:cNvSpPr>
+            <a:spLocks noGrp="1"/>
+          </p:cNvSpPr>
+          <p:nvPr>
+            <p:ph type="sldImg" idx="2"/>
+          </p:nvPr>
+        </p:nvSpPr>
+        <p:spPr/>
+      </p:sp>
+      <p:sp>
+        <p:nvSpPr>
+          <p:cNvPr id="3" name="Notes Placeholder 2"/>
+          <p:cNvSpPr>
+            <a:spLocks noGrp="1"/>
+          </p:cNvSpPr>
+          <p:nvPr>
+            <p:ph type="body" idx="3" sz="quarter"/>
+          </p:nvPr>
+        </p:nvSpPr>
+        <p:spPr/>
+        <p:txBody>
+          <a:bodyPr/>
+          <a:lstStyle/>
+          <a:p>
+            <a:r>
+              <a:t>[마무리 및 Q&amp;A 대본]</a:t>
+            </a:r>
+          </a:p>
+          <a:p>
+            <a:r>
+              <a:t>"정리하겠습니다. 하이패스 MediQ는 환자에게는 CD 발급 비용과 방사선 피폭 위험을 없애주고, 의료진에게는 진료 연속성을, 병원에는 유출 위험 없는 보안을 보장합니다. 경청해 주셔서 대단히 감사합니다. 질의응답을 받겠습니다." </a:t>
             </a:r>
           </a:p>
         </p:txBody>
@@ -686,22 +1127,17 @@
           <a:lstStyle/>
           <a:p>
             <a:r>
-              <a:t>[발표 00:30 ~ 01:00 | 청중 공감 및 문제 정의]</a:t>
-            </a:r>
-          </a:p>
-          <a:p>
-            <a:r>
-              <a:t>"여러분, 대학병원에서 CT나 MRI를 찍고 다른 병원으로 진료를 보러 갈 때, 여전히 환자가 직접 CD를 가방에 넣고 들고 다녀야 한다는 사실을 알고 계십니까?</a:t>
-            </a:r>
-          </a:p>
-          <a:p>
-            <a:r>
-              <a:t>이 구시대적 방식 때문에 환자는 불필요한 발급 수수료와 번호표 대기 시간을 겪습니다. 더 심각한 것은 타 병원에 갔을 때 CD 포맷이 안 맞거나 손상되어 어쩔 수 없이 CT/MRI를 다시 촬영하게 되면서 불필요한 방사선 피폭에 노출된다는 점입니다.</a:t>
-            </a:r>
-          </a:p>
-          <a:p>
-            <a:r>
-              <a:t>또한, 내 소중한 의료 정보임에도 어디로 흘러가는지, 누구에게 보여줄지 환자 스스로 제어하거나 회수할 권리가 완전히 배제되어 있었습니다." </a:t>
+              <a:t>[발표 00:30 ~ 01:00 | 문제 정의]</a:t>
+            </a:r>
+          </a:p>
+          <a:p>
+            <a:r>
+              <a:t>"대학병원에서 CT나 MRI를 찍고 다른 병원으로 진료를 보러 갈 때, 여전히 환자가 직접 CD를 가방에 넣고 들고 다녀야 합니다.</a:t>
+            </a:r>
+          </a:p>
+          <a:p>
+            <a:r>
+              <a:t>이로 인해 발급비와 대기 시간이 발생하고, CD 포맷 불일치나 손상으로 인한 불필요한 재촬영으로 방사선 피폭 위험에 노출됩니다. 또한 내 의료 정보임에도 환자가 열람 권한을 직접 제어하거나 철회할 권리가 없었습니다." </a:t>
             </a:r>
           </a:p>
         </p:txBody>
@@ -771,32 +1207,12 @@
           <a:lstStyle/>
           <a:p>
             <a:r>
-              <a:t>[발표 01:00 ~ 01:30 | 솔루션 패러다임 전환]</a:t>
-            </a:r>
-          </a:p>
-          <a:p>
-            <a:r>
-              <a:t>"하이패스 MediQ는 이 불편한 매체 전달 방식을 완전히 디지털 혁신합니다.</a:t>
-            </a:r>
-          </a:p>
-          <a:p>
-            <a:r>
-              <a:t>환자가 스마트폰 웹에서 B대학병원, 진료 목적, 유효기간, 그리고 허용할 CT 검사만을 콕 집어 명시적 동의를 생성합니다.</a:t>
-            </a:r>
-          </a:p>
-          <a:p>
-            <a:r>
-              <a:t>수신 병원 의사가 접근을 요청하면, 서버가 즉시 11단계 보안 조건을 검증한 뒤 5분 유효 단기 토큰을 서명 발급합니다.</a:t>
-            </a:r>
-          </a:p>
-          <a:p>
-            <a:r>
-              <a:t>이 토큰을 통해 원본 병원 PACS로부터 필요한 DICOM 영상만을 웹 뷰어로 실시간 스트리밍합니다.</a:t>
-            </a:r>
-          </a:p>
-          <a:p>
-            <a:r>
-              <a:t>CD를 들고 다닐 필요도 없고, 불필요한 재촬영도 막으며, 언제든 동의를 철회할 수 있는 진정한 환자 중심 서비스입니다." </a:t>
+              <a:t>[발표 01:00 ~ 01:30 | 솔루션 제안]</a:t>
+            </a:r>
+          </a:p>
+          <a:p>
+            <a:r>
+              <a:t>"하이패스 MediQ는 환자가 스마트폰으로 수신 병원과 검사를 지정해 동의 티켓을 발행하면, 서버가 11단계 인가를 거쳐 5분 단기 토큰을 발행하고 원본 병원 PACS로부터 필요한 영상만 웹 뷰어로 실시간 스트리밍합니다." </a:t>
             </a:r>
           </a:p>
         </p:txBody>
@@ -866,27 +1282,17 @@
           <a:lstStyle/>
           <a:p>
             <a:r>
-              <a:t>[발표 01:30 ~ 02:00 | 시스템 아키텍처 및 보안 불변식]</a:t>
-            </a:r>
-          </a:p>
-          <a:p>
-            <a:r>
-              <a:t>"저희 아키텍처의 절대 원칙은 'Zero Cloud Storage'입니다.</a:t>
-            </a:r>
-          </a:p>
-          <a:p>
-            <a:r>
-              <a:t>민감한 환자 의료영상이 클라우드 중앙에 영구 보관되면 대규모 해킹이나 유출의 표적이 됩니다.</a:t>
-            </a:r>
-          </a:p>
-          <a:p>
-            <a:r>
-              <a:t>따라서 원본 영상은 각 병원 로컬 온프레미스 PACS에 그대로 머무르고, 클라우드 Control Plane은 오직 동의와 권한, 감사로그만 관리합니다.</a:t>
-            </a:r>
-          </a:p>
-          <a:p>
-            <a:r>
-              <a:t>의사가 영상을 볼 때만 단기 토큰으로 병원 게이트웨이와 직접 통신하여 프레임 단위로 Lazy Loading 스트리밍합니다. 의료법과 개인정보보호법 가이드라인을 완벽하게 만족하는 구조입니다." </a:t>
+              <a:t>[발표 01:30 ~ 01:50 | 전체 아키텍처 조망]</a:t>
+            </a:r>
+          </a:p>
+          <a:p>
+            <a:r>
+              <a:t>"지금 보시는 구성도는 하이패스 MediQ의 전체 아키텍처입니다.</a:t>
+            </a:r>
+          </a:p>
+          <a:p>
+            <a:r>
+              <a:t>좌측의 인터넷 사용자부터 Microsoft Entra ID, Azure Control Plane, 그리고 가상 병원 A와 B의 PACS까지 연결되는 8단계 흐름을 한 단계씩 살펴보겠습니다." </a:t>
             </a:r>
           </a:p>
         </p:txBody>
@@ -956,22 +1362,12 @@
           <a:lstStyle/>
           <a:p>
             <a:r>
-              <a:t>[발표 02:00 ~ 02:30 | 보안 인가 엔진 및 AI 안전성]</a:t>
-            </a:r>
-          </a:p>
-          <a:p>
-            <a:r>
-              <a:t>"보안은 단 하나의 구멍도 허용하지 않습니다.</a:t>
-            </a:r>
-          </a:p>
-          <a:p>
-            <a:r>
-              <a:t>저희 ABAC 게이트는 환자 동의, 시간, 의사 소속, 검사 UID 등 11개 조건을 교집합으로 검증하며, 하나라도 어긋나면 접근을 차단하고 감사로그를 남깁니다.</a:t>
-            </a:r>
-          </a:p>
-          <a:p>
-            <a:r>
-              <a:t>또한 함께 탑재된 AI 건강도우미는 미국 MedlinePlus 공인 코퍼스 기반으로 구동되며, 2-Layer 형태소 및 의도 분류기를 통해 진단이나 처방성 질문을 완벽히 차단하고, 환자가 검사 결과를 쉽게 이해하고 의사에게 무엇을 물어볼지 준비하는 안전한 비임상 보조 도구로 엄격히 제한됩니다." </a:t>
+              <a:t>[STEP 01 / 08 발표 대본]</a:t>
+            </a:r>
+          </a:p>
+          <a:p>
+            <a:r>
+              <a:t>"1단계는 신원 인증입니다. 환자와 의료진은 Microsoft Entra ID를 통해 신원을 확인합니다. 그러나 로그인에 성공했다고 영상이 열리는 것이 아니라, 권한 검증이라는 별도의 문을 통과해야 합니다."</a:t>
             </a:r>
           </a:p>
         </p:txBody>
@@ -1041,22 +1437,12 @@
           <a:lstStyle/>
           <a:p>
             <a:r>
-              <a:t>[발표 02:30 ~ 03:00 | 라이브 UI 환자 동의 지갑]</a:t>
-            </a:r>
-          </a:p>
-          <a:p>
-            <a:r>
-              <a:t>"실제 클라우드에 배포된 화면입니다.</a:t>
-            </a:r>
-          </a:p>
-          <a:p>
-            <a:r>
-              <a:t>좌측은 환자가 접속하는 '의료 공유 지갑' 화면입니다. 환자는 수신할 B대학병원과 진료 목적, 유효기간을 설정하고, 본인이 공유하고 싶은 복부 CT 검사를 직접 선택합니다.</a:t>
-            </a:r>
-          </a:p>
-          <a:p>
-            <a:r>
-              <a:t>전체 진료기록을 무차별 공유하는 것이 아니라 필요한 검사만 선별 공유하며, 환자가 원하면 언제든 1초 만에 권한을 파기하는 '동의 철회'가 가능합니다." </a:t>
+              <a:t>[STEP 02 / 08 발표 대본]</a:t>
+            </a:r>
+          </a:p>
+          <a:p>
+            <a:r>
+              <a:t>"2단계에서 환자는 스마트폰을 통해 자신의 의료 지갑에서 공유할 병원과 유효기간, 그리고 필요한 복부 CT 검사만을 콕 집어 명시적 동의 범위를 설정합니다."</a:t>
             </a:r>
           </a:p>
         </p:txBody>
@@ -1126,22 +1512,12 @@
           <a:lstStyle/>
           <a:p>
             <a:r>
-              <a:t>[발표 03:00 ~ 03:30 | 라이브 UI AI 건강도우미]</a:t>
-            </a:r>
-          </a:p>
-          <a:p>
-            <a:r>
-              <a:t>"환자가 검사 결과지에 적힌 어려운 의학 용어를 마주했을 때의 불안을 해소하는 'AI 건강도우미' 화면입니다.</a:t>
-            </a:r>
-          </a:p>
-          <a:p>
-            <a:r>
-              <a:t>혈청 알파태아단백(AFP)이나 간경화 같은 질환에 대해 질문하면, 정상 수치와 검사 목적을 환자 눈높이로 설명합니다.</a:t>
-            </a:r>
-          </a:p>
-          <a:p>
-            <a:r>
-              <a:t>특히 우측 하단의 '의사 상담 리허설 박스'는 진료실에서 의사에게 무엇을 물어봐야 할지 핵심 질문을 미리 정리해 주어 진료의 질을 크게 높여줍니다." </a:t>
+              <a:t>[STEP 03 / 08 발표 대본]</a:t>
+            </a:r>
+          </a:p>
+          <a:p>
+            <a:r>
+              <a:t>"3단계에서 서버는 환자의 동의 조건을 암호화하여 저장하고 QR 공유 티켓을 발행합니다. 이때 클라우드 중앙 서버에는 대용량 영상 파일이 전혀 저장되지 않습니다."</a:t>
             </a:r>
           </a:p>
         </p:txBody>
@@ -1211,22 +1587,12 @@
           <a:lstStyle/>
           <a:p>
             <a:r>
-              <a:t>[발표 03:30 ~ 04:00 | 라이브 UI 700장 복부 CT 뷰어]</a:t>
-            </a:r>
-          </a:p>
-          <a:p>
-            <a:r>
-              <a:t>"의료진이 마주하는 실제 데스크톱 PACS 뷰어 화면입니다.</a:t>
-            </a:r>
-          </a:p>
-          <a:p>
-            <a:r>
-              <a:t>B병원 의사가 조회를 요청하면 5분 유효 단기 토큰이 발급되며, 700장에 달하는 초고해상도 복부 CT 슬라이스를 지연 없이 넘겨보며 간 병변 부위를 정밀하게 확인할 수 있습니다.</a:t>
-            </a:r>
-          </a:p>
-          <a:p>
-            <a:r>
-              <a:t>로컬 PC로의 무단 다운로드는 완벽히 차단되며, 5분이 지나면 토큰이 자동 만료되어 유출 위험이 없습니다." </a:t>
+              <a:t>[STEP 04 / 08 발표 대본]</a:t>
+            </a:r>
+          </a:p>
+          <a:p>
+            <a:r>
+              <a:t>"4단계로, B병원 진료실 의사가 환자의 QR 티켓을 접수합니다. 이 요청은 안전한 TLS 터널링을 통해 Control 서버로 전달되어 의사의 소속과 권한 검증에 들어갑니다."</a:t>
             </a:r>
           </a:p>
         </p:txBody>
@@ -1296,22 +1662,12 @@
           <a:lstStyle/>
           <a:p>
             <a:r>
-              <a:t>[발표 04:00 ~ 04:30 | 라이브 UI 보안 관제 및 감사로그]</a:t>
-            </a:r>
-          </a:p>
-          <a:p>
-            <a:r>
-              <a:t>"의료 시스템에서 가장 중요한 '감사 가능성(Auditability)'을 입증하는 보안 관제 화면입니다.</a:t>
-            </a:r>
-          </a:p>
-          <a:p>
-            <a:r>
-              <a:t>누가, 언제, 어떤 동의를 근거로 영상을 조회했는지 모든 행위가 1초 단위로 불변 기록됩니다.</a:t>
-            </a:r>
-          </a:p>
-          <a:p>
-            <a:r>
-              <a:t>또한 허용되지 않은 병원이나 만료된 토큰으로 접근하려는 비정상 행위를 실시간으로 감지하고 차단합니다. 관리자조차 임의로 로그를 지울 수 없어 강력한 법적 증거력을 지닙니다." </a:t>
+              <a:t>[STEP 05 &amp; 06 / 08 발표 대본]</a:t>
+            </a:r>
+          </a:p>
+          <a:p>
+            <a:r>
+              <a:t>"5단계와 6단계는 핵심 보안 관문입니다. 서버가 11가지 인가 조건을 전수 검증하여, 모두 통과했을 때만 5분간 유효한 단기 서명 토큰을 발급합니다."</a:t>
             </a:r>
           </a:p>
         </p:txBody>
@@ -4589,7 +4945,7 @@
           </a:fontRef>
         </p:style>
         <p:txBody>
-          <a:bodyPr rtlCol="0" anchor="ctr" wrap="none" lIns="0" tIns="0" rIns="0" bIns="0"/>
+          <a:bodyPr rtlCol="0" anchor="ctr"/>
           <a:lstStyle/>
           <a:p>
             <a:pPr algn="ctr">
@@ -4763,7 +5119,7 @@
           </a:fontRef>
         </p:style>
         <p:txBody>
-          <a:bodyPr rtlCol="0" anchor="ctr" wrap="none" lIns="0" tIns="0" rIns="0" bIns="0"/>
+          <a:bodyPr rtlCol="0" anchor="ctr"/>
           <a:lstStyle/>
           <a:p>
             <a:pPr algn="ctr">
@@ -4937,7 +5293,7 @@
           </a:fontRef>
         </p:style>
         <p:txBody>
-          <a:bodyPr rtlCol="0" anchor="ctr" wrap="none" lIns="0" tIns="0" rIns="0" bIns="0"/>
+          <a:bodyPr rtlCol="0" anchor="ctr"/>
           <a:lstStyle/>
           <a:p>
             <a:pPr algn="ctr">
@@ -5109,7 +5465,7 @@
           </a:fontRef>
         </p:style>
         <p:txBody>
-          <a:bodyPr rtlCol="0" anchor="ctr" wrap="none" lIns="0" tIns="0" rIns="0" bIns="0"/>
+          <a:bodyPr rtlCol="0" anchor="ctr"/>
           <a:lstStyle/>
           <a:p>
             <a:pPr algn="ctr">
@@ -5149,7 +5505,7 @@
           <a:lstStyle/>
           <a:p>
             <a:pPr>
-              <a:defRPr sz="1800" b="1">
+              <a:defRPr sz="1800">
                 <a:solidFill>
                   <a:srgbClr val="FFFFFF"/>
                 </a:solidFill>
@@ -5198,7 +5554,7 @@
           </a:fontRef>
         </p:style>
         <p:txBody>
-          <a:bodyPr rtlCol="0" anchor="ctr" wrap="none" lIns="0" tIns="0" rIns="0" bIns="0"/>
+          <a:bodyPr rtlCol="0" anchor="ctr"/>
           <a:lstStyle/>
           <a:p>
             <a:pPr algn="ctr">
@@ -5238,7 +5594,7 @@
           <a:lstStyle/>
           <a:p>
             <a:pPr>
-              <a:defRPr sz="1800" b="0">
+              <a:defRPr sz="1800">
                 <a:solidFill>
                   <a:srgbClr val="FFFFFF"/>
                 </a:solidFill>
@@ -5287,7 +5643,7 @@
           </a:fontRef>
         </p:style>
         <p:txBody>
-          <a:bodyPr rtlCol="0" anchor="ctr" wrap="none" lIns="0" tIns="0" rIns="0" bIns="0"/>
+          <a:bodyPr rtlCol="0" anchor="ctr"/>
           <a:lstStyle/>
           <a:p>
             <a:pPr algn="ctr">
@@ -5327,7 +5683,7 @@
           <a:lstStyle/>
           <a:p>
             <a:pPr>
-              <a:defRPr sz="1800" b="0">
+              <a:defRPr sz="1800">
                 <a:solidFill>
                   <a:srgbClr val="FFFFFF"/>
                 </a:solidFill>
@@ -5373,6 +5729,4572 @@
             <a:avLst/>
           </a:prstGeom>
           <a:solidFill>
+            <a:srgbClr val="FFFFFF"/>
+          </a:solidFill>
+          <a:ln>
+            <a:noFill/>
+          </a:ln>
+        </p:spPr>
+        <p:style>
+          <a:lnRef idx="1">
+            <a:schemeClr val="accent1"/>
+          </a:lnRef>
+          <a:fillRef idx="3">
+            <a:schemeClr val="accent1"/>
+          </a:fillRef>
+          <a:effectRef idx="2">
+            <a:schemeClr val="accent1"/>
+          </a:effectRef>
+          <a:fontRef idx="minor">
+            <a:schemeClr val="lt1"/>
+          </a:fontRef>
+        </p:style>
+        <p:txBody>
+          <a:bodyPr rtlCol="0" anchor="ctr"/>
+          <a:lstStyle/>
+          <a:p>
+            <a:pPr algn="ctr"/>
+          </a:p>
+        </p:txBody>
+      </p:sp>
+      <p:sp>
+        <p:nvSpPr>
+          <p:cNvPr id="3" name="Rectangle 2"/>
+          <p:cNvSpPr/>
+          <p:nvPr/>
+        </p:nvSpPr>
+        <p:spPr>
+          <a:xfrm>
+            <a:off x="0" y="0"/>
+            <a:ext cx="18288000" cy="2457450"/>
+          </a:xfrm>
+          <a:prstGeom prst="rect">
+            <a:avLst/>
+          </a:prstGeom>
+          <a:solidFill>
+            <a:srgbClr val="F3F6FA"/>
+          </a:solidFill>
+          <a:ln>
+            <a:noFill/>
+          </a:ln>
+        </p:spPr>
+        <p:style>
+          <a:lnRef idx="1">
+            <a:schemeClr val="accent1"/>
+          </a:lnRef>
+          <a:fillRef idx="3">
+            <a:schemeClr val="accent1"/>
+          </a:fillRef>
+          <a:effectRef idx="2">
+            <a:schemeClr val="accent1"/>
+          </a:effectRef>
+          <a:fontRef idx="minor">
+            <a:schemeClr val="lt1"/>
+          </a:fontRef>
+        </p:style>
+        <p:txBody>
+          <a:bodyPr rtlCol="0" anchor="ctr"/>
+          <a:lstStyle/>
+          <a:p>
+            <a:pPr algn="ctr"/>
+          </a:p>
+        </p:txBody>
+      </p:sp>
+      <p:sp>
+        <p:nvSpPr>
+          <p:cNvPr id="4" name="Rectangle 3"/>
+          <p:cNvSpPr/>
+          <p:nvPr/>
+        </p:nvSpPr>
+        <p:spPr>
+          <a:xfrm>
+            <a:off x="1028700" y="723900"/>
+            <a:ext cx="76200" cy="1257300"/>
+          </a:xfrm>
+          <a:prstGeom prst="rect">
+            <a:avLst/>
+          </a:prstGeom>
+          <a:solidFill>
+            <a:srgbClr val="2F68B5"/>
+          </a:solidFill>
+          <a:ln>
+            <a:noFill/>
+          </a:ln>
+        </p:spPr>
+        <p:style>
+          <a:lnRef idx="1">
+            <a:schemeClr val="accent1"/>
+          </a:lnRef>
+          <a:fillRef idx="3">
+            <a:schemeClr val="accent1"/>
+          </a:fillRef>
+          <a:effectRef idx="2">
+            <a:schemeClr val="accent1"/>
+          </a:effectRef>
+          <a:fontRef idx="minor">
+            <a:schemeClr val="lt1"/>
+          </a:fontRef>
+        </p:style>
+        <p:txBody>
+          <a:bodyPr rtlCol="0" anchor="ctr"/>
+          <a:lstStyle/>
+          <a:p>
+            <a:pPr algn="ctr"/>
+          </a:p>
+        </p:txBody>
+      </p:sp>
+      <p:sp>
+        <p:nvSpPr>
+          <p:cNvPr id="5" name="TextBox 4"/>
+          <p:cNvSpPr txBox="1"/>
+          <p:nvPr/>
+        </p:nvSpPr>
+        <p:spPr>
+          <a:xfrm>
+            <a:off x="1428750" y="590550"/>
+            <a:ext cx="15240000" cy="361950"/>
+          </a:xfrm>
+          <a:prstGeom prst="rect">
+            <a:avLst/>
+          </a:prstGeom>
+          <a:noFill/>
+        </p:spPr>
+        <p:txBody>
+          <a:bodyPr wrap="square">
+            <a:spAutoFit/>
+          </a:bodyPr>
+          <a:lstStyle/>
+          <a:p>
+            <a:pPr>
+              <a:defRPr sz="1575" b="1">
+                <a:solidFill>
+                  <a:srgbClr val="2F68B5"/>
+                </a:solidFill>
+                <a:latin typeface="프리텐다드"/>
+              </a:defRPr>
+            </a:pPr>
+            <a:r>
+              <a:t>❼ Gateway L2 · DPoP · 환자 동의 재검증</a:t>
+            </a:r>
+          </a:p>
+        </p:txBody>
+      </p:sp>
+      <p:sp>
+        <p:nvSpPr>
+          <p:cNvPr id="6" name="TextBox 5"/>
+          <p:cNvSpPr txBox="1"/>
+          <p:nvPr/>
+        </p:nvSpPr>
+        <p:spPr>
+          <a:xfrm>
+            <a:off x="1428750" y="962024"/>
+            <a:ext cx="15716250" cy="1314450"/>
+          </a:xfrm>
+          <a:prstGeom prst="rect">
+            <a:avLst/>
+          </a:prstGeom>
+          <a:noFill/>
+        </p:spPr>
+        <p:txBody>
+          <a:bodyPr wrap="square">
+            <a:spAutoFit/>
+          </a:bodyPr>
+          <a:lstStyle/>
+          <a:p>
+            <a:pPr>
+              <a:defRPr sz="3750" b="1">
+                <a:solidFill>
+                  <a:srgbClr val="17263A"/>
+                </a:solidFill>
+                <a:latin typeface="프리텐다드"/>
+              </a:defRPr>
+            </a:pPr>
+            <a:r>
+              <a:t>❼ Gateway L2 · DPoP · 환자 동의 재검증</a:t>
+            </a:r>
+          </a:p>
+        </p:txBody>
+      </p:sp>
+      <p:sp>
+        <p:nvSpPr>
+          <p:cNvPr id="7" name="TextBox 6"/>
+          <p:cNvSpPr txBox="1"/>
+          <p:nvPr/>
+        </p:nvSpPr>
+        <p:spPr>
+          <a:xfrm>
+            <a:off x="1028700" y="2686050"/>
+            <a:ext cx="16230600" cy="457200"/>
+          </a:xfrm>
+          <a:prstGeom prst="rect">
+            <a:avLst/>
+          </a:prstGeom>
+          <a:noFill/>
+        </p:spPr>
+        <p:txBody>
+          <a:bodyPr wrap="square">
+            <a:spAutoFit/>
+          </a:bodyPr>
+          <a:lstStyle/>
+          <a:p>
+            <a:pPr>
+              <a:defRPr sz="1875">
+                <a:solidFill>
+                  <a:srgbClr val="53657B"/>
+                </a:solidFill>
+                <a:latin typeface="프리텐다드"/>
+              </a:defRPr>
+            </a:pPr>
+            <a:r>
+              <a:t>가상 병원 B 게이트웨이 경계에서 토큰 서명 및 DPoP 바인딩 키 최종 확인</a:t>
+            </a:r>
+          </a:p>
+        </p:txBody>
+      </p:sp>
+      <p:sp>
+        <p:nvSpPr>
+          <p:cNvPr id="8" name="Rectangle 7"/>
+          <p:cNvSpPr/>
+          <p:nvPr/>
+        </p:nvSpPr>
+        <p:spPr>
+          <a:xfrm>
+            <a:off x="1028700" y="9582150"/>
+            <a:ext cx="16230600" cy="19050"/>
+          </a:xfrm>
+          <a:prstGeom prst="rect">
+            <a:avLst/>
+          </a:prstGeom>
+          <a:solidFill>
+            <a:srgbClr val="D8E0E9"/>
+          </a:solidFill>
+          <a:ln>
+            <a:noFill/>
+          </a:ln>
+        </p:spPr>
+        <p:style>
+          <a:lnRef idx="1">
+            <a:schemeClr val="accent1"/>
+          </a:lnRef>
+          <a:fillRef idx="3">
+            <a:schemeClr val="accent1"/>
+          </a:fillRef>
+          <a:effectRef idx="2">
+            <a:schemeClr val="accent1"/>
+          </a:effectRef>
+          <a:fontRef idx="minor">
+            <a:schemeClr val="lt1"/>
+          </a:fontRef>
+        </p:style>
+        <p:txBody>
+          <a:bodyPr rtlCol="0" anchor="ctr"/>
+          <a:lstStyle/>
+          <a:p>
+            <a:pPr algn="ctr"/>
+          </a:p>
+        </p:txBody>
+      </p:sp>
+      <p:sp>
+        <p:nvSpPr>
+          <p:cNvPr id="9" name="TextBox 8"/>
+          <p:cNvSpPr txBox="1"/>
+          <p:nvPr/>
+        </p:nvSpPr>
+        <p:spPr>
+          <a:xfrm>
+            <a:off x="1028700" y="9658350"/>
+            <a:ext cx="11430000" cy="295275"/>
+          </a:xfrm>
+          <a:prstGeom prst="rect">
+            <a:avLst/>
+          </a:prstGeom>
+          <a:noFill/>
+        </p:spPr>
+        <p:txBody>
+          <a:bodyPr wrap="none">
+            <a:spAutoFit/>
+          </a:bodyPr>
+          <a:lstStyle/>
+          <a:p>
+            <a:pPr>
+              <a:defRPr sz="1275">
+                <a:solidFill>
+                  <a:srgbClr val="7B8A9B"/>
+                </a:solidFill>
+                <a:latin typeface="프리텐다드"/>
+              </a:defRPr>
+            </a:pPr>
+            <a:r>
+              <a:t>Medi Q  /  합성 데이터 · 비임상 기술 PoC  ·  아키텍처 모션 워크스루</a:t>
+            </a:r>
+          </a:p>
+        </p:txBody>
+      </p:sp>
+      <p:sp>
+        <p:nvSpPr>
+          <p:cNvPr id="10" name="TextBox 9"/>
+          <p:cNvSpPr txBox="1"/>
+          <p:nvPr/>
+        </p:nvSpPr>
+        <p:spPr>
+          <a:xfrm>
+            <a:off x="15240000" y="9658350"/>
+            <a:ext cx="2019300" cy="295275"/>
+          </a:xfrm>
+          <a:prstGeom prst="rect">
+            <a:avLst/>
+          </a:prstGeom>
+          <a:noFill/>
+        </p:spPr>
+        <p:txBody>
+          <a:bodyPr wrap="none">
+            <a:spAutoFit/>
+          </a:bodyPr>
+          <a:lstStyle/>
+          <a:p>
+            <a:pPr algn="r">
+              <a:defRPr sz="1275" b="1">
+                <a:solidFill>
+                  <a:srgbClr val="7B8A9B"/>
+                </a:solidFill>
+                <a:latin typeface="프리텐다드"/>
+              </a:defRPr>
+            </a:pPr>
+            <a:r>
+              <a:t>10  /  16</a:t>
+            </a:r>
+          </a:p>
+        </p:txBody>
+      </p:sp>
+      <p:sp>
+        <p:nvSpPr>
+          <p:cNvPr id="11" name="Rounded Rectangle 10"/>
+          <p:cNvSpPr/>
+          <p:nvPr/>
+        </p:nvSpPr>
+        <p:spPr>
+          <a:xfrm>
+            <a:off x="1028700" y="3333750"/>
+            <a:ext cx="10477500" cy="5905500"/>
+          </a:xfrm>
+          <a:prstGeom prst="roundRect">
+            <a:avLst/>
+          </a:prstGeom>
+          <a:solidFill>
+            <a:srgbClr val="FFFFFF"/>
+          </a:solidFill>
+          <a:ln w="19050">
+            <a:solidFill>
+              <a:srgbClr val="D8E0E9"/>
+            </a:solidFill>
+          </a:ln>
+        </p:spPr>
+        <p:style>
+          <a:lnRef idx="1">
+            <a:schemeClr val="accent1"/>
+          </a:lnRef>
+          <a:fillRef idx="3">
+            <a:schemeClr val="accent1"/>
+          </a:fillRef>
+          <a:effectRef idx="2">
+            <a:schemeClr val="accent1"/>
+          </a:effectRef>
+          <a:fontRef idx="minor">
+            <a:schemeClr val="lt1"/>
+          </a:fontRef>
+        </p:style>
+        <p:txBody>
+          <a:bodyPr rtlCol="0" anchor="ctr"/>
+          <a:lstStyle/>
+          <a:p>
+            <a:pPr algn="ctr"/>
+          </a:p>
+        </p:txBody>
+      </p:sp>
+      <p:pic>
+        <p:nvPicPr>
+          <p:cNvPr id="12" name="Picture 11" descr="mediq_architecture_flow.png"/>
+          <p:cNvPicPr>
+            <a:picLocks noChangeAspect="1"/>
+          </p:cNvPicPr>
+          <p:nvPr/>
+        </p:nvPicPr>
+        <p:blipFill>
+          <a:blip r:embed="rId2"/>
+          <a:stretch>
+            <a:fillRect/>
+          </a:stretch>
+        </p:blipFill>
+        <p:spPr>
+          <a:xfrm>
+            <a:off x="1123950" y="3429000"/>
+            <a:ext cx="10287000" cy="5789514"/>
+          </a:xfrm>
+          <a:prstGeom prst="rect">
+            <a:avLst/>
+          </a:prstGeom>
+        </p:spPr>
+      </p:pic>
+      <p:sp>
+        <p:nvSpPr>
+          <p:cNvPr id="13" name="Rectangle 12"/>
+          <p:cNvSpPr/>
+          <p:nvPr/>
+        </p:nvSpPr>
+        <p:spPr>
+          <a:xfrm>
+            <a:off x="10106617" y="6443730"/>
+            <a:ext cx="1168977" cy="522963"/>
+          </a:xfrm>
+          <a:prstGeom prst="rect">
+            <a:avLst/>
+          </a:prstGeom>
+          <a:noFill/>
+          <a:ln w="44450">
+            <a:solidFill>
+              <a:srgbClr val="2F68B5"/>
+            </a:solidFill>
+          </a:ln>
+        </p:spPr>
+        <p:style>
+          <a:lnRef idx="1">
+            <a:schemeClr val="accent1"/>
+          </a:lnRef>
+          <a:fillRef idx="3">
+            <a:schemeClr val="accent1"/>
+          </a:fillRef>
+          <a:effectRef idx="2">
+            <a:schemeClr val="accent1"/>
+          </a:effectRef>
+          <a:fontRef idx="minor">
+            <a:schemeClr val="lt1"/>
+          </a:fontRef>
+        </p:style>
+        <p:txBody>
+          <a:bodyPr rtlCol="0" anchor="ctr"/>
+          <a:lstStyle/>
+          <a:p>
+            <a:pPr algn="ctr"/>
+          </a:p>
+        </p:txBody>
+      </p:sp>
+      <p:sp>
+        <p:nvSpPr>
+          <p:cNvPr id="14" name="Rounded Rectangle 13"/>
+          <p:cNvSpPr/>
+          <p:nvPr/>
+        </p:nvSpPr>
+        <p:spPr>
+          <a:xfrm>
+            <a:off x="11811000" y="3333750"/>
+            <a:ext cx="5448300" cy="5905500"/>
+          </a:xfrm>
+          <a:prstGeom prst="roundRect">
+            <a:avLst/>
+          </a:prstGeom>
+          <a:solidFill>
+            <a:srgbClr val="F3F6FA"/>
+          </a:solidFill>
+          <a:ln w="19050">
+            <a:solidFill>
+              <a:srgbClr val="D8E0E9"/>
+            </a:solidFill>
+          </a:ln>
+        </p:spPr>
+        <p:style>
+          <a:lnRef idx="1">
+            <a:schemeClr val="accent1"/>
+          </a:lnRef>
+          <a:fillRef idx="3">
+            <a:schemeClr val="accent1"/>
+          </a:fillRef>
+          <a:effectRef idx="2">
+            <a:schemeClr val="accent1"/>
+          </a:effectRef>
+          <a:fontRef idx="minor">
+            <a:schemeClr val="lt1"/>
+          </a:fontRef>
+        </p:style>
+        <p:txBody>
+          <a:bodyPr rtlCol="0" anchor="ctr"/>
+          <a:lstStyle/>
+          <a:p>
+            <a:pPr algn="ctr"/>
+          </a:p>
+        </p:txBody>
+      </p:sp>
+      <p:sp>
+        <p:nvSpPr>
+          <p:cNvPr id="15" name="Rounded Rectangle 14"/>
+          <p:cNvSpPr/>
+          <p:nvPr/>
+        </p:nvSpPr>
+        <p:spPr>
+          <a:xfrm>
+            <a:off x="12096750" y="3619500"/>
+            <a:ext cx="1714500" cy="400050"/>
+          </a:xfrm>
+          <a:prstGeom prst="roundRect">
+            <a:avLst/>
+          </a:prstGeom>
+          <a:solidFill>
+            <a:srgbClr val="2F68B5"/>
+          </a:solidFill>
+          <a:ln>
+            <a:noFill/>
+          </a:ln>
+        </p:spPr>
+        <p:style>
+          <a:lnRef idx="1">
+            <a:schemeClr val="accent1"/>
+          </a:lnRef>
+          <a:fillRef idx="3">
+            <a:schemeClr val="accent1"/>
+          </a:fillRef>
+          <a:effectRef idx="2">
+            <a:schemeClr val="accent1"/>
+          </a:effectRef>
+          <a:fontRef idx="minor">
+            <a:schemeClr val="lt1"/>
+          </a:fontRef>
+        </p:style>
+        <p:txBody>
+          <a:bodyPr rtlCol="0" anchor="ctr"/>
+          <a:lstStyle/>
+          <a:p>
+            <a:pPr algn="ctr">
+              <a:defRPr sz="1425" b="1">
+                <a:solidFill>
+                  <a:srgbClr val="FFFFFF"/>
+                </a:solidFill>
+                <a:latin typeface="프리텐다드"/>
+              </a:defRPr>
+            </a:pPr>
+            <a:r>
+              <a:t>STEP 07 / 08</a:t>
+            </a:r>
+          </a:p>
+        </p:txBody>
+      </p:sp>
+      <p:sp>
+        <p:nvSpPr>
+          <p:cNvPr id="16" name="TextBox 15"/>
+          <p:cNvSpPr txBox="1"/>
+          <p:nvPr/>
+        </p:nvSpPr>
+        <p:spPr>
+          <a:xfrm>
+            <a:off x="12096750" y="4190999"/>
+            <a:ext cx="4876800" cy="476250"/>
+          </a:xfrm>
+          <a:prstGeom prst="rect">
+            <a:avLst/>
+          </a:prstGeom>
+          <a:noFill/>
+        </p:spPr>
+        <p:txBody>
+          <a:bodyPr wrap="none">
+            <a:spAutoFit/>
+          </a:bodyPr>
+          <a:lstStyle/>
+          <a:p>
+            <a:pPr>
+              <a:defRPr sz="2025" b="1">
+                <a:solidFill>
+                  <a:srgbClr val="17263A"/>
+                </a:solidFill>
+                <a:latin typeface="프리텐다드"/>
+              </a:defRPr>
+            </a:pPr>
+            <a:r>
+              <a:t>가상 병원 B (Portal / Gateway)</a:t>
+            </a:r>
+          </a:p>
+        </p:txBody>
+      </p:sp>
+      <p:sp>
+        <p:nvSpPr>
+          <p:cNvPr id="17" name="TextBox 16"/>
+          <p:cNvSpPr txBox="1"/>
+          <p:nvPr/>
+        </p:nvSpPr>
+        <p:spPr>
+          <a:xfrm>
+            <a:off x="12096750" y="4714875"/>
+            <a:ext cx="4876800" cy="714375"/>
+          </a:xfrm>
+          <a:prstGeom prst="rect">
+            <a:avLst/>
+          </a:prstGeom>
+          <a:noFill/>
+        </p:spPr>
+        <p:txBody>
+          <a:bodyPr wrap="none">
+            <a:spAutoFit/>
+          </a:bodyPr>
+          <a:lstStyle/>
+          <a:p>
+            <a:pPr>
+              <a:defRPr sz="1425">
+                <a:solidFill>
+                  <a:srgbClr val="53657B"/>
+                </a:solidFill>
+                <a:latin typeface="프리텐다드"/>
+              </a:defRPr>
+            </a:pPr>
+            <a:r>
+              <a:t>수신 병원 내부망 진입 전, 발급된 단기 토큰과 DPoP 암호화 증명, 환자 동의 범위를 게이트웨이가 최종 재확인합니다.</a:t>
+            </a:r>
+          </a:p>
+        </p:txBody>
+      </p:sp>
+      <p:sp>
+        <p:nvSpPr>
+          <p:cNvPr id="18" name="Rounded Rectangle 17"/>
+          <p:cNvSpPr/>
+          <p:nvPr/>
+        </p:nvSpPr>
+        <p:spPr>
+          <a:xfrm>
+            <a:off x="12096750" y="5524500"/>
+            <a:ext cx="4876800" cy="1143000"/>
+          </a:xfrm>
+          <a:prstGeom prst="roundRect">
+            <a:avLst/>
+          </a:prstGeom>
+          <a:solidFill>
+            <a:srgbClr val="FFFFFF"/>
+          </a:solidFill>
+          <a:ln w="19050">
+            <a:solidFill>
+              <a:srgbClr val="2F68B5"/>
+            </a:solidFill>
+          </a:ln>
+        </p:spPr>
+        <p:style>
+          <a:lnRef idx="1">
+            <a:schemeClr val="accent1"/>
+          </a:lnRef>
+          <a:fillRef idx="3">
+            <a:schemeClr val="accent1"/>
+          </a:fillRef>
+          <a:effectRef idx="2">
+            <a:schemeClr val="accent1"/>
+          </a:effectRef>
+          <a:fontRef idx="minor">
+            <a:schemeClr val="lt1"/>
+          </a:fontRef>
+        </p:style>
+        <p:txBody>
+          <a:bodyPr rtlCol="0" anchor="ctr" lIns="152400" tIns="152400"/>
+          <a:lstStyle/>
+          <a:p>
+            <a:pPr algn="ctr">
+              <a:defRPr sz="1350" b="1">
+                <a:solidFill>
+                  <a:srgbClr val="2F68B5"/>
+                </a:solidFill>
+                <a:latin typeface="프리텐다드"/>
+              </a:defRPr>
+            </a:pPr>
+            <a:r>
+              <a:t>[심층 방어] 게이트웨이 독립 검증</a:t>
+            </a:r>
+          </a:p>
+          <a:p>
+            <a:pPr>
+              <a:defRPr sz="1200">
+                <a:solidFill>
+                  <a:srgbClr val="17263A"/>
+                </a:solidFill>
+                <a:latin typeface="프리텐다드"/>
+              </a:defRPr>
+            </a:pPr>
+            <a:r>
+              <a:t>클라우드 신뢰에만 의존하지 않고 병원 데이터 진입 게이트웨이에서 다중 보안 검증을 수행하여 위조를 원천 차단합니다.</a:t>
+            </a:r>
+          </a:p>
+        </p:txBody>
+      </p:sp>
+      <p:sp>
+        <p:nvSpPr>
+          <p:cNvPr id="19" name="TextBox 18"/>
+          <p:cNvSpPr txBox="1"/>
+          <p:nvPr/>
+        </p:nvSpPr>
+        <p:spPr>
+          <a:xfrm>
+            <a:off x="12096750" y="6810375"/>
+            <a:ext cx="4876800" cy="2190750"/>
+          </a:xfrm>
+          <a:prstGeom prst="rect">
+            <a:avLst/>
+          </a:prstGeom>
+          <a:noFill/>
+        </p:spPr>
+        <p:txBody>
+          <a:bodyPr wrap="none">
+            <a:spAutoFit/>
+          </a:bodyPr>
+          <a:lstStyle/>
+          <a:p/>
+          <a:p>
+            <a:pPr>
+              <a:spcAft>
+                <a:spcPts val="800"/>
+              </a:spcAft>
+              <a:defRPr sz="1387">
+                <a:solidFill>
+                  <a:srgbClr val="17263A"/>
+                </a:solidFill>
+                <a:latin typeface="프리텐다드"/>
+              </a:defRPr>
+            </a:pPr>
+            <a:r>
+              <a:t>•  B 전용 HTTPS TLS 터널링 및 복호화 검증</a:t>
+            </a:r>
+          </a:p>
+          <a:p>
+            <a:pPr>
+              <a:spcAft>
+                <a:spcPts val="800"/>
+              </a:spcAft>
+              <a:defRPr sz="1387">
+                <a:solidFill>
+                  <a:srgbClr val="17263A"/>
+                </a:solidFill>
+                <a:latin typeface="프리텐다드"/>
+              </a:defRPr>
+            </a:pPr>
+            <a:r>
+              <a:t>•  DPoP-bound 단기 토큰과 요청 스코프 일치 확인</a:t>
+            </a:r>
+          </a:p>
+          <a:p>
+            <a:pPr>
+              <a:spcAft>
+                <a:spcPts val="800"/>
+              </a:spcAft>
+              <a:defRPr sz="1387">
+                <a:solidFill>
+                  <a:srgbClr val="17263A"/>
+                </a:solidFill>
+                <a:latin typeface="프리텐다드"/>
+              </a:defRPr>
+            </a:pPr>
+            <a:r>
+              <a:t>•  승인된 영상에 한해서만 수신 및 휘발성 열람 허용</a:t>
+            </a:r>
+          </a:p>
+        </p:txBody>
+      </p:sp>
+    </p:spTree>
+  </p:cSld>
+  <p:clrMapOvr>
+    <a:masterClrMapping/>
+  </p:clrMapOvr>
+  <p:transition xmlns:p15="http://schemas.microsoft.com/office/powerpoint/2012/main">
+    <p:extLst>
+      <p:ext uri="{EFA19261-F742-4948-AE17-10779776E6A2}">
+        <p15:morph option="byObject"/>
+      </p:ext>
+    </p:extLst>
+  </p:transition>
+</p:sld>
+</file>
+
+<file path=ppt/slides/slide11.xml><?xml version="1.0" encoding="utf-8"?>
+<p:sld xmlns:a="http://schemas.openxmlformats.org/drawingml/2006/main" xmlns:p="http://schemas.openxmlformats.org/presentationml/2006/main" xmlns:r="http://schemas.openxmlformats.org/officeDocument/2006/relationships">
+  <p:cSld>
+    <p:spTree>
+      <p:nvGrpSpPr>
+        <p:cNvPr id="1" name=""/>
+        <p:cNvGrpSpPr/>
+        <p:nvPr/>
+      </p:nvGrpSpPr>
+      <p:grpSpPr/>
+      <p:sp>
+        <p:nvSpPr>
+          <p:cNvPr id="2" name="Rectangle 1"/>
+          <p:cNvSpPr/>
+          <p:nvPr/>
+        </p:nvSpPr>
+        <p:spPr>
+          <a:xfrm>
+            <a:off x="0" y="0"/>
+            <a:ext cx="18288000" cy="10287000"/>
+          </a:xfrm>
+          <a:prstGeom prst="rect">
+            <a:avLst/>
+          </a:prstGeom>
+          <a:solidFill>
+            <a:srgbClr val="FFFFFF"/>
+          </a:solidFill>
+          <a:ln>
+            <a:noFill/>
+          </a:ln>
+        </p:spPr>
+        <p:style>
+          <a:lnRef idx="1">
+            <a:schemeClr val="accent1"/>
+          </a:lnRef>
+          <a:fillRef idx="3">
+            <a:schemeClr val="accent1"/>
+          </a:fillRef>
+          <a:effectRef idx="2">
+            <a:schemeClr val="accent1"/>
+          </a:effectRef>
+          <a:fontRef idx="minor">
+            <a:schemeClr val="lt1"/>
+          </a:fontRef>
+        </p:style>
+        <p:txBody>
+          <a:bodyPr rtlCol="0" anchor="ctr"/>
+          <a:lstStyle/>
+          <a:p>
+            <a:pPr algn="ctr"/>
+          </a:p>
+        </p:txBody>
+      </p:sp>
+      <p:sp>
+        <p:nvSpPr>
+          <p:cNvPr id="3" name="Rectangle 2"/>
+          <p:cNvSpPr/>
+          <p:nvPr/>
+        </p:nvSpPr>
+        <p:spPr>
+          <a:xfrm>
+            <a:off x="0" y="0"/>
+            <a:ext cx="18288000" cy="2457450"/>
+          </a:xfrm>
+          <a:prstGeom prst="rect">
+            <a:avLst/>
+          </a:prstGeom>
+          <a:solidFill>
+            <a:srgbClr val="F3F6FA"/>
+          </a:solidFill>
+          <a:ln>
+            <a:noFill/>
+          </a:ln>
+        </p:spPr>
+        <p:style>
+          <a:lnRef idx="1">
+            <a:schemeClr val="accent1"/>
+          </a:lnRef>
+          <a:fillRef idx="3">
+            <a:schemeClr val="accent1"/>
+          </a:fillRef>
+          <a:effectRef idx="2">
+            <a:schemeClr val="accent1"/>
+          </a:effectRef>
+          <a:fontRef idx="minor">
+            <a:schemeClr val="lt1"/>
+          </a:fontRef>
+        </p:style>
+        <p:txBody>
+          <a:bodyPr rtlCol="0" anchor="ctr"/>
+          <a:lstStyle/>
+          <a:p>
+            <a:pPr algn="ctr"/>
+          </a:p>
+        </p:txBody>
+      </p:sp>
+      <p:sp>
+        <p:nvSpPr>
+          <p:cNvPr id="4" name="Rectangle 3"/>
+          <p:cNvSpPr/>
+          <p:nvPr/>
+        </p:nvSpPr>
+        <p:spPr>
+          <a:xfrm>
+            <a:off x="1028700" y="723900"/>
+            <a:ext cx="76200" cy="1257300"/>
+          </a:xfrm>
+          <a:prstGeom prst="rect">
+            <a:avLst/>
+          </a:prstGeom>
+          <a:solidFill>
+            <a:srgbClr val="2F68B5"/>
+          </a:solidFill>
+          <a:ln>
+            <a:noFill/>
+          </a:ln>
+        </p:spPr>
+        <p:style>
+          <a:lnRef idx="1">
+            <a:schemeClr val="accent1"/>
+          </a:lnRef>
+          <a:fillRef idx="3">
+            <a:schemeClr val="accent1"/>
+          </a:fillRef>
+          <a:effectRef idx="2">
+            <a:schemeClr val="accent1"/>
+          </a:effectRef>
+          <a:fontRef idx="minor">
+            <a:schemeClr val="lt1"/>
+          </a:fontRef>
+        </p:style>
+        <p:txBody>
+          <a:bodyPr rtlCol="0" anchor="ctr"/>
+          <a:lstStyle/>
+          <a:p>
+            <a:pPr algn="ctr"/>
+          </a:p>
+        </p:txBody>
+      </p:sp>
+      <p:sp>
+        <p:nvSpPr>
+          <p:cNvPr id="5" name="TextBox 4"/>
+          <p:cNvSpPr txBox="1"/>
+          <p:nvPr/>
+        </p:nvSpPr>
+        <p:spPr>
+          <a:xfrm>
+            <a:off x="1428750" y="590550"/>
+            <a:ext cx="15240000" cy="361950"/>
+          </a:xfrm>
+          <a:prstGeom prst="rect">
+            <a:avLst/>
+          </a:prstGeom>
+          <a:noFill/>
+        </p:spPr>
+        <p:txBody>
+          <a:bodyPr wrap="square">
+            <a:spAutoFit/>
+          </a:bodyPr>
+          <a:lstStyle/>
+          <a:p>
+            <a:pPr>
+              <a:defRPr sz="1575" b="1">
+                <a:solidFill>
+                  <a:srgbClr val="2F68B5"/>
+                </a:solidFill>
+                <a:latin typeface="프리텐다드"/>
+              </a:defRPr>
+            </a:pPr>
+            <a:r>
+              <a:t>❽ 승인된 영상만 WireGuard 직통 스트리밍</a:t>
+            </a:r>
+          </a:p>
+        </p:txBody>
+      </p:sp>
+      <p:sp>
+        <p:nvSpPr>
+          <p:cNvPr id="6" name="TextBox 5"/>
+          <p:cNvSpPr txBox="1"/>
+          <p:nvPr/>
+        </p:nvSpPr>
+        <p:spPr>
+          <a:xfrm>
+            <a:off x="1428750" y="962024"/>
+            <a:ext cx="15716250" cy="1314450"/>
+          </a:xfrm>
+          <a:prstGeom prst="rect">
+            <a:avLst/>
+          </a:prstGeom>
+          <a:noFill/>
+        </p:spPr>
+        <p:txBody>
+          <a:bodyPr wrap="square">
+            <a:spAutoFit/>
+          </a:bodyPr>
+          <a:lstStyle/>
+          <a:p>
+            <a:pPr>
+              <a:defRPr sz="3750" b="1">
+                <a:solidFill>
+                  <a:srgbClr val="17263A"/>
+                </a:solidFill>
+                <a:latin typeface="프리텐다드"/>
+              </a:defRPr>
+            </a:pPr>
+            <a:r>
+              <a:t>❽ 승인된 영상만 WireGuard 직통 스트리밍</a:t>
+            </a:r>
+          </a:p>
+        </p:txBody>
+      </p:sp>
+      <p:sp>
+        <p:nvSpPr>
+          <p:cNvPr id="7" name="TextBox 6"/>
+          <p:cNvSpPr txBox="1"/>
+          <p:nvPr/>
+        </p:nvSpPr>
+        <p:spPr>
+          <a:xfrm>
+            <a:off x="1028700" y="2686050"/>
+            <a:ext cx="16230600" cy="457200"/>
+          </a:xfrm>
+          <a:prstGeom prst="rect">
+            <a:avLst/>
+          </a:prstGeom>
+          <a:noFill/>
+        </p:spPr>
+        <p:txBody>
+          <a:bodyPr wrap="square">
+            <a:spAutoFit/>
+          </a:bodyPr>
+          <a:lstStyle/>
+          <a:p>
+            <a:pPr>
+              <a:defRPr sz="1875">
+                <a:solidFill>
+                  <a:srgbClr val="53657B"/>
+                </a:solidFill>
+                <a:latin typeface="프리텐다드"/>
+              </a:defRPr>
+            </a:pPr>
+            <a:r>
+              <a:t>A병원 Orthanc PACS에서 B병원으로 700장 복부 CT 무지연 스트리밍 &amp; LUKS2 암호화</a:t>
+            </a:r>
+          </a:p>
+        </p:txBody>
+      </p:sp>
+      <p:sp>
+        <p:nvSpPr>
+          <p:cNvPr id="8" name="Rectangle 7"/>
+          <p:cNvSpPr/>
+          <p:nvPr/>
+        </p:nvSpPr>
+        <p:spPr>
+          <a:xfrm>
+            <a:off x="1028700" y="9582150"/>
+            <a:ext cx="16230600" cy="19050"/>
+          </a:xfrm>
+          <a:prstGeom prst="rect">
+            <a:avLst/>
+          </a:prstGeom>
+          <a:solidFill>
+            <a:srgbClr val="D8E0E9"/>
+          </a:solidFill>
+          <a:ln>
+            <a:noFill/>
+          </a:ln>
+        </p:spPr>
+        <p:style>
+          <a:lnRef idx="1">
+            <a:schemeClr val="accent1"/>
+          </a:lnRef>
+          <a:fillRef idx="3">
+            <a:schemeClr val="accent1"/>
+          </a:fillRef>
+          <a:effectRef idx="2">
+            <a:schemeClr val="accent1"/>
+          </a:effectRef>
+          <a:fontRef idx="minor">
+            <a:schemeClr val="lt1"/>
+          </a:fontRef>
+        </p:style>
+        <p:txBody>
+          <a:bodyPr rtlCol="0" anchor="ctr"/>
+          <a:lstStyle/>
+          <a:p>
+            <a:pPr algn="ctr"/>
+          </a:p>
+        </p:txBody>
+      </p:sp>
+      <p:sp>
+        <p:nvSpPr>
+          <p:cNvPr id="9" name="TextBox 8"/>
+          <p:cNvSpPr txBox="1"/>
+          <p:nvPr/>
+        </p:nvSpPr>
+        <p:spPr>
+          <a:xfrm>
+            <a:off x="1028700" y="9658350"/>
+            <a:ext cx="11430000" cy="295275"/>
+          </a:xfrm>
+          <a:prstGeom prst="rect">
+            <a:avLst/>
+          </a:prstGeom>
+          <a:noFill/>
+        </p:spPr>
+        <p:txBody>
+          <a:bodyPr wrap="none">
+            <a:spAutoFit/>
+          </a:bodyPr>
+          <a:lstStyle/>
+          <a:p>
+            <a:pPr>
+              <a:defRPr sz="1275">
+                <a:solidFill>
+                  <a:srgbClr val="7B8A9B"/>
+                </a:solidFill>
+                <a:latin typeface="프리텐다드"/>
+              </a:defRPr>
+            </a:pPr>
+            <a:r>
+              <a:t>Medi Q  /  합성 데이터 · 비임상 기술 PoC  ·  아키텍처 모션 워크스루</a:t>
+            </a:r>
+          </a:p>
+        </p:txBody>
+      </p:sp>
+      <p:sp>
+        <p:nvSpPr>
+          <p:cNvPr id="10" name="TextBox 9"/>
+          <p:cNvSpPr txBox="1"/>
+          <p:nvPr/>
+        </p:nvSpPr>
+        <p:spPr>
+          <a:xfrm>
+            <a:off x="15240000" y="9658350"/>
+            <a:ext cx="2019300" cy="295275"/>
+          </a:xfrm>
+          <a:prstGeom prst="rect">
+            <a:avLst/>
+          </a:prstGeom>
+          <a:noFill/>
+        </p:spPr>
+        <p:txBody>
+          <a:bodyPr wrap="none">
+            <a:spAutoFit/>
+          </a:bodyPr>
+          <a:lstStyle/>
+          <a:p>
+            <a:pPr algn="r">
+              <a:defRPr sz="1275" b="1">
+                <a:solidFill>
+                  <a:srgbClr val="7B8A9B"/>
+                </a:solidFill>
+                <a:latin typeface="프리텐다드"/>
+              </a:defRPr>
+            </a:pPr>
+            <a:r>
+              <a:t>11  /  16</a:t>
+            </a:r>
+          </a:p>
+        </p:txBody>
+      </p:sp>
+      <p:sp>
+        <p:nvSpPr>
+          <p:cNvPr id="11" name="Rounded Rectangle 10"/>
+          <p:cNvSpPr/>
+          <p:nvPr/>
+        </p:nvSpPr>
+        <p:spPr>
+          <a:xfrm>
+            <a:off x="1028700" y="3333750"/>
+            <a:ext cx="10477500" cy="5905500"/>
+          </a:xfrm>
+          <a:prstGeom prst="roundRect">
+            <a:avLst/>
+          </a:prstGeom>
+          <a:solidFill>
+            <a:srgbClr val="FFFFFF"/>
+          </a:solidFill>
+          <a:ln w="19050">
+            <a:solidFill>
+              <a:srgbClr val="D8E0E9"/>
+            </a:solidFill>
+          </a:ln>
+        </p:spPr>
+        <p:style>
+          <a:lnRef idx="1">
+            <a:schemeClr val="accent1"/>
+          </a:lnRef>
+          <a:fillRef idx="3">
+            <a:schemeClr val="accent1"/>
+          </a:fillRef>
+          <a:effectRef idx="2">
+            <a:schemeClr val="accent1"/>
+          </a:effectRef>
+          <a:fontRef idx="minor">
+            <a:schemeClr val="lt1"/>
+          </a:fontRef>
+        </p:style>
+        <p:txBody>
+          <a:bodyPr rtlCol="0" anchor="ctr"/>
+          <a:lstStyle/>
+          <a:p>
+            <a:pPr algn="ctr"/>
+          </a:p>
+        </p:txBody>
+      </p:sp>
+      <p:pic>
+        <p:nvPicPr>
+          <p:cNvPr id="12" name="Picture 11" descr="mediq_architecture_flow.png"/>
+          <p:cNvPicPr>
+            <a:picLocks noChangeAspect="1"/>
+          </p:cNvPicPr>
+          <p:nvPr/>
+        </p:nvPicPr>
+        <p:blipFill>
+          <a:blip r:embed="rId2"/>
+          <a:stretch>
+            <a:fillRect/>
+          </a:stretch>
+        </p:blipFill>
+        <p:spPr>
+          <a:xfrm>
+            <a:off x="1123950" y="3429000"/>
+            <a:ext cx="10287000" cy="5789514"/>
+          </a:xfrm>
+          <a:prstGeom prst="rect">
+            <a:avLst/>
+          </a:prstGeom>
+        </p:spPr>
+      </p:pic>
+      <p:sp>
+        <p:nvSpPr>
+          <p:cNvPr id="13" name="Rectangle 12"/>
+          <p:cNvSpPr/>
+          <p:nvPr/>
+        </p:nvSpPr>
+        <p:spPr>
+          <a:xfrm>
+            <a:off x="8383914" y="3951963"/>
+            <a:ext cx="2953205" cy="4245233"/>
+          </a:xfrm>
+          <a:prstGeom prst="rect">
+            <a:avLst/>
+          </a:prstGeom>
+          <a:noFill/>
+          <a:ln w="44450">
+            <a:solidFill>
+              <a:srgbClr val="C64A4A"/>
+            </a:solidFill>
+          </a:ln>
+        </p:spPr>
+        <p:style>
+          <a:lnRef idx="1">
+            <a:schemeClr val="accent1"/>
+          </a:lnRef>
+          <a:fillRef idx="3">
+            <a:schemeClr val="accent1"/>
+          </a:fillRef>
+          <a:effectRef idx="2">
+            <a:schemeClr val="accent1"/>
+          </a:effectRef>
+          <a:fontRef idx="minor">
+            <a:schemeClr val="lt1"/>
+          </a:fontRef>
+        </p:style>
+        <p:txBody>
+          <a:bodyPr rtlCol="0" anchor="ctr"/>
+          <a:lstStyle/>
+          <a:p>
+            <a:pPr algn="ctr"/>
+          </a:p>
+        </p:txBody>
+      </p:sp>
+      <p:sp>
+        <p:nvSpPr>
+          <p:cNvPr id="14" name="Rounded Rectangle 13"/>
+          <p:cNvSpPr/>
+          <p:nvPr/>
+        </p:nvSpPr>
+        <p:spPr>
+          <a:xfrm>
+            <a:off x="11811000" y="3333750"/>
+            <a:ext cx="5448300" cy="5905500"/>
+          </a:xfrm>
+          <a:prstGeom prst="roundRect">
+            <a:avLst/>
+          </a:prstGeom>
+          <a:solidFill>
+            <a:srgbClr val="F3F6FA"/>
+          </a:solidFill>
+          <a:ln w="19050">
+            <a:solidFill>
+              <a:srgbClr val="D8E0E9"/>
+            </a:solidFill>
+          </a:ln>
+        </p:spPr>
+        <p:style>
+          <a:lnRef idx="1">
+            <a:schemeClr val="accent1"/>
+          </a:lnRef>
+          <a:fillRef idx="3">
+            <a:schemeClr val="accent1"/>
+          </a:fillRef>
+          <a:effectRef idx="2">
+            <a:schemeClr val="accent1"/>
+          </a:effectRef>
+          <a:fontRef idx="minor">
+            <a:schemeClr val="lt1"/>
+          </a:fontRef>
+        </p:style>
+        <p:txBody>
+          <a:bodyPr rtlCol="0" anchor="ctr"/>
+          <a:lstStyle/>
+          <a:p>
+            <a:pPr algn="ctr"/>
+          </a:p>
+        </p:txBody>
+      </p:sp>
+      <p:sp>
+        <p:nvSpPr>
+          <p:cNvPr id="15" name="Rounded Rectangle 14"/>
+          <p:cNvSpPr/>
+          <p:nvPr/>
+        </p:nvSpPr>
+        <p:spPr>
+          <a:xfrm>
+            <a:off x="12096750" y="3619500"/>
+            <a:ext cx="1714500" cy="400050"/>
+          </a:xfrm>
+          <a:prstGeom prst="roundRect">
+            <a:avLst/>
+          </a:prstGeom>
+          <a:solidFill>
+            <a:srgbClr val="C64A4A"/>
+          </a:solidFill>
+          <a:ln>
+            <a:noFill/>
+          </a:ln>
+        </p:spPr>
+        <p:style>
+          <a:lnRef idx="1">
+            <a:schemeClr val="accent1"/>
+          </a:lnRef>
+          <a:fillRef idx="3">
+            <a:schemeClr val="accent1"/>
+          </a:fillRef>
+          <a:effectRef idx="2">
+            <a:schemeClr val="accent1"/>
+          </a:effectRef>
+          <a:fontRef idx="minor">
+            <a:schemeClr val="lt1"/>
+          </a:fontRef>
+        </p:style>
+        <p:txBody>
+          <a:bodyPr rtlCol="0" anchor="ctr"/>
+          <a:lstStyle/>
+          <a:p>
+            <a:pPr algn="ctr">
+              <a:defRPr sz="1425" b="1">
+                <a:solidFill>
+                  <a:srgbClr val="FFFFFF"/>
+                </a:solidFill>
+                <a:latin typeface="프리텐다드"/>
+              </a:defRPr>
+            </a:pPr>
+            <a:r>
+              <a:t>STEP 08 / 08</a:t>
+            </a:r>
+          </a:p>
+        </p:txBody>
+      </p:sp>
+      <p:sp>
+        <p:nvSpPr>
+          <p:cNvPr id="16" name="TextBox 15"/>
+          <p:cNvSpPr txBox="1"/>
+          <p:nvPr/>
+        </p:nvSpPr>
+        <p:spPr>
+          <a:xfrm>
+            <a:off x="12096750" y="4190999"/>
+            <a:ext cx="4876800" cy="476250"/>
+          </a:xfrm>
+          <a:prstGeom prst="rect">
+            <a:avLst/>
+          </a:prstGeom>
+          <a:noFill/>
+        </p:spPr>
+        <p:txBody>
+          <a:bodyPr wrap="none">
+            <a:spAutoFit/>
+          </a:bodyPr>
+          <a:lstStyle/>
+          <a:p>
+            <a:pPr>
+              <a:defRPr sz="2025" b="1">
+                <a:solidFill>
+                  <a:srgbClr val="17263A"/>
+                </a:solidFill>
+                <a:latin typeface="프리텐다드"/>
+              </a:defRPr>
+            </a:pPr>
+            <a:r>
+              <a:t>A/B 병원 PACS &amp; WireGuard</a:t>
+            </a:r>
+          </a:p>
+        </p:txBody>
+      </p:sp>
+      <p:sp>
+        <p:nvSpPr>
+          <p:cNvPr id="17" name="TextBox 16"/>
+          <p:cNvSpPr txBox="1"/>
+          <p:nvPr/>
+        </p:nvSpPr>
+        <p:spPr>
+          <a:xfrm>
+            <a:off x="12096750" y="4714875"/>
+            <a:ext cx="4876800" cy="714375"/>
+          </a:xfrm>
+          <a:prstGeom prst="rect">
+            <a:avLst/>
+          </a:prstGeom>
+          <a:noFill/>
+        </p:spPr>
+        <p:txBody>
+          <a:bodyPr wrap="none">
+            <a:spAutoFit/>
+          </a:bodyPr>
+          <a:lstStyle/>
+          <a:p>
+            <a:pPr>
+              <a:defRPr sz="1425">
+                <a:solidFill>
+                  <a:srgbClr val="53657B"/>
+                </a:solidFill>
+                <a:latin typeface="프리텐다드"/>
+              </a:defRPr>
+            </a:pPr>
+            <a:r>
+              <a:t>A병원 Orthanc PACS에서 B병원 수신 PACS로 700장 대용량 CT 영상이 암호화 사설망을 통해 직접 스트리밍됩니다.</a:t>
+            </a:r>
+          </a:p>
+        </p:txBody>
+      </p:sp>
+      <p:sp>
+        <p:nvSpPr>
+          <p:cNvPr id="18" name="Rounded Rectangle 17"/>
+          <p:cNvSpPr/>
+          <p:nvPr/>
+        </p:nvSpPr>
+        <p:spPr>
+          <a:xfrm>
+            <a:off x="12096750" y="5524500"/>
+            <a:ext cx="4876800" cy="1143000"/>
+          </a:xfrm>
+          <a:prstGeom prst="roundRect">
+            <a:avLst/>
+          </a:prstGeom>
+          <a:solidFill>
+            <a:srgbClr val="FFFFFF"/>
+          </a:solidFill>
+          <a:ln w="19050">
+            <a:solidFill>
+              <a:srgbClr val="C64A4A"/>
+            </a:solidFill>
+          </a:ln>
+        </p:spPr>
+        <p:style>
+          <a:lnRef idx="1">
+            <a:schemeClr val="accent1"/>
+          </a:lnRef>
+          <a:fillRef idx="3">
+            <a:schemeClr val="accent1"/>
+          </a:fillRef>
+          <a:effectRef idx="2">
+            <a:schemeClr val="accent1"/>
+          </a:effectRef>
+          <a:fontRef idx="minor">
+            <a:schemeClr val="lt1"/>
+          </a:fontRef>
+        </p:style>
+        <p:txBody>
+          <a:bodyPr rtlCol="0" anchor="ctr" lIns="152400" tIns="152400"/>
+          <a:lstStyle/>
+          <a:p>
+            <a:pPr algn="ctr">
+              <a:defRPr sz="1350" b="1">
+                <a:solidFill>
+                  <a:srgbClr val="C64A4A"/>
+                </a:solidFill>
+                <a:latin typeface="프리텐다드"/>
+              </a:defRPr>
+            </a:pPr>
+            <a:r>
+              <a:t>[Lazy Loading &amp; LUKS2 암호화]</a:t>
+            </a:r>
+          </a:p>
+          <a:p>
+            <a:pPr>
+              <a:defRPr sz="1200">
+                <a:solidFill>
+                  <a:srgbClr val="17263A"/>
+                </a:solidFill>
+                <a:latin typeface="프리텐다드"/>
+              </a:defRPr>
+            </a:pPr>
+            <a:r>
+              <a:t>Study 전체 무차별 다운로드가 아닌 프레임 단위 필요 최소 전송이며, B병원 8GiB LUKS2 암호화 볼륨에 안전하게 임시 보관됩니다.</a:t>
+            </a:r>
+          </a:p>
+        </p:txBody>
+      </p:sp>
+      <p:sp>
+        <p:nvSpPr>
+          <p:cNvPr id="19" name="TextBox 18"/>
+          <p:cNvSpPr txBox="1"/>
+          <p:nvPr/>
+        </p:nvSpPr>
+        <p:spPr>
+          <a:xfrm>
+            <a:off x="12096750" y="6810375"/>
+            <a:ext cx="4876800" cy="2190750"/>
+          </a:xfrm>
+          <a:prstGeom prst="rect">
+            <a:avLst/>
+          </a:prstGeom>
+          <a:noFill/>
+        </p:spPr>
+        <p:txBody>
+          <a:bodyPr wrap="none">
+            <a:spAutoFit/>
+          </a:bodyPr>
+          <a:lstStyle/>
+          <a:p/>
+          <a:p>
+            <a:pPr>
+              <a:spcAft>
+                <a:spcPts val="800"/>
+              </a:spcAft>
+              <a:defRPr sz="1387">
+                <a:solidFill>
+                  <a:srgbClr val="17263A"/>
+                </a:solidFill>
+                <a:latin typeface="프리텐다드"/>
+              </a:defRPr>
+            </a:pPr>
+            <a:r>
+              <a:t>•  WireGuard 사설 Overlay 터널링으로 병원 간 통신 보호</a:t>
+            </a:r>
+          </a:p>
+          <a:p>
+            <a:pPr>
+              <a:spcAft>
+                <a:spcPts val="800"/>
+              </a:spcAft>
+              <a:defRPr sz="1387">
+                <a:solidFill>
+                  <a:srgbClr val="17263A"/>
+                </a:solidFill>
+                <a:latin typeface="프리텐다드"/>
+              </a:defRPr>
+            </a:pPr>
+            <a:r>
+              <a:t>•  WADO-RS 프레임 단위 스트리밍으로 700 Slices CT 무지연 판독</a:t>
+            </a:r>
+          </a:p>
+          <a:p>
+            <a:pPr>
+              <a:spcAft>
+                <a:spcPts val="800"/>
+              </a:spcAft>
+              <a:defRPr sz="1387">
+                <a:solidFill>
+                  <a:srgbClr val="17263A"/>
+                </a:solidFill>
+                <a:latin typeface="프리텐다드"/>
+              </a:defRPr>
+            </a:pPr>
+            <a:r>
+              <a:t>•  의료진 PC 로컬 다운로드 차단 및 진료 완료 후 안전한 파기</a:t>
+            </a:r>
+          </a:p>
+        </p:txBody>
+      </p:sp>
+    </p:spTree>
+  </p:cSld>
+  <p:clrMapOvr>
+    <a:masterClrMapping/>
+  </p:clrMapOvr>
+  <p:transition xmlns:p15="http://schemas.microsoft.com/office/powerpoint/2012/main">
+    <p:extLst>
+      <p:ext uri="{EFA19261-F742-4948-AE17-10779776E6A2}">
+        <p15:morph option="byObject"/>
+      </p:ext>
+    </p:extLst>
+  </p:transition>
+</p:sld>
+</file>
+
+<file path=ppt/slides/slide12.xml><?xml version="1.0" encoding="utf-8"?>
+<p:sld xmlns:a="http://schemas.openxmlformats.org/drawingml/2006/main" xmlns:p="http://schemas.openxmlformats.org/presentationml/2006/main" xmlns:r="http://schemas.openxmlformats.org/officeDocument/2006/relationships">
+  <p:cSld>
+    <p:spTree>
+      <p:nvGrpSpPr>
+        <p:cNvPr id="1" name=""/>
+        <p:cNvGrpSpPr/>
+        <p:nvPr/>
+      </p:nvGrpSpPr>
+      <p:grpSpPr/>
+      <p:sp>
+        <p:nvSpPr>
+          <p:cNvPr id="2" name="Rectangle 1"/>
+          <p:cNvSpPr/>
+          <p:nvPr/>
+        </p:nvSpPr>
+        <p:spPr>
+          <a:xfrm>
+            <a:off x="0" y="0"/>
+            <a:ext cx="18288000" cy="10287000"/>
+          </a:xfrm>
+          <a:prstGeom prst="rect">
+            <a:avLst/>
+          </a:prstGeom>
+          <a:solidFill>
+            <a:srgbClr val="FFFFFF"/>
+          </a:solidFill>
+          <a:ln>
+            <a:noFill/>
+          </a:ln>
+        </p:spPr>
+        <p:style>
+          <a:lnRef idx="1">
+            <a:schemeClr val="accent1"/>
+          </a:lnRef>
+          <a:fillRef idx="3">
+            <a:schemeClr val="accent1"/>
+          </a:fillRef>
+          <a:effectRef idx="2">
+            <a:schemeClr val="accent1"/>
+          </a:effectRef>
+          <a:fontRef idx="minor">
+            <a:schemeClr val="lt1"/>
+          </a:fontRef>
+        </p:style>
+        <p:txBody>
+          <a:bodyPr rtlCol="0" anchor="ctr"/>
+          <a:lstStyle/>
+          <a:p>
+            <a:pPr algn="ctr"/>
+          </a:p>
+        </p:txBody>
+      </p:sp>
+      <p:sp>
+        <p:nvSpPr>
+          <p:cNvPr id="3" name="Rectangle 2"/>
+          <p:cNvSpPr/>
+          <p:nvPr/>
+        </p:nvSpPr>
+        <p:spPr>
+          <a:xfrm>
+            <a:off x="0" y="0"/>
+            <a:ext cx="18288000" cy="2457450"/>
+          </a:xfrm>
+          <a:prstGeom prst="rect">
+            <a:avLst/>
+          </a:prstGeom>
+          <a:solidFill>
+            <a:srgbClr val="F3F6FA"/>
+          </a:solidFill>
+          <a:ln>
+            <a:noFill/>
+          </a:ln>
+        </p:spPr>
+        <p:style>
+          <a:lnRef idx="1">
+            <a:schemeClr val="accent1"/>
+          </a:lnRef>
+          <a:fillRef idx="3">
+            <a:schemeClr val="accent1"/>
+          </a:fillRef>
+          <a:effectRef idx="2">
+            <a:schemeClr val="accent1"/>
+          </a:effectRef>
+          <a:fontRef idx="minor">
+            <a:schemeClr val="lt1"/>
+          </a:fontRef>
+        </p:style>
+        <p:txBody>
+          <a:bodyPr rtlCol="0" anchor="ctr"/>
+          <a:lstStyle/>
+          <a:p>
+            <a:pPr algn="ctr"/>
+          </a:p>
+        </p:txBody>
+      </p:sp>
+      <p:sp>
+        <p:nvSpPr>
+          <p:cNvPr id="4" name="Rectangle 3"/>
+          <p:cNvSpPr/>
+          <p:nvPr/>
+        </p:nvSpPr>
+        <p:spPr>
+          <a:xfrm>
+            <a:off x="1028700" y="723900"/>
+            <a:ext cx="76200" cy="1257300"/>
+          </a:xfrm>
+          <a:prstGeom prst="rect">
+            <a:avLst/>
+          </a:prstGeom>
+          <a:solidFill>
+            <a:srgbClr val="2F68B5"/>
+          </a:solidFill>
+          <a:ln>
+            <a:noFill/>
+          </a:ln>
+        </p:spPr>
+        <p:style>
+          <a:lnRef idx="1">
+            <a:schemeClr val="accent1"/>
+          </a:lnRef>
+          <a:fillRef idx="3">
+            <a:schemeClr val="accent1"/>
+          </a:fillRef>
+          <a:effectRef idx="2">
+            <a:schemeClr val="accent1"/>
+          </a:effectRef>
+          <a:fontRef idx="minor">
+            <a:schemeClr val="lt1"/>
+          </a:fontRef>
+        </p:style>
+        <p:txBody>
+          <a:bodyPr rtlCol="0" anchor="ctr"/>
+          <a:lstStyle/>
+          <a:p>
+            <a:pPr algn="ctr"/>
+          </a:p>
+        </p:txBody>
+      </p:sp>
+      <p:sp>
+        <p:nvSpPr>
+          <p:cNvPr id="5" name="TextBox 4"/>
+          <p:cNvSpPr txBox="1"/>
+          <p:nvPr/>
+        </p:nvSpPr>
+        <p:spPr>
+          <a:xfrm>
+            <a:off x="1428750" y="590550"/>
+            <a:ext cx="15240000" cy="361950"/>
+          </a:xfrm>
+          <a:prstGeom prst="rect">
+            <a:avLst/>
+          </a:prstGeom>
+          <a:noFill/>
+        </p:spPr>
+        <p:txBody>
+          <a:bodyPr wrap="square">
+            <a:spAutoFit/>
+          </a:bodyPr>
+          <a:lstStyle/>
+          <a:p>
+            <a:pPr>
+              <a:defRPr sz="1575" b="1">
+                <a:solidFill>
+                  <a:srgbClr val="2F68B5"/>
+                </a:solidFill>
+                <a:latin typeface="프리텐다드"/>
+              </a:defRPr>
+            </a:pPr>
+            <a:r>
+              <a:t>04. LIVE SERVICE · PATIENT PORTAL</a:t>
+            </a:r>
+          </a:p>
+        </p:txBody>
+      </p:sp>
+      <p:sp>
+        <p:nvSpPr>
+          <p:cNvPr id="6" name="TextBox 5"/>
+          <p:cNvSpPr txBox="1"/>
+          <p:nvPr/>
+        </p:nvSpPr>
+        <p:spPr>
+          <a:xfrm>
+            <a:off x="1428750" y="962024"/>
+            <a:ext cx="15716250" cy="1314450"/>
+          </a:xfrm>
+          <a:prstGeom prst="rect">
+            <a:avLst/>
+          </a:prstGeom>
+          <a:noFill/>
+        </p:spPr>
+        <p:txBody>
+          <a:bodyPr wrap="square">
+            <a:spAutoFit/>
+          </a:bodyPr>
+          <a:lstStyle/>
+          <a:p>
+            <a:pPr>
+              <a:defRPr sz="3750" b="1">
+                <a:solidFill>
+                  <a:srgbClr val="17263A"/>
+                </a:solidFill>
+                <a:latin typeface="프리텐다드"/>
+              </a:defRPr>
+            </a:pPr>
+            <a:r>
+              <a:t>직관적인 4대 역할 게이트와 환자 맞춤형 동의 지갑</a:t>
+            </a:r>
+          </a:p>
+        </p:txBody>
+      </p:sp>
+      <p:sp>
+        <p:nvSpPr>
+          <p:cNvPr id="7" name="TextBox 6"/>
+          <p:cNvSpPr txBox="1"/>
+          <p:nvPr/>
+        </p:nvSpPr>
+        <p:spPr>
+          <a:xfrm>
+            <a:off x="1028700" y="2686050"/>
+            <a:ext cx="16230600" cy="457200"/>
+          </a:xfrm>
+          <a:prstGeom prst="rect">
+            <a:avLst/>
+          </a:prstGeom>
+          <a:noFill/>
+        </p:spPr>
+        <p:txBody>
+          <a:bodyPr wrap="square">
+            <a:spAutoFit/>
+          </a:bodyPr>
+          <a:lstStyle/>
+          <a:p>
+            <a:pPr>
+              <a:defRPr sz="1875">
+                <a:solidFill>
+                  <a:srgbClr val="53657B"/>
+                </a:solidFill>
+                <a:latin typeface="프리텐다드"/>
+              </a:defRPr>
+            </a:pPr>
+            <a:r>
+              <a:t>환자가 직접 수신 병원, 진료 목적, 유효기간, 허용할 복부 CT 검사 범위를 지정하고 언제든 철회</a:t>
+            </a:r>
+          </a:p>
+        </p:txBody>
+      </p:sp>
+      <p:sp>
+        <p:nvSpPr>
+          <p:cNvPr id="8" name="Rectangle 7"/>
+          <p:cNvSpPr/>
+          <p:nvPr/>
+        </p:nvSpPr>
+        <p:spPr>
+          <a:xfrm>
+            <a:off x="1028700" y="9582150"/>
+            <a:ext cx="16230600" cy="19050"/>
+          </a:xfrm>
+          <a:prstGeom prst="rect">
+            <a:avLst/>
+          </a:prstGeom>
+          <a:solidFill>
+            <a:srgbClr val="D8E0E9"/>
+          </a:solidFill>
+          <a:ln>
+            <a:noFill/>
+          </a:ln>
+        </p:spPr>
+        <p:style>
+          <a:lnRef idx="1">
+            <a:schemeClr val="accent1"/>
+          </a:lnRef>
+          <a:fillRef idx="3">
+            <a:schemeClr val="accent1"/>
+          </a:fillRef>
+          <a:effectRef idx="2">
+            <a:schemeClr val="accent1"/>
+          </a:effectRef>
+          <a:fontRef idx="minor">
+            <a:schemeClr val="lt1"/>
+          </a:fontRef>
+        </p:style>
+        <p:txBody>
+          <a:bodyPr rtlCol="0" anchor="ctr"/>
+          <a:lstStyle/>
+          <a:p>
+            <a:pPr algn="ctr"/>
+          </a:p>
+        </p:txBody>
+      </p:sp>
+      <p:sp>
+        <p:nvSpPr>
+          <p:cNvPr id="9" name="TextBox 8"/>
+          <p:cNvSpPr txBox="1"/>
+          <p:nvPr/>
+        </p:nvSpPr>
+        <p:spPr>
+          <a:xfrm>
+            <a:off x="1028700" y="9658350"/>
+            <a:ext cx="11430000" cy="295275"/>
+          </a:xfrm>
+          <a:prstGeom prst="rect">
+            <a:avLst/>
+          </a:prstGeom>
+          <a:noFill/>
+        </p:spPr>
+        <p:txBody>
+          <a:bodyPr wrap="none">
+            <a:spAutoFit/>
+          </a:bodyPr>
+          <a:lstStyle/>
+          <a:p>
+            <a:pPr>
+              <a:defRPr sz="1275">
+                <a:solidFill>
+                  <a:srgbClr val="7B8A9B"/>
+                </a:solidFill>
+                <a:latin typeface="프리텐다드"/>
+              </a:defRPr>
+            </a:pPr>
+            <a:r>
+              <a:t>Medi Q  /  합성 데이터 · 비임상 기술 PoC  ·  아키텍처 모션 워크스루</a:t>
+            </a:r>
+          </a:p>
+        </p:txBody>
+      </p:sp>
+      <p:sp>
+        <p:nvSpPr>
+          <p:cNvPr id="10" name="TextBox 9"/>
+          <p:cNvSpPr txBox="1"/>
+          <p:nvPr/>
+        </p:nvSpPr>
+        <p:spPr>
+          <a:xfrm>
+            <a:off x="15240000" y="9658350"/>
+            <a:ext cx="2019300" cy="295275"/>
+          </a:xfrm>
+          <a:prstGeom prst="rect">
+            <a:avLst/>
+          </a:prstGeom>
+          <a:noFill/>
+        </p:spPr>
+        <p:txBody>
+          <a:bodyPr wrap="none">
+            <a:spAutoFit/>
+          </a:bodyPr>
+          <a:lstStyle/>
+          <a:p>
+            <a:pPr algn="r">
+              <a:defRPr sz="1275" b="1">
+                <a:solidFill>
+                  <a:srgbClr val="7B8A9B"/>
+                </a:solidFill>
+                <a:latin typeface="프리텐다드"/>
+              </a:defRPr>
+            </a:pPr>
+            <a:r>
+              <a:t>12  /  16</a:t>
+            </a:r>
+          </a:p>
+        </p:txBody>
+      </p:sp>
+      <p:sp>
+        <p:nvSpPr>
+          <p:cNvPr id="11" name="Rounded Rectangle 10"/>
+          <p:cNvSpPr/>
+          <p:nvPr/>
+        </p:nvSpPr>
+        <p:spPr>
+          <a:xfrm>
+            <a:off x="1028700" y="3333750"/>
+            <a:ext cx="9144000" cy="5810250"/>
+          </a:xfrm>
+          <a:prstGeom prst="roundRect">
+            <a:avLst/>
+          </a:prstGeom>
+          <a:solidFill>
+            <a:srgbClr val="FFFFFF"/>
+          </a:solidFill>
+          <a:ln w="19050">
+            <a:solidFill>
+              <a:srgbClr val="D8E0E9"/>
+            </a:solidFill>
+          </a:ln>
+        </p:spPr>
+        <p:style>
+          <a:lnRef idx="1">
+            <a:schemeClr val="accent1"/>
+          </a:lnRef>
+          <a:fillRef idx="3">
+            <a:schemeClr val="accent1"/>
+          </a:fillRef>
+          <a:effectRef idx="2">
+            <a:schemeClr val="accent1"/>
+          </a:effectRef>
+          <a:fontRef idx="minor">
+            <a:schemeClr val="lt1"/>
+          </a:fontRef>
+        </p:style>
+        <p:txBody>
+          <a:bodyPr rtlCol="0" anchor="ctr"/>
+          <a:lstStyle/>
+          <a:p>
+            <a:pPr algn="ctr"/>
+          </a:p>
+        </p:txBody>
+      </p:sp>
+      <p:pic>
+        <p:nvPicPr>
+          <p:cNvPr id="12" name="Picture 11" descr="06_patient_consent_wallet.png"/>
+          <p:cNvPicPr>
+            <a:picLocks noChangeAspect="1"/>
+          </p:cNvPicPr>
+          <p:nvPr/>
+        </p:nvPicPr>
+        <p:blipFill>
+          <a:blip r:embed="rId2"/>
+          <a:stretch>
+            <a:fillRect/>
+          </a:stretch>
+        </p:blipFill>
+        <p:spPr>
+          <a:xfrm>
+            <a:off x="1219200" y="3524250"/>
+            <a:ext cx="8763000" cy="4862606"/>
+          </a:xfrm>
+          <a:prstGeom prst="rect">
+            <a:avLst/>
+          </a:prstGeom>
+        </p:spPr>
+      </p:pic>
+      <p:sp>
+        <p:nvSpPr>
+          <p:cNvPr id="13" name="Rounded Rectangle 12"/>
+          <p:cNvSpPr/>
+          <p:nvPr/>
+        </p:nvSpPr>
+        <p:spPr>
+          <a:xfrm>
+            <a:off x="10477500" y="3333750"/>
+            <a:ext cx="6781800" cy="5810250"/>
+          </a:xfrm>
+          <a:prstGeom prst="roundRect">
+            <a:avLst/>
+          </a:prstGeom>
+          <a:solidFill>
+            <a:srgbClr val="F3F6FA"/>
+          </a:solidFill>
+          <a:ln w="19050">
+            <a:solidFill>
+              <a:srgbClr val="D8E0E9"/>
+            </a:solidFill>
+          </a:ln>
+        </p:spPr>
+        <p:style>
+          <a:lnRef idx="1">
+            <a:schemeClr val="accent1"/>
+          </a:lnRef>
+          <a:fillRef idx="3">
+            <a:schemeClr val="accent1"/>
+          </a:fillRef>
+          <a:effectRef idx="2">
+            <a:schemeClr val="accent1"/>
+          </a:effectRef>
+          <a:fontRef idx="minor">
+            <a:schemeClr val="lt1"/>
+          </a:fontRef>
+        </p:style>
+        <p:txBody>
+          <a:bodyPr rtlCol="0" anchor="ctr"/>
+          <a:lstStyle/>
+          <a:p>
+            <a:pPr algn="ctr"/>
+          </a:p>
+        </p:txBody>
+      </p:sp>
+      <p:sp>
+        <p:nvSpPr>
+          <p:cNvPr id="14" name="Rounded Rectangle 13"/>
+          <p:cNvSpPr/>
+          <p:nvPr/>
+        </p:nvSpPr>
+        <p:spPr>
+          <a:xfrm>
+            <a:off x="10763250" y="3619500"/>
+            <a:ext cx="2095499" cy="400050"/>
+          </a:xfrm>
+          <a:prstGeom prst="roundRect">
+            <a:avLst/>
+          </a:prstGeom>
+          <a:solidFill>
+            <a:srgbClr val="2F68B5"/>
+          </a:solidFill>
+          <a:ln>
+            <a:noFill/>
+          </a:ln>
+        </p:spPr>
+        <p:style>
+          <a:lnRef idx="1">
+            <a:schemeClr val="accent1"/>
+          </a:lnRef>
+          <a:fillRef idx="3">
+            <a:schemeClr val="accent1"/>
+          </a:fillRef>
+          <a:effectRef idx="2">
+            <a:schemeClr val="accent1"/>
+          </a:effectRef>
+          <a:fontRef idx="minor">
+            <a:schemeClr val="lt1"/>
+          </a:fontRef>
+        </p:style>
+        <p:txBody>
+          <a:bodyPr rtlCol="0" anchor="ctr"/>
+          <a:lstStyle/>
+          <a:p>
+            <a:pPr algn="ctr">
+              <a:defRPr sz="1425" b="1">
+                <a:solidFill>
+                  <a:srgbClr val="FFFFFF"/>
+                </a:solidFill>
+                <a:latin typeface="프리텐다드"/>
+              </a:defRPr>
+            </a:pPr>
+            <a:r>
+              <a:t>환자 동의 지갑</a:t>
+            </a:r>
+          </a:p>
+        </p:txBody>
+      </p:sp>
+      <p:sp>
+        <p:nvSpPr>
+          <p:cNvPr id="15" name="TextBox 14"/>
+          <p:cNvSpPr txBox="1"/>
+          <p:nvPr/>
+        </p:nvSpPr>
+        <p:spPr>
+          <a:xfrm>
+            <a:off x="13049250" y="3600450"/>
+            <a:ext cx="4000500" cy="428625"/>
+          </a:xfrm>
+          <a:prstGeom prst="rect">
+            <a:avLst/>
+          </a:prstGeom>
+          <a:noFill/>
+        </p:spPr>
+        <p:txBody>
+          <a:bodyPr wrap="none">
+            <a:spAutoFit/>
+          </a:bodyPr>
+          <a:lstStyle/>
+          <a:p>
+            <a:pPr>
+              <a:defRPr sz="1950" b="1">
+                <a:solidFill>
+                  <a:srgbClr val="17263A"/>
+                </a:solidFill>
+                <a:latin typeface="프리텐다드"/>
+              </a:defRPr>
+            </a:pPr>
+            <a:r>
+              <a:t>환자 중심의 공유 통제</a:t>
+            </a:r>
+          </a:p>
+        </p:txBody>
+      </p:sp>
+      <p:sp>
+        <p:nvSpPr>
+          <p:cNvPr id="16" name="TextBox 15"/>
+          <p:cNvSpPr txBox="1"/>
+          <p:nvPr/>
+        </p:nvSpPr>
+        <p:spPr>
+          <a:xfrm>
+            <a:off x="10763250" y="4238625"/>
+            <a:ext cx="6191250" cy="4762500"/>
+          </a:xfrm>
+          <a:prstGeom prst="rect">
+            <a:avLst/>
+          </a:prstGeom>
+          <a:noFill/>
+        </p:spPr>
+        <p:txBody>
+          <a:bodyPr wrap="none">
+            <a:spAutoFit/>
+          </a:bodyPr>
+          <a:lstStyle/>
+          <a:p/>
+          <a:p>
+            <a:pPr>
+              <a:defRPr sz="1575" b="1">
+                <a:solidFill>
+                  <a:srgbClr val="2F68B5"/>
+                </a:solidFill>
+                <a:latin typeface="프리텐다드"/>
+              </a:defRPr>
+            </a:pPr>
+            <a:r>
+              <a:t>✔  4대 역할 게이트 분리</a:t>
+            </a:r>
+          </a:p>
+          <a:p>
+            <a:pPr>
+              <a:spcAft>
+                <a:spcPts val="1000"/>
+              </a:spcAft>
+              <a:defRPr sz="1350">
+                <a:solidFill>
+                  <a:srgbClr val="17263A"/>
+                </a:solidFill>
+                <a:latin typeface="프리텐다드"/>
+              </a:defRPr>
+            </a:pPr>
+            <a:r>
+              <a:t>     환자, 의료진, 병원 관리자, 보안 운영자 전용 로그인 분리</a:t>
+            </a:r>
+          </a:p>
+          <a:p>
+            <a:pPr>
+              <a:defRPr sz="1575" b="1">
+                <a:solidFill>
+                  <a:srgbClr val="2F68B5"/>
+                </a:solidFill>
+                <a:latin typeface="프리텐다드"/>
+              </a:defRPr>
+            </a:pPr>
+            <a:r>
+              <a:t>✔  수신 병원 선택</a:t>
+            </a:r>
+          </a:p>
+          <a:p>
+            <a:pPr>
+              <a:spcAft>
+                <a:spcPts val="1000"/>
+              </a:spcAft>
+              <a:defRPr sz="1350">
+                <a:solidFill>
+                  <a:srgbClr val="17263A"/>
+                </a:solidFill>
+                <a:latin typeface="프리텐다드"/>
+              </a:defRPr>
+            </a:pPr>
+            <a:r>
+              <a:t>     A대학병원에서 B대학병원으로 공유 대상 병원 명확히 지정</a:t>
+            </a:r>
+          </a:p>
+          <a:p>
+            <a:pPr>
+              <a:defRPr sz="1575" b="1">
+                <a:solidFill>
+                  <a:srgbClr val="2F68B5"/>
+                </a:solidFill>
+                <a:latin typeface="프리텐다드"/>
+              </a:defRPr>
+            </a:pPr>
+            <a:r>
+              <a:t>✔  열람 목적 및 기간</a:t>
+            </a:r>
+          </a:p>
+          <a:p>
+            <a:pPr>
+              <a:spcAft>
+                <a:spcPts val="1000"/>
+              </a:spcAft>
+              <a:defRPr sz="1350">
+                <a:solidFill>
+                  <a:srgbClr val="17263A"/>
+                </a:solidFill>
+                <a:latin typeface="프리텐다드"/>
+              </a:defRPr>
+            </a:pPr>
+            <a:r>
+              <a:t>     진료 목적으로 한정, 1일~30일 사이 유효기간 설정</a:t>
+            </a:r>
+          </a:p>
+          <a:p>
+            <a:pPr>
+              <a:defRPr sz="1575" b="1">
+                <a:solidFill>
+                  <a:srgbClr val="2F68B5"/>
+                </a:solidFill>
+                <a:latin typeface="프리텐다드"/>
+              </a:defRPr>
+            </a:pPr>
+            <a:r>
+              <a:t>✔  검사 단위 선택</a:t>
+            </a:r>
+          </a:p>
+          <a:p>
+            <a:pPr>
+              <a:spcAft>
+                <a:spcPts val="1000"/>
+              </a:spcAft>
+              <a:defRPr sz="1350">
+                <a:solidFill>
+                  <a:srgbClr val="17263A"/>
+                </a:solidFill>
+                <a:latin typeface="프리텐다드"/>
+              </a:defRPr>
+            </a:pPr>
+            <a:r>
+              <a:t>     전체 진료기록이 아닌, 필요한 특정 복부 CT Study/Series만 선택</a:t>
+            </a:r>
+          </a:p>
+          <a:p>
+            <a:pPr>
+              <a:defRPr sz="1575" b="1">
+                <a:solidFill>
+                  <a:srgbClr val="2F68B5"/>
+                </a:solidFill>
+                <a:latin typeface="프리텐다드"/>
+              </a:defRPr>
+            </a:pPr>
+            <a:r>
+              <a:t>✔  원클릭 동의 철회</a:t>
+            </a:r>
+          </a:p>
+          <a:p>
+            <a:pPr>
+              <a:spcAft>
+                <a:spcPts val="1000"/>
+              </a:spcAft>
+              <a:defRPr sz="1350">
+                <a:solidFill>
+                  <a:srgbClr val="17263A"/>
+                </a:solidFill>
+                <a:latin typeface="프리텐다드"/>
+              </a:defRPr>
+            </a:pPr>
+            <a:r>
+              <a:t>     언제든 환자가 원할 때 즉시 권한을 파기하는 Revoke 지원</a:t>
+            </a:r>
+          </a:p>
+        </p:txBody>
+      </p:sp>
+    </p:spTree>
+  </p:cSld>
+  <p:clrMapOvr>
+    <a:masterClrMapping/>
+  </p:clrMapOvr>
+</p:sld>
+</file>
+
+<file path=ppt/slides/slide13.xml><?xml version="1.0" encoding="utf-8"?>
+<p:sld xmlns:a="http://schemas.openxmlformats.org/drawingml/2006/main" xmlns:p="http://schemas.openxmlformats.org/presentationml/2006/main" xmlns:r="http://schemas.openxmlformats.org/officeDocument/2006/relationships">
+  <p:cSld>
+    <p:spTree>
+      <p:nvGrpSpPr>
+        <p:cNvPr id="1" name=""/>
+        <p:cNvGrpSpPr/>
+        <p:nvPr/>
+      </p:nvGrpSpPr>
+      <p:grpSpPr/>
+      <p:sp>
+        <p:nvSpPr>
+          <p:cNvPr id="2" name="Rectangle 1"/>
+          <p:cNvSpPr/>
+          <p:nvPr/>
+        </p:nvSpPr>
+        <p:spPr>
+          <a:xfrm>
+            <a:off x="0" y="0"/>
+            <a:ext cx="18288000" cy="10287000"/>
+          </a:xfrm>
+          <a:prstGeom prst="rect">
+            <a:avLst/>
+          </a:prstGeom>
+          <a:solidFill>
+            <a:srgbClr val="FFFFFF"/>
+          </a:solidFill>
+          <a:ln>
+            <a:noFill/>
+          </a:ln>
+        </p:spPr>
+        <p:style>
+          <a:lnRef idx="1">
+            <a:schemeClr val="accent1"/>
+          </a:lnRef>
+          <a:fillRef idx="3">
+            <a:schemeClr val="accent1"/>
+          </a:fillRef>
+          <a:effectRef idx="2">
+            <a:schemeClr val="accent1"/>
+          </a:effectRef>
+          <a:fontRef idx="minor">
+            <a:schemeClr val="lt1"/>
+          </a:fontRef>
+        </p:style>
+        <p:txBody>
+          <a:bodyPr rtlCol="0" anchor="ctr"/>
+          <a:lstStyle/>
+          <a:p>
+            <a:pPr algn="ctr"/>
+          </a:p>
+        </p:txBody>
+      </p:sp>
+      <p:sp>
+        <p:nvSpPr>
+          <p:cNvPr id="3" name="Rectangle 2"/>
+          <p:cNvSpPr/>
+          <p:nvPr/>
+        </p:nvSpPr>
+        <p:spPr>
+          <a:xfrm>
+            <a:off x="0" y="0"/>
+            <a:ext cx="18288000" cy="2457450"/>
+          </a:xfrm>
+          <a:prstGeom prst="rect">
+            <a:avLst/>
+          </a:prstGeom>
+          <a:solidFill>
+            <a:srgbClr val="F3F6FA"/>
+          </a:solidFill>
+          <a:ln>
+            <a:noFill/>
+          </a:ln>
+        </p:spPr>
+        <p:style>
+          <a:lnRef idx="1">
+            <a:schemeClr val="accent1"/>
+          </a:lnRef>
+          <a:fillRef idx="3">
+            <a:schemeClr val="accent1"/>
+          </a:fillRef>
+          <a:effectRef idx="2">
+            <a:schemeClr val="accent1"/>
+          </a:effectRef>
+          <a:fontRef idx="minor">
+            <a:schemeClr val="lt1"/>
+          </a:fontRef>
+        </p:style>
+        <p:txBody>
+          <a:bodyPr rtlCol="0" anchor="ctr"/>
+          <a:lstStyle/>
+          <a:p>
+            <a:pPr algn="ctr"/>
+          </a:p>
+        </p:txBody>
+      </p:sp>
+      <p:sp>
+        <p:nvSpPr>
+          <p:cNvPr id="4" name="Rectangle 3"/>
+          <p:cNvSpPr/>
+          <p:nvPr/>
+        </p:nvSpPr>
+        <p:spPr>
+          <a:xfrm>
+            <a:off x="1028700" y="723900"/>
+            <a:ext cx="76200" cy="1257300"/>
+          </a:xfrm>
+          <a:prstGeom prst="rect">
+            <a:avLst/>
+          </a:prstGeom>
+          <a:solidFill>
+            <a:srgbClr val="2F68B5"/>
+          </a:solidFill>
+          <a:ln>
+            <a:noFill/>
+          </a:ln>
+        </p:spPr>
+        <p:style>
+          <a:lnRef idx="1">
+            <a:schemeClr val="accent1"/>
+          </a:lnRef>
+          <a:fillRef idx="3">
+            <a:schemeClr val="accent1"/>
+          </a:fillRef>
+          <a:effectRef idx="2">
+            <a:schemeClr val="accent1"/>
+          </a:effectRef>
+          <a:fontRef idx="minor">
+            <a:schemeClr val="lt1"/>
+          </a:fontRef>
+        </p:style>
+        <p:txBody>
+          <a:bodyPr rtlCol="0" anchor="ctr"/>
+          <a:lstStyle/>
+          <a:p>
+            <a:pPr algn="ctr"/>
+          </a:p>
+        </p:txBody>
+      </p:sp>
+      <p:sp>
+        <p:nvSpPr>
+          <p:cNvPr id="5" name="TextBox 4"/>
+          <p:cNvSpPr txBox="1"/>
+          <p:nvPr/>
+        </p:nvSpPr>
+        <p:spPr>
+          <a:xfrm>
+            <a:off x="1428750" y="590550"/>
+            <a:ext cx="15240000" cy="361950"/>
+          </a:xfrm>
+          <a:prstGeom prst="rect">
+            <a:avLst/>
+          </a:prstGeom>
+          <a:noFill/>
+        </p:spPr>
+        <p:txBody>
+          <a:bodyPr wrap="square">
+            <a:spAutoFit/>
+          </a:bodyPr>
+          <a:lstStyle/>
+          <a:p>
+            <a:pPr>
+              <a:defRPr sz="1575" b="1">
+                <a:solidFill>
+                  <a:srgbClr val="2F68B5"/>
+                </a:solidFill>
+                <a:latin typeface="프리텐다드"/>
+              </a:defRPr>
+            </a:pPr>
+            <a:r>
+              <a:t>05. LIVE SERVICE · HEALTH HELPER</a:t>
+            </a:r>
+          </a:p>
+        </p:txBody>
+      </p:sp>
+      <p:sp>
+        <p:nvSpPr>
+          <p:cNvPr id="6" name="TextBox 5"/>
+          <p:cNvSpPr txBox="1"/>
+          <p:nvPr/>
+        </p:nvSpPr>
+        <p:spPr>
+          <a:xfrm>
+            <a:off x="1428750" y="962024"/>
+            <a:ext cx="15716250" cy="1314450"/>
+          </a:xfrm>
+          <a:prstGeom prst="rect">
+            <a:avLst/>
+          </a:prstGeom>
+          <a:noFill/>
+        </p:spPr>
+        <p:txBody>
+          <a:bodyPr wrap="square">
+            <a:spAutoFit/>
+          </a:bodyPr>
+          <a:lstStyle/>
+          <a:p>
+            <a:pPr>
+              <a:defRPr sz="3750" b="1">
+                <a:solidFill>
+                  <a:srgbClr val="17263A"/>
+                </a:solidFill>
+                <a:latin typeface="프리텐다드"/>
+              </a:defRPr>
+            </a:pPr>
+            <a:r>
+              <a:t>어려운 검사 결과를 눈높이 설명으로: AI 건강도우미</a:t>
+            </a:r>
+          </a:p>
+        </p:txBody>
+      </p:sp>
+      <p:sp>
+        <p:nvSpPr>
+          <p:cNvPr id="7" name="TextBox 6"/>
+          <p:cNvSpPr txBox="1"/>
+          <p:nvPr/>
+        </p:nvSpPr>
+        <p:spPr>
+          <a:xfrm>
+            <a:off x="1028700" y="2686050"/>
+            <a:ext cx="16230600" cy="457200"/>
+          </a:xfrm>
+          <a:prstGeom prst="rect">
+            <a:avLst/>
+          </a:prstGeom>
+          <a:noFill/>
+        </p:spPr>
+        <p:txBody>
+          <a:bodyPr wrap="square">
+            <a:spAutoFit/>
+          </a:bodyPr>
+          <a:lstStyle/>
+          <a:p>
+            <a:pPr>
+              <a:defRPr sz="1875">
+                <a:solidFill>
+                  <a:srgbClr val="53657B"/>
+                </a:solidFill>
+                <a:latin typeface="프리텐다드"/>
+              </a:defRPr>
+            </a:pPr>
+            <a:r>
+              <a:t>혈청 알파태아단백(AFP) 검사 결과 연동, 쉬운 개념 해설 및 진료실 의사 상담 리허설</a:t>
+            </a:r>
+          </a:p>
+        </p:txBody>
+      </p:sp>
+      <p:sp>
+        <p:nvSpPr>
+          <p:cNvPr id="8" name="Rectangle 7"/>
+          <p:cNvSpPr/>
+          <p:nvPr/>
+        </p:nvSpPr>
+        <p:spPr>
+          <a:xfrm>
+            <a:off x="1028700" y="9582150"/>
+            <a:ext cx="16230600" cy="19050"/>
+          </a:xfrm>
+          <a:prstGeom prst="rect">
+            <a:avLst/>
+          </a:prstGeom>
+          <a:solidFill>
+            <a:srgbClr val="D8E0E9"/>
+          </a:solidFill>
+          <a:ln>
+            <a:noFill/>
+          </a:ln>
+        </p:spPr>
+        <p:style>
+          <a:lnRef idx="1">
+            <a:schemeClr val="accent1"/>
+          </a:lnRef>
+          <a:fillRef idx="3">
+            <a:schemeClr val="accent1"/>
+          </a:fillRef>
+          <a:effectRef idx="2">
+            <a:schemeClr val="accent1"/>
+          </a:effectRef>
+          <a:fontRef idx="minor">
+            <a:schemeClr val="lt1"/>
+          </a:fontRef>
+        </p:style>
+        <p:txBody>
+          <a:bodyPr rtlCol="0" anchor="ctr"/>
+          <a:lstStyle/>
+          <a:p>
+            <a:pPr algn="ctr"/>
+          </a:p>
+        </p:txBody>
+      </p:sp>
+      <p:sp>
+        <p:nvSpPr>
+          <p:cNvPr id="9" name="TextBox 8"/>
+          <p:cNvSpPr txBox="1"/>
+          <p:nvPr/>
+        </p:nvSpPr>
+        <p:spPr>
+          <a:xfrm>
+            <a:off x="1028700" y="9658350"/>
+            <a:ext cx="11430000" cy="295275"/>
+          </a:xfrm>
+          <a:prstGeom prst="rect">
+            <a:avLst/>
+          </a:prstGeom>
+          <a:noFill/>
+        </p:spPr>
+        <p:txBody>
+          <a:bodyPr wrap="none">
+            <a:spAutoFit/>
+          </a:bodyPr>
+          <a:lstStyle/>
+          <a:p>
+            <a:pPr>
+              <a:defRPr sz="1275">
+                <a:solidFill>
+                  <a:srgbClr val="7B8A9B"/>
+                </a:solidFill>
+                <a:latin typeface="프리텐다드"/>
+              </a:defRPr>
+            </a:pPr>
+            <a:r>
+              <a:t>Medi Q  /  합성 데이터 · 비임상 기술 PoC  ·  아키텍처 모션 워크스루</a:t>
+            </a:r>
+          </a:p>
+        </p:txBody>
+      </p:sp>
+      <p:sp>
+        <p:nvSpPr>
+          <p:cNvPr id="10" name="TextBox 9"/>
+          <p:cNvSpPr txBox="1"/>
+          <p:nvPr/>
+        </p:nvSpPr>
+        <p:spPr>
+          <a:xfrm>
+            <a:off x="15240000" y="9658350"/>
+            <a:ext cx="2019300" cy="295275"/>
+          </a:xfrm>
+          <a:prstGeom prst="rect">
+            <a:avLst/>
+          </a:prstGeom>
+          <a:noFill/>
+        </p:spPr>
+        <p:txBody>
+          <a:bodyPr wrap="none">
+            <a:spAutoFit/>
+          </a:bodyPr>
+          <a:lstStyle/>
+          <a:p>
+            <a:pPr algn="r">
+              <a:defRPr sz="1275" b="1">
+                <a:solidFill>
+                  <a:srgbClr val="7B8A9B"/>
+                </a:solidFill>
+                <a:latin typeface="프리텐다드"/>
+              </a:defRPr>
+            </a:pPr>
+            <a:r>
+              <a:t>13  /  16</a:t>
+            </a:r>
+          </a:p>
+        </p:txBody>
+      </p:sp>
+      <p:sp>
+        <p:nvSpPr>
+          <p:cNvPr id="11" name="Rounded Rectangle 10"/>
+          <p:cNvSpPr/>
+          <p:nvPr/>
+        </p:nvSpPr>
+        <p:spPr>
+          <a:xfrm>
+            <a:off x="1028700" y="3333750"/>
+            <a:ext cx="7143750" cy="5810250"/>
+          </a:xfrm>
+          <a:prstGeom prst="roundRect">
+            <a:avLst/>
+          </a:prstGeom>
+          <a:solidFill>
+            <a:srgbClr val="FFFFFF"/>
+          </a:solidFill>
+          <a:ln w="19050">
+            <a:solidFill>
+              <a:srgbClr val="D8E0E9"/>
+            </a:solidFill>
+          </a:ln>
+        </p:spPr>
+        <p:style>
+          <a:lnRef idx="1">
+            <a:schemeClr val="accent1"/>
+          </a:lnRef>
+          <a:fillRef idx="3">
+            <a:schemeClr val="accent1"/>
+          </a:fillRef>
+          <a:effectRef idx="2">
+            <a:schemeClr val="accent1"/>
+          </a:effectRef>
+          <a:fontRef idx="minor">
+            <a:schemeClr val="lt1"/>
+          </a:fontRef>
+        </p:style>
+        <p:txBody>
+          <a:bodyPr rtlCol="0" anchor="ctr"/>
+          <a:lstStyle/>
+          <a:p>
+            <a:pPr algn="ctr"/>
+          </a:p>
+        </p:txBody>
+      </p:sp>
+      <p:pic>
+        <p:nvPicPr>
+          <p:cNvPr id="12" name="Picture 11" descr="05_health_helper_rag.png"/>
+          <p:cNvPicPr>
+            <a:picLocks noChangeAspect="1"/>
+          </p:cNvPicPr>
+          <p:nvPr/>
+        </p:nvPicPr>
+        <p:blipFill>
+          <a:blip r:embed="rId2"/>
+          <a:stretch>
+            <a:fillRect/>
+          </a:stretch>
+        </p:blipFill>
+        <p:spPr>
+          <a:xfrm>
+            <a:off x="1219200" y="3476625"/>
+            <a:ext cx="6762750" cy="6974086"/>
+          </a:xfrm>
+          <a:prstGeom prst="rect">
+            <a:avLst/>
+          </a:prstGeom>
+        </p:spPr>
+      </p:pic>
+      <p:sp>
+        <p:nvSpPr>
+          <p:cNvPr id="13" name="Rounded Rectangle 12"/>
+          <p:cNvSpPr/>
+          <p:nvPr/>
+        </p:nvSpPr>
+        <p:spPr>
+          <a:xfrm>
+            <a:off x="8477250" y="3333750"/>
+            <a:ext cx="8782050" cy="5810250"/>
+          </a:xfrm>
+          <a:prstGeom prst="roundRect">
+            <a:avLst/>
+          </a:prstGeom>
+          <a:solidFill>
+            <a:srgbClr val="E7F4F1"/>
+          </a:solidFill>
+          <a:ln w="19050">
+            <a:solidFill>
+              <a:srgbClr val="168B82"/>
+            </a:solidFill>
+          </a:ln>
+        </p:spPr>
+        <p:style>
+          <a:lnRef idx="1">
+            <a:schemeClr val="accent1"/>
+          </a:lnRef>
+          <a:fillRef idx="3">
+            <a:schemeClr val="accent1"/>
+          </a:fillRef>
+          <a:effectRef idx="2">
+            <a:schemeClr val="accent1"/>
+          </a:effectRef>
+          <a:fontRef idx="minor">
+            <a:schemeClr val="lt1"/>
+          </a:fontRef>
+        </p:style>
+        <p:txBody>
+          <a:bodyPr rtlCol="0" anchor="ctr"/>
+          <a:lstStyle/>
+          <a:p>
+            <a:pPr algn="ctr"/>
+          </a:p>
+        </p:txBody>
+      </p:sp>
+      <p:sp>
+        <p:nvSpPr>
+          <p:cNvPr id="14" name="Rounded Rectangle 13"/>
+          <p:cNvSpPr/>
+          <p:nvPr/>
+        </p:nvSpPr>
+        <p:spPr>
+          <a:xfrm>
+            <a:off x="8763000" y="3619500"/>
+            <a:ext cx="2095499" cy="400050"/>
+          </a:xfrm>
+          <a:prstGeom prst="roundRect">
+            <a:avLst/>
+          </a:prstGeom>
+          <a:solidFill>
+            <a:srgbClr val="168B82"/>
+          </a:solidFill>
+          <a:ln>
+            <a:noFill/>
+          </a:ln>
+        </p:spPr>
+        <p:style>
+          <a:lnRef idx="1">
+            <a:schemeClr val="accent1"/>
+          </a:lnRef>
+          <a:fillRef idx="3">
+            <a:schemeClr val="accent1"/>
+          </a:fillRef>
+          <a:effectRef idx="2">
+            <a:schemeClr val="accent1"/>
+          </a:effectRef>
+          <a:fontRef idx="minor">
+            <a:schemeClr val="lt1"/>
+          </a:fontRef>
+        </p:style>
+        <p:txBody>
+          <a:bodyPr rtlCol="0" anchor="ctr"/>
+          <a:lstStyle/>
+          <a:p>
+            <a:pPr algn="ctr">
+              <a:defRPr sz="1425" b="1">
+                <a:solidFill>
+                  <a:srgbClr val="FFFFFF"/>
+                </a:solidFill>
+                <a:latin typeface="프리텐다드"/>
+              </a:defRPr>
+            </a:pPr>
+            <a:r>
+              <a:t>AI 건강도우미</a:t>
+            </a:r>
+          </a:p>
+        </p:txBody>
+      </p:sp>
+      <p:sp>
+        <p:nvSpPr>
+          <p:cNvPr id="15" name="TextBox 14"/>
+          <p:cNvSpPr txBox="1"/>
+          <p:nvPr/>
+        </p:nvSpPr>
+        <p:spPr>
+          <a:xfrm>
+            <a:off x="11049000" y="3600450"/>
+            <a:ext cx="6000750" cy="428625"/>
+          </a:xfrm>
+          <a:prstGeom prst="rect">
+            <a:avLst/>
+          </a:prstGeom>
+          <a:noFill/>
+        </p:spPr>
+        <p:txBody>
+          <a:bodyPr wrap="none">
+            <a:spAutoFit/>
+          </a:bodyPr>
+          <a:lstStyle/>
+          <a:p>
+            <a:pPr>
+              <a:defRPr sz="1950" b="1">
+                <a:solidFill>
+                  <a:srgbClr val="17263A"/>
+                </a:solidFill>
+                <a:latin typeface="프리텐다드"/>
+              </a:defRPr>
+            </a:pPr>
+            <a:r>
+              <a:t>혈청 알파태아단백(AFP) 검사 질의응답 연동</a:t>
+            </a:r>
+          </a:p>
+        </p:txBody>
+      </p:sp>
+      <p:sp>
+        <p:nvSpPr>
+          <p:cNvPr id="16" name="TextBox 15"/>
+          <p:cNvSpPr txBox="1"/>
+          <p:nvPr/>
+        </p:nvSpPr>
+        <p:spPr>
+          <a:xfrm>
+            <a:off x="8763000" y="4238625"/>
+            <a:ext cx="8191500" cy="4762500"/>
+          </a:xfrm>
+          <a:prstGeom prst="rect">
+            <a:avLst/>
+          </a:prstGeom>
+          <a:noFill/>
+        </p:spPr>
+        <p:txBody>
+          <a:bodyPr wrap="none">
+            <a:spAutoFit/>
+          </a:bodyPr>
+          <a:lstStyle/>
+          <a:p/>
+          <a:p>
+            <a:pPr>
+              <a:defRPr sz="1575" b="1">
+                <a:solidFill>
+                  <a:srgbClr val="168B82"/>
+                </a:solidFill>
+                <a:latin typeface="프리텐다드"/>
+              </a:defRPr>
+            </a:pPr>
+            <a:r>
+              <a:t>✔  쉬운 의학 개념 해설</a:t>
+            </a:r>
+          </a:p>
+          <a:p>
+            <a:pPr>
+              <a:spcAft>
+                <a:spcPts val="1000"/>
+              </a:spcAft>
+              <a:defRPr sz="1350">
+                <a:solidFill>
+                  <a:srgbClr val="17263A"/>
+                </a:solidFill>
+                <a:latin typeface="프리텐다드"/>
+              </a:defRPr>
+            </a:pPr>
+            <a:r>
+              <a:t>     AFP 정상 수치와 간암/간경화 선별검사 목적을 비임상 환자 언어로 해설</a:t>
+            </a:r>
+          </a:p>
+          <a:p>
+            <a:pPr>
+              <a:defRPr sz="1575" b="1">
+                <a:solidFill>
+                  <a:srgbClr val="168B82"/>
+                </a:solidFill>
+                <a:latin typeface="프리텐다드"/>
+              </a:defRPr>
+            </a:pPr>
+            <a:r>
+              <a:t>✔  추천 질문 스튜디오</a:t>
+            </a:r>
+          </a:p>
+          <a:p>
+            <a:pPr>
+              <a:spcAft>
+                <a:spcPts val="1000"/>
+              </a:spcAft>
+              <a:defRPr sz="1350">
+                <a:solidFill>
+                  <a:srgbClr val="17263A"/>
+                </a:solidFill>
+                <a:latin typeface="프리텐다드"/>
+              </a:defRPr>
+            </a:pPr>
+            <a:r>
+              <a:t>     'AFP 검사가 뭔가요?', '초음파와 차이점', '주의사항' 등 원클릭 퀵 질의</a:t>
+            </a:r>
+          </a:p>
+          <a:p>
+            <a:pPr>
+              <a:defRPr sz="1575" b="1">
+                <a:solidFill>
+                  <a:srgbClr val="168B82"/>
+                </a:solidFill>
+                <a:latin typeface="프리텐다드"/>
+              </a:defRPr>
+            </a:pPr>
+            <a:r>
+              <a:t>✔  의사 상담 리허설 박스</a:t>
+            </a:r>
+          </a:p>
+          <a:p>
+            <a:pPr>
+              <a:spcAft>
+                <a:spcPts val="1000"/>
+              </a:spcAft>
+              <a:defRPr sz="1350">
+                <a:solidFill>
+                  <a:srgbClr val="17263A"/>
+                </a:solidFill>
+                <a:latin typeface="프리텐다드"/>
+              </a:defRPr>
+            </a:pPr>
+            <a:r>
+              <a:t>     진료실에서 주치의에게 물어봐야 할 맞춤 질문 3가지를 자동 정리</a:t>
+            </a:r>
+          </a:p>
+          <a:p>
+            <a:pPr>
+              <a:defRPr sz="1575" b="1">
+                <a:solidFill>
+                  <a:srgbClr val="168B82"/>
+                </a:solidFill>
+                <a:latin typeface="프리텐다드"/>
+              </a:defRPr>
+            </a:pPr>
+            <a:r>
+              <a:t>✔  공인 학술 출처 투명 표기</a:t>
+            </a:r>
+          </a:p>
+          <a:p>
+            <a:pPr>
+              <a:spcAft>
+                <a:spcPts val="1000"/>
+              </a:spcAft>
+              <a:defRPr sz="1350">
+                <a:solidFill>
+                  <a:srgbClr val="17263A"/>
+                </a:solidFill>
+                <a:latin typeface="프리텐다드"/>
+              </a:defRPr>
+            </a:pPr>
+            <a:r>
+              <a:t>     MedlinePlus 및 간학회 가이드라인 출처 링크를 명확히 제시하여 신뢰 확보</a:t>
+            </a:r>
+          </a:p>
+          <a:p>
+            <a:pPr>
+              <a:defRPr sz="1575" b="1">
+                <a:solidFill>
+                  <a:srgbClr val="168B82"/>
+                </a:solidFill>
+                <a:latin typeface="프리텐다드"/>
+              </a:defRPr>
+            </a:pPr>
+            <a:r>
+              <a:t>✔  한국어 형태소 전처리</a:t>
+            </a:r>
+          </a:p>
+          <a:p>
+            <a:pPr>
+              <a:spcAft>
+                <a:spcPts val="1000"/>
+              </a:spcAft>
+              <a:defRPr sz="1350">
+                <a:solidFill>
+                  <a:srgbClr val="17263A"/>
+                </a:solidFill>
+                <a:latin typeface="프리텐다드"/>
+              </a:defRPr>
+            </a:pPr>
+            <a:r>
+              <a:t>     체언과 조사를 분리하여 'AFP란', '초음파에 대해서' 등 구어체 질문 완벽 처리</a:t>
+            </a:r>
+          </a:p>
+        </p:txBody>
+      </p:sp>
+    </p:spTree>
+  </p:cSld>
+  <p:clrMapOvr>
+    <a:masterClrMapping/>
+  </p:clrMapOvr>
+</p:sld>
+</file>
+
+<file path=ppt/slides/slide14.xml><?xml version="1.0" encoding="utf-8"?>
+<p:sld xmlns:a="http://schemas.openxmlformats.org/drawingml/2006/main" xmlns:p="http://schemas.openxmlformats.org/presentationml/2006/main" xmlns:r="http://schemas.openxmlformats.org/officeDocument/2006/relationships">
+  <p:cSld>
+    <p:spTree>
+      <p:nvGrpSpPr>
+        <p:cNvPr id="1" name=""/>
+        <p:cNvGrpSpPr/>
+        <p:nvPr/>
+      </p:nvGrpSpPr>
+      <p:grpSpPr/>
+      <p:sp>
+        <p:nvSpPr>
+          <p:cNvPr id="2" name="Rectangle 1"/>
+          <p:cNvSpPr/>
+          <p:nvPr/>
+        </p:nvSpPr>
+        <p:spPr>
+          <a:xfrm>
+            <a:off x="0" y="0"/>
+            <a:ext cx="18288000" cy="10287000"/>
+          </a:xfrm>
+          <a:prstGeom prst="rect">
+            <a:avLst/>
+          </a:prstGeom>
+          <a:solidFill>
+            <a:srgbClr val="FFFFFF"/>
+          </a:solidFill>
+          <a:ln>
+            <a:noFill/>
+          </a:ln>
+        </p:spPr>
+        <p:style>
+          <a:lnRef idx="1">
+            <a:schemeClr val="accent1"/>
+          </a:lnRef>
+          <a:fillRef idx="3">
+            <a:schemeClr val="accent1"/>
+          </a:fillRef>
+          <a:effectRef idx="2">
+            <a:schemeClr val="accent1"/>
+          </a:effectRef>
+          <a:fontRef idx="minor">
+            <a:schemeClr val="lt1"/>
+          </a:fontRef>
+        </p:style>
+        <p:txBody>
+          <a:bodyPr rtlCol="0" anchor="ctr"/>
+          <a:lstStyle/>
+          <a:p>
+            <a:pPr algn="ctr"/>
+          </a:p>
+        </p:txBody>
+      </p:sp>
+      <p:sp>
+        <p:nvSpPr>
+          <p:cNvPr id="3" name="Rectangle 2"/>
+          <p:cNvSpPr/>
+          <p:nvPr/>
+        </p:nvSpPr>
+        <p:spPr>
+          <a:xfrm>
+            <a:off x="0" y="0"/>
+            <a:ext cx="18288000" cy="2457450"/>
+          </a:xfrm>
+          <a:prstGeom prst="rect">
+            <a:avLst/>
+          </a:prstGeom>
+          <a:solidFill>
+            <a:srgbClr val="F3F6FA"/>
+          </a:solidFill>
+          <a:ln>
+            <a:noFill/>
+          </a:ln>
+        </p:spPr>
+        <p:style>
+          <a:lnRef idx="1">
+            <a:schemeClr val="accent1"/>
+          </a:lnRef>
+          <a:fillRef idx="3">
+            <a:schemeClr val="accent1"/>
+          </a:fillRef>
+          <a:effectRef idx="2">
+            <a:schemeClr val="accent1"/>
+          </a:effectRef>
+          <a:fontRef idx="minor">
+            <a:schemeClr val="lt1"/>
+          </a:fontRef>
+        </p:style>
+        <p:txBody>
+          <a:bodyPr rtlCol="0" anchor="ctr"/>
+          <a:lstStyle/>
+          <a:p>
+            <a:pPr algn="ctr"/>
+          </a:p>
+        </p:txBody>
+      </p:sp>
+      <p:sp>
+        <p:nvSpPr>
+          <p:cNvPr id="4" name="Rectangle 3"/>
+          <p:cNvSpPr/>
+          <p:nvPr/>
+        </p:nvSpPr>
+        <p:spPr>
+          <a:xfrm>
+            <a:off x="1028700" y="723900"/>
+            <a:ext cx="76200" cy="1257300"/>
+          </a:xfrm>
+          <a:prstGeom prst="rect">
+            <a:avLst/>
+          </a:prstGeom>
+          <a:solidFill>
+            <a:srgbClr val="2F68B5"/>
+          </a:solidFill>
+          <a:ln>
+            <a:noFill/>
+          </a:ln>
+        </p:spPr>
+        <p:style>
+          <a:lnRef idx="1">
+            <a:schemeClr val="accent1"/>
+          </a:lnRef>
+          <a:fillRef idx="3">
+            <a:schemeClr val="accent1"/>
+          </a:fillRef>
+          <a:effectRef idx="2">
+            <a:schemeClr val="accent1"/>
+          </a:effectRef>
+          <a:fontRef idx="minor">
+            <a:schemeClr val="lt1"/>
+          </a:fontRef>
+        </p:style>
+        <p:txBody>
+          <a:bodyPr rtlCol="0" anchor="ctr"/>
+          <a:lstStyle/>
+          <a:p>
+            <a:pPr algn="ctr"/>
+          </a:p>
+        </p:txBody>
+      </p:sp>
+      <p:sp>
+        <p:nvSpPr>
+          <p:cNvPr id="5" name="TextBox 4"/>
+          <p:cNvSpPr txBox="1"/>
+          <p:nvPr/>
+        </p:nvSpPr>
+        <p:spPr>
+          <a:xfrm>
+            <a:off x="1428750" y="590550"/>
+            <a:ext cx="15240000" cy="361950"/>
+          </a:xfrm>
+          <a:prstGeom prst="rect">
+            <a:avLst/>
+          </a:prstGeom>
+          <a:noFill/>
+        </p:spPr>
+        <p:txBody>
+          <a:bodyPr wrap="square">
+            <a:spAutoFit/>
+          </a:bodyPr>
+          <a:lstStyle/>
+          <a:p>
+            <a:pPr>
+              <a:defRPr sz="1575" b="1">
+                <a:solidFill>
+                  <a:srgbClr val="2F68B5"/>
+                </a:solidFill>
+                <a:latin typeface="프리텐다드"/>
+              </a:defRPr>
+            </a:pPr>
+            <a:r>
+              <a:t>06. LIVE SERVICE · CLINICIAN VIEWER</a:t>
+            </a:r>
+          </a:p>
+        </p:txBody>
+      </p:sp>
+      <p:sp>
+        <p:nvSpPr>
+          <p:cNvPr id="6" name="TextBox 5"/>
+          <p:cNvSpPr txBox="1"/>
+          <p:nvPr/>
+        </p:nvSpPr>
+        <p:spPr>
+          <a:xfrm>
+            <a:off x="1428750" y="962024"/>
+            <a:ext cx="15716250" cy="1314450"/>
+          </a:xfrm>
+          <a:prstGeom prst="rect">
+            <a:avLst/>
+          </a:prstGeom>
+          <a:noFill/>
+        </p:spPr>
+        <p:txBody>
+          <a:bodyPr wrap="square">
+            <a:spAutoFit/>
+          </a:bodyPr>
+          <a:lstStyle/>
+          <a:p>
+            <a:pPr>
+              <a:defRPr sz="3750" b="1">
+                <a:solidFill>
+                  <a:srgbClr val="17263A"/>
+                </a:solidFill>
+                <a:latin typeface="프리텐다드"/>
+              </a:defRPr>
+            </a:pPr>
+            <a:r>
+              <a:t>5분 단기 토큰 기반 700 Slices 복부 CT 뷰어</a:t>
+            </a:r>
+          </a:p>
+        </p:txBody>
+      </p:sp>
+      <p:sp>
+        <p:nvSpPr>
+          <p:cNvPr id="7" name="TextBox 6"/>
+          <p:cNvSpPr txBox="1"/>
+          <p:nvPr/>
+        </p:nvSpPr>
+        <p:spPr>
+          <a:xfrm>
+            <a:off x="1028700" y="2686050"/>
+            <a:ext cx="16230600" cy="457200"/>
+          </a:xfrm>
+          <a:prstGeom prst="rect">
+            <a:avLst/>
+          </a:prstGeom>
+          <a:noFill/>
+        </p:spPr>
+        <p:txBody>
+          <a:bodyPr wrap="square">
+            <a:spAutoFit/>
+          </a:bodyPr>
+          <a:lstStyle/>
+          <a:p>
+            <a:pPr>
+              <a:defRPr sz="1875">
+                <a:solidFill>
+                  <a:srgbClr val="53657B"/>
+                </a:solidFill>
+                <a:latin typeface="프리텐다드"/>
+              </a:defRPr>
+            </a:pPr>
+            <a:r>
+              <a:t>로컬 PC 무단 다운로드 차단, 5분 유효 단기 토큰 기반 WADO-RS 프레임 지연 스트리밍</a:t>
+            </a:r>
+          </a:p>
+        </p:txBody>
+      </p:sp>
+      <p:sp>
+        <p:nvSpPr>
+          <p:cNvPr id="8" name="Rectangle 7"/>
+          <p:cNvSpPr/>
+          <p:nvPr/>
+        </p:nvSpPr>
+        <p:spPr>
+          <a:xfrm>
+            <a:off x="1028700" y="9582150"/>
+            <a:ext cx="16230600" cy="19050"/>
+          </a:xfrm>
+          <a:prstGeom prst="rect">
+            <a:avLst/>
+          </a:prstGeom>
+          <a:solidFill>
+            <a:srgbClr val="D8E0E9"/>
+          </a:solidFill>
+          <a:ln>
+            <a:noFill/>
+          </a:ln>
+        </p:spPr>
+        <p:style>
+          <a:lnRef idx="1">
+            <a:schemeClr val="accent1"/>
+          </a:lnRef>
+          <a:fillRef idx="3">
+            <a:schemeClr val="accent1"/>
+          </a:fillRef>
+          <a:effectRef idx="2">
+            <a:schemeClr val="accent1"/>
+          </a:effectRef>
+          <a:fontRef idx="minor">
+            <a:schemeClr val="lt1"/>
+          </a:fontRef>
+        </p:style>
+        <p:txBody>
+          <a:bodyPr rtlCol="0" anchor="ctr"/>
+          <a:lstStyle/>
+          <a:p>
+            <a:pPr algn="ctr"/>
+          </a:p>
+        </p:txBody>
+      </p:sp>
+      <p:sp>
+        <p:nvSpPr>
+          <p:cNvPr id="9" name="TextBox 8"/>
+          <p:cNvSpPr txBox="1"/>
+          <p:nvPr/>
+        </p:nvSpPr>
+        <p:spPr>
+          <a:xfrm>
+            <a:off x="1028700" y="9658350"/>
+            <a:ext cx="11430000" cy="295275"/>
+          </a:xfrm>
+          <a:prstGeom prst="rect">
+            <a:avLst/>
+          </a:prstGeom>
+          <a:noFill/>
+        </p:spPr>
+        <p:txBody>
+          <a:bodyPr wrap="none">
+            <a:spAutoFit/>
+          </a:bodyPr>
+          <a:lstStyle/>
+          <a:p>
+            <a:pPr>
+              <a:defRPr sz="1275">
+                <a:solidFill>
+                  <a:srgbClr val="7B8A9B"/>
+                </a:solidFill>
+                <a:latin typeface="프리텐다드"/>
+              </a:defRPr>
+            </a:pPr>
+            <a:r>
+              <a:t>Medi Q  /  합성 데이터 · 비임상 기술 PoC  ·  아키텍처 모션 워크스루</a:t>
+            </a:r>
+          </a:p>
+        </p:txBody>
+      </p:sp>
+      <p:sp>
+        <p:nvSpPr>
+          <p:cNvPr id="10" name="TextBox 9"/>
+          <p:cNvSpPr txBox="1"/>
+          <p:nvPr/>
+        </p:nvSpPr>
+        <p:spPr>
+          <a:xfrm>
+            <a:off x="15240000" y="9658350"/>
+            <a:ext cx="2019300" cy="295275"/>
+          </a:xfrm>
+          <a:prstGeom prst="rect">
+            <a:avLst/>
+          </a:prstGeom>
+          <a:noFill/>
+        </p:spPr>
+        <p:txBody>
+          <a:bodyPr wrap="none">
+            <a:spAutoFit/>
+          </a:bodyPr>
+          <a:lstStyle/>
+          <a:p>
+            <a:pPr algn="r">
+              <a:defRPr sz="1275" b="1">
+                <a:solidFill>
+                  <a:srgbClr val="7B8A9B"/>
+                </a:solidFill>
+                <a:latin typeface="프리텐다드"/>
+              </a:defRPr>
+            </a:pPr>
+            <a:r>
+              <a:t>14  /  16</a:t>
+            </a:r>
+          </a:p>
+        </p:txBody>
+      </p:sp>
+      <p:sp>
+        <p:nvSpPr>
+          <p:cNvPr id="11" name="Rounded Rectangle 10"/>
+          <p:cNvSpPr/>
+          <p:nvPr/>
+        </p:nvSpPr>
+        <p:spPr>
+          <a:xfrm>
+            <a:off x="1028700" y="3333750"/>
+            <a:ext cx="9906000" cy="5810250"/>
+          </a:xfrm>
+          <a:prstGeom prst="roundRect">
+            <a:avLst/>
+          </a:prstGeom>
+          <a:solidFill>
+            <a:srgbClr val="FFFFFF"/>
+          </a:solidFill>
+          <a:ln w="19050">
+            <a:solidFill>
+              <a:srgbClr val="D8E0E9"/>
+            </a:solidFill>
+          </a:ln>
+        </p:spPr>
+        <p:style>
+          <a:lnRef idx="1">
+            <a:schemeClr val="accent1"/>
+          </a:lnRef>
+          <a:fillRef idx="3">
+            <a:schemeClr val="accent1"/>
+          </a:fillRef>
+          <a:effectRef idx="2">
+            <a:schemeClr val="accent1"/>
+          </a:effectRef>
+          <a:fontRef idx="minor">
+            <a:schemeClr val="lt1"/>
+          </a:fontRef>
+        </p:style>
+        <p:txBody>
+          <a:bodyPr rtlCol="0" anchor="ctr"/>
+          <a:lstStyle/>
+          <a:p>
+            <a:pPr algn="ctr"/>
+          </a:p>
+        </p:txBody>
+      </p:sp>
+      <p:pic>
+        <p:nvPicPr>
+          <p:cNvPr id="12" name="Picture 11" descr="07_clinician_dicom_viewer.png"/>
+          <p:cNvPicPr>
+            <a:picLocks noChangeAspect="1"/>
+          </p:cNvPicPr>
+          <p:nvPr/>
+        </p:nvPicPr>
+        <p:blipFill>
+          <a:blip r:embed="rId2"/>
+          <a:stretch>
+            <a:fillRect/>
+          </a:stretch>
+        </p:blipFill>
+        <p:spPr>
+          <a:xfrm>
+            <a:off x="1219200" y="3524250"/>
+            <a:ext cx="9525000" cy="6779121"/>
+          </a:xfrm>
+          <a:prstGeom prst="rect">
+            <a:avLst/>
+          </a:prstGeom>
+        </p:spPr>
+      </p:pic>
+      <p:sp>
+        <p:nvSpPr>
+          <p:cNvPr id="13" name="Rounded Rectangle 12"/>
+          <p:cNvSpPr/>
+          <p:nvPr/>
+        </p:nvSpPr>
+        <p:spPr>
+          <a:xfrm>
+            <a:off x="11239500" y="3333750"/>
+            <a:ext cx="6019800" cy="5810250"/>
+          </a:xfrm>
+          <a:prstGeom prst="roundRect">
+            <a:avLst/>
+          </a:prstGeom>
+          <a:solidFill>
+            <a:srgbClr val="F3F6FA"/>
+          </a:solidFill>
+          <a:ln w="19050">
+            <a:solidFill>
+              <a:srgbClr val="D8E0E9"/>
+            </a:solidFill>
+          </a:ln>
+        </p:spPr>
+        <p:style>
+          <a:lnRef idx="1">
+            <a:schemeClr val="accent1"/>
+          </a:lnRef>
+          <a:fillRef idx="3">
+            <a:schemeClr val="accent1"/>
+          </a:fillRef>
+          <a:effectRef idx="2">
+            <a:schemeClr val="accent1"/>
+          </a:effectRef>
+          <a:fontRef idx="minor">
+            <a:schemeClr val="lt1"/>
+          </a:fontRef>
+        </p:style>
+        <p:txBody>
+          <a:bodyPr rtlCol="0" anchor="ctr"/>
+          <a:lstStyle/>
+          <a:p>
+            <a:pPr algn="ctr"/>
+          </a:p>
+        </p:txBody>
+      </p:sp>
+      <p:sp>
+        <p:nvSpPr>
+          <p:cNvPr id="14" name="Rounded Rectangle 13"/>
+          <p:cNvSpPr/>
+          <p:nvPr/>
+        </p:nvSpPr>
+        <p:spPr>
+          <a:xfrm>
+            <a:off x="11525250" y="3619500"/>
+            <a:ext cx="1905000" cy="400050"/>
+          </a:xfrm>
+          <a:prstGeom prst="roundRect">
+            <a:avLst/>
+          </a:prstGeom>
+          <a:solidFill>
+            <a:srgbClr val="2F68B5"/>
+          </a:solidFill>
+          <a:ln>
+            <a:noFill/>
+          </a:ln>
+        </p:spPr>
+        <p:style>
+          <a:lnRef idx="1">
+            <a:schemeClr val="accent1"/>
+          </a:lnRef>
+          <a:fillRef idx="3">
+            <a:schemeClr val="accent1"/>
+          </a:fillRef>
+          <a:effectRef idx="2">
+            <a:schemeClr val="accent1"/>
+          </a:effectRef>
+          <a:fontRef idx="minor">
+            <a:schemeClr val="lt1"/>
+          </a:fontRef>
+        </p:style>
+        <p:txBody>
+          <a:bodyPr rtlCol="0" anchor="ctr"/>
+          <a:lstStyle/>
+          <a:p>
+            <a:pPr algn="ctr">
+              <a:defRPr sz="1425" b="1">
+                <a:solidFill>
+                  <a:srgbClr val="FFFFFF"/>
+                </a:solidFill>
+                <a:latin typeface="프리텐다드"/>
+              </a:defRPr>
+            </a:pPr>
+            <a:r>
+              <a:t>의료진 뷰어</a:t>
+            </a:r>
+          </a:p>
+        </p:txBody>
+      </p:sp>
+      <p:sp>
+        <p:nvSpPr>
+          <p:cNvPr id="15" name="TextBox 14"/>
+          <p:cNvSpPr txBox="1"/>
+          <p:nvPr/>
+        </p:nvSpPr>
+        <p:spPr>
+          <a:xfrm>
+            <a:off x="13620750" y="3600450"/>
+            <a:ext cx="3429000" cy="428625"/>
+          </a:xfrm>
+          <a:prstGeom prst="rect">
+            <a:avLst/>
+          </a:prstGeom>
+          <a:noFill/>
+        </p:spPr>
+        <p:txBody>
+          <a:bodyPr wrap="none">
+            <a:spAutoFit/>
+          </a:bodyPr>
+          <a:lstStyle/>
+          <a:p>
+            <a:pPr>
+              <a:defRPr sz="1875" b="1">
+                <a:solidFill>
+                  <a:srgbClr val="17263A"/>
+                </a:solidFill>
+                <a:latin typeface="프리텐다드"/>
+              </a:defRPr>
+            </a:pPr>
+            <a:r>
+              <a:t>700 Slices 대용량 무지연 렌더링</a:t>
+            </a:r>
+          </a:p>
+        </p:txBody>
+      </p:sp>
+      <p:sp>
+        <p:nvSpPr>
+          <p:cNvPr id="16" name="TextBox 15"/>
+          <p:cNvSpPr txBox="1"/>
+          <p:nvPr/>
+        </p:nvSpPr>
+        <p:spPr>
+          <a:xfrm>
+            <a:off x="11525250" y="4238625"/>
+            <a:ext cx="5429250" cy="4762500"/>
+          </a:xfrm>
+          <a:prstGeom prst="rect">
+            <a:avLst/>
+          </a:prstGeom>
+          <a:noFill/>
+        </p:spPr>
+        <p:txBody>
+          <a:bodyPr wrap="none">
+            <a:spAutoFit/>
+          </a:bodyPr>
+          <a:lstStyle/>
+          <a:p/>
+          <a:p>
+            <a:pPr>
+              <a:defRPr sz="1575" b="1">
+                <a:solidFill>
+                  <a:srgbClr val="2F68B5"/>
+                </a:solidFill>
+                <a:latin typeface="프리텐다드"/>
+              </a:defRPr>
+            </a:pPr>
+            <a:r>
+              <a:t>✔  WADO-RS 스트리밍</a:t>
+            </a:r>
+          </a:p>
+          <a:p>
+            <a:pPr>
+              <a:spcAft>
+                <a:spcPts val="1000"/>
+              </a:spcAft>
+              <a:defRPr sz="1350">
+                <a:solidFill>
+                  <a:srgbClr val="17263A"/>
+                </a:solidFill>
+                <a:latin typeface="프리텐다드"/>
+              </a:defRPr>
+            </a:pPr>
+            <a:r>
+              <a:t>     700장 대용량 CT를 다운로드 없이 프레임 단위 초고속 렌더링</a:t>
+            </a:r>
+          </a:p>
+          <a:p>
+            <a:pPr>
+              <a:defRPr sz="1575" b="1">
+                <a:solidFill>
+                  <a:srgbClr val="2F68B5"/>
+                </a:solidFill>
+                <a:latin typeface="프리텐다드"/>
+              </a:defRPr>
+            </a:pPr>
+            <a:r>
+              <a:t>✔  정밀 판독 도구</a:t>
+            </a:r>
+          </a:p>
+          <a:p>
+            <a:pPr>
+              <a:spcAft>
+                <a:spcPts val="1000"/>
+              </a:spcAft>
+              <a:defRPr sz="1350">
+                <a:solidFill>
+                  <a:srgbClr val="17263A"/>
+                </a:solidFill>
+                <a:latin typeface="프리텐다드"/>
+              </a:defRPr>
+            </a:pPr>
+            <a:r>
+              <a:t>     간 병변 십자선, 다중 단면 연속 스크롤, 윈도우 레벨링, 시리즈 썸네일</a:t>
+            </a:r>
+          </a:p>
+          <a:p>
+            <a:pPr>
+              <a:defRPr sz="1575" b="1">
+                <a:solidFill>
+                  <a:srgbClr val="2F68B5"/>
+                </a:solidFill>
+                <a:latin typeface="프리텐다드"/>
+              </a:defRPr>
+            </a:pPr>
+            <a:r>
+              <a:t>✔  5분 단기 서명 토큰</a:t>
+            </a:r>
+          </a:p>
+          <a:p>
+            <a:pPr>
+              <a:spcAft>
+                <a:spcPts val="1000"/>
+              </a:spcAft>
+              <a:defRPr sz="1350">
+                <a:solidFill>
+                  <a:srgbClr val="17263A"/>
+                </a:solidFill>
+                <a:latin typeface="프리텐다드"/>
+              </a:defRPr>
+            </a:pPr>
+            <a:r>
+              <a:t>     시간 경과 시 세션 자동 만료로 장기 토큰 탈취 위험 원천 차단</a:t>
+            </a:r>
+          </a:p>
+          <a:p>
+            <a:pPr>
+              <a:defRPr sz="1575" b="1">
+                <a:solidFill>
+                  <a:srgbClr val="2F68B5"/>
+                </a:solidFill>
+                <a:latin typeface="프리텐다드"/>
+              </a:defRPr>
+            </a:pPr>
+            <a:r>
+              <a:t>✔  로컬 다운로드 금지</a:t>
+            </a:r>
+          </a:p>
+          <a:p>
+            <a:pPr>
+              <a:spcAft>
+                <a:spcPts val="1000"/>
+              </a:spcAft>
+              <a:defRPr sz="1350">
+                <a:solidFill>
+                  <a:srgbClr val="17263A"/>
+                </a:solidFill>
+                <a:latin typeface="프리텐다드"/>
+              </a:defRPr>
+            </a:pPr>
+            <a:r>
+              <a:t>     의료진 PC에 원본 DICOM 파일 무단 저장을 엄격히 차단</a:t>
+            </a:r>
+          </a:p>
+          <a:p>
+            <a:pPr>
+              <a:defRPr sz="1575" b="1">
+                <a:solidFill>
+                  <a:srgbClr val="2F68B5"/>
+                </a:solidFill>
+                <a:latin typeface="프리텐다드"/>
+              </a:defRPr>
+            </a:pPr>
+            <a:r>
+              <a:t>✔  DICOMweb 표준 준수</a:t>
+            </a:r>
+          </a:p>
+          <a:p>
+            <a:pPr>
+              <a:spcAft>
+                <a:spcPts val="1000"/>
+              </a:spcAft>
+              <a:defRPr sz="1350">
+                <a:solidFill>
+                  <a:srgbClr val="17263A"/>
+                </a:solidFill>
+                <a:latin typeface="프리텐다드"/>
+              </a:defRPr>
+            </a:pPr>
+            <a:r>
+              <a:t>     QIDO-RS / WADO-RS 표준으로 기존 병원 PACS와 완벽 호환</a:t>
+            </a:r>
+          </a:p>
+        </p:txBody>
+      </p:sp>
+    </p:spTree>
+  </p:cSld>
+  <p:clrMapOvr>
+    <a:masterClrMapping/>
+  </p:clrMapOvr>
+</p:sld>
+</file>
+
+<file path=ppt/slides/slide15.xml><?xml version="1.0" encoding="utf-8"?>
+<p:sld xmlns:a="http://schemas.openxmlformats.org/drawingml/2006/main" xmlns:p="http://schemas.openxmlformats.org/presentationml/2006/main" xmlns:r="http://schemas.openxmlformats.org/officeDocument/2006/relationships">
+  <p:cSld>
+    <p:spTree>
+      <p:nvGrpSpPr>
+        <p:cNvPr id="1" name=""/>
+        <p:cNvGrpSpPr/>
+        <p:nvPr/>
+      </p:nvGrpSpPr>
+      <p:grpSpPr/>
+      <p:sp>
+        <p:nvSpPr>
+          <p:cNvPr id="2" name="Rectangle 1"/>
+          <p:cNvSpPr/>
+          <p:nvPr/>
+        </p:nvSpPr>
+        <p:spPr>
+          <a:xfrm>
+            <a:off x="0" y="0"/>
+            <a:ext cx="18288000" cy="10287000"/>
+          </a:xfrm>
+          <a:prstGeom prst="rect">
+            <a:avLst/>
+          </a:prstGeom>
+          <a:solidFill>
+            <a:srgbClr val="FFFFFF"/>
+          </a:solidFill>
+          <a:ln>
+            <a:noFill/>
+          </a:ln>
+        </p:spPr>
+        <p:style>
+          <a:lnRef idx="1">
+            <a:schemeClr val="accent1"/>
+          </a:lnRef>
+          <a:fillRef idx="3">
+            <a:schemeClr val="accent1"/>
+          </a:fillRef>
+          <a:effectRef idx="2">
+            <a:schemeClr val="accent1"/>
+          </a:effectRef>
+          <a:fontRef idx="minor">
+            <a:schemeClr val="lt1"/>
+          </a:fontRef>
+        </p:style>
+        <p:txBody>
+          <a:bodyPr rtlCol="0" anchor="ctr"/>
+          <a:lstStyle/>
+          <a:p>
+            <a:pPr algn="ctr"/>
+          </a:p>
+        </p:txBody>
+      </p:sp>
+      <p:sp>
+        <p:nvSpPr>
+          <p:cNvPr id="3" name="Rectangle 2"/>
+          <p:cNvSpPr/>
+          <p:nvPr/>
+        </p:nvSpPr>
+        <p:spPr>
+          <a:xfrm>
+            <a:off x="0" y="0"/>
+            <a:ext cx="18288000" cy="2457450"/>
+          </a:xfrm>
+          <a:prstGeom prst="rect">
+            <a:avLst/>
+          </a:prstGeom>
+          <a:solidFill>
+            <a:srgbClr val="F3F6FA"/>
+          </a:solidFill>
+          <a:ln>
+            <a:noFill/>
+          </a:ln>
+        </p:spPr>
+        <p:style>
+          <a:lnRef idx="1">
+            <a:schemeClr val="accent1"/>
+          </a:lnRef>
+          <a:fillRef idx="3">
+            <a:schemeClr val="accent1"/>
+          </a:fillRef>
+          <a:effectRef idx="2">
+            <a:schemeClr val="accent1"/>
+          </a:effectRef>
+          <a:fontRef idx="minor">
+            <a:schemeClr val="lt1"/>
+          </a:fontRef>
+        </p:style>
+        <p:txBody>
+          <a:bodyPr rtlCol="0" anchor="ctr"/>
+          <a:lstStyle/>
+          <a:p>
+            <a:pPr algn="ctr"/>
+          </a:p>
+        </p:txBody>
+      </p:sp>
+      <p:sp>
+        <p:nvSpPr>
+          <p:cNvPr id="4" name="Rectangle 3"/>
+          <p:cNvSpPr/>
+          <p:nvPr/>
+        </p:nvSpPr>
+        <p:spPr>
+          <a:xfrm>
+            <a:off x="1028700" y="723900"/>
+            <a:ext cx="76200" cy="1257300"/>
+          </a:xfrm>
+          <a:prstGeom prst="rect">
+            <a:avLst/>
+          </a:prstGeom>
+          <a:solidFill>
+            <a:srgbClr val="2F68B5"/>
+          </a:solidFill>
+          <a:ln>
+            <a:noFill/>
+          </a:ln>
+        </p:spPr>
+        <p:style>
+          <a:lnRef idx="1">
+            <a:schemeClr val="accent1"/>
+          </a:lnRef>
+          <a:fillRef idx="3">
+            <a:schemeClr val="accent1"/>
+          </a:fillRef>
+          <a:effectRef idx="2">
+            <a:schemeClr val="accent1"/>
+          </a:effectRef>
+          <a:fontRef idx="minor">
+            <a:schemeClr val="lt1"/>
+          </a:fontRef>
+        </p:style>
+        <p:txBody>
+          <a:bodyPr rtlCol="0" anchor="ctr"/>
+          <a:lstStyle/>
+          <a:p>
+            <a:pPr algn="ctr"/>
+          </a:p>
+        </p:txBody>
+      </p:sp>
+      <p:sp>
+        <p:nvSpPr>
+          <p:cNvPr id="5" name="TextBox 4"/>
+          <p:cNvSpPr txBox="1"/>
+          <p:nvPr/>
+        </p:nvSpPr>
+        <p:spPr>
+          <a:xfrm>
+            <a:off x="1428750" y="590550"/>
+            <a:ext cx="15240000" cy="361950"/>
+          </a:xfrm>
+          <a:prstGeom prst="rect">
+            <a:avLst/>
+          </a:prstGeom>
+          <a:noFill/>
+        </p:spPr>
+        <p:txBody>
+          <a:bodyPr wrap="square">
+            <a:spAutoFit/>
+          </a:bodyPr>
+          <a:lstStyle/>
+          <a:p>
+            <a:pPr>
+              <a:defRPr sz="1575" b="1">
+                <a:solidFill>
+                  <a:srgbClr val="2F68B5"/>
+                </a:solidFill>
+                <a:latin typeface="프리텐다드"/>
+              </a:defRPr>
+            </a:pPr>
+            <a:r>
+              <a:t>07. LIVE SERVICE · SECURITY CONSOLE</a:t>
+            </a:r>
+          </a:p>
+        </p:txBody>
+      </p:sp>
+      <p:sp>
+        <p:nvSpPr>
+          <p:cNvPr id="6" name="TextBox 5"/>
+          <p:cNvSpPr txBox="1"/>
+          <p:nvPr/>
+        </p:nvSpPr>
+        <p:spPr>
+          <a:xfrm>
+            <a:off x="1428750" y="962024"/>
+            <a:ext cx="15716250" cy="1314450"/>
+          </a:xfrm>
+          <a:prstGeom prst="rect">
+            <a:avLst/>
+          </a:prstGeom>
+          <a:noFill/>
+        </p:spPr>
+        <p:txBody>
+          <a:bodyPr wrap="square">
+            <a:spAutoFit/>
+          </a:bodyPr>
+          <a:lstStyle/>
+          <a:p>
+            <a:pPr>
+              <a:defRPr sz="3750" b="1">
+                <a:solidFill>
+                  <a:srgbClr val="17263A"/>
+                </a:solidFill>
+                <a:latin typeface="프리텐다드"/>
+              </a:defRPr>
+            </a:pPr>
+            <a:r>
+              <a:t>모든 접근을 불변 추적하는 통합 보안 관제 콘솔</a:t>
+            </a:r>
+          </a:p>
+        </p:txBody>
+      </p:sp>
+      <p:sp>
+        <p:nvSpPr>
+          <p:cNvPr id="7" name="TextBox 6"/>
+          <p:cNvSpPr txBox="1"/>
+          <p:nvPr/>
+        </p:nvSpPr>
+        <p:spPr>
+          <a:xfrm>
+            <a:off x="1028700" y="2686050"/>
+            <a:ext cx="16230600" cy="457200"/>
+          </a:xfrm>
+          <a:prstGeom prst="rect">
+            <a:avLst/>
+          </a:prstGeom>
+          <a:noFill/>
+        </p:spPr>
+        <p:txBody>
+          <a:bodyPr wrap="square">
+            <a:spAutoFit/>
+          </a:bodyPr>
+          <a:lstStyle/>
+          <a:p>
+            <a:pPr>
+              <a:defRPr sz="1875">
+                <a:solidFill>
+                  <a:srgbClr val="53657B"/>
+                </a:solidFill>
+                <a:latin typeface="프리텐다드"/>
+              </a:defRPr>
+            </a:pPr>
+            <a:r>
+              <a:t>토큰 발급, WAF 규칙 이벤트, Key Vault 서명, 비정상 접근 시도 실시간 모니터링</a:t>
+            </a:r>
+          </a:p>
+        </p:txBody>
+      </p:sp>
+      <p:sp>
+        <p:nvSpPr>
+          <p:cNvPr id="8" name="Rectangle 7"/>
+          <p:cNvSpPr/>
+          <p:nvPr/>
+        </p:nvSpPr>
+        <p:spPr>
+          <a:xfrm>
+            <a:off x="1028700" y="9582150"/>
+            <a:ext cx="16230600" cy="19050"/>
+          </a:xfrm>
+          <a:prstGeom prst="rect">
+            <a:avLst/>
+          </a:prstGeom>
+          <a:solidFill>
+            <a:srgbClr val="D8E0E9"/>
+          </a:solidFill>
+          <a:ln>
+            <a:noFill/>
+          </a:ln>
+        </p:spPr>
+        <p:style>
+          <a:lnRef idx="1">
+            <a:schemeClr val="accent1"/>
+          </a:lnRef>
+          <a:fillRef idx="3">
+            <a:schemeClr val="accent1"/>
+          </a:fillRef>
+          <a:effectRef idx="2">
+            <a:schemeClr val="accent1"/>
+          </a:effectRef>
+          <a:fontRef idx="minor">
+            <a:schemeClr val="lt1"/>
+          </a:fontRef>
+        </p:style>
+        <p:txBody>
+          <a:bodyPr rtlCol="0" anchor="ctr"/>
+          <a:lstStyle/>
+          <a:p>
+            <a:pPr algn="ctr"/>
+          </a:p>
+        </p:txBody>
+      </p:sp>
+      <p:sp>
+        <p:nvSpPr>
+          <p:cNvPr id="9" name="TextBox 8"/>
+          <p:cNvSpPr txBox="1"/>
+          <p:nvPr/>
+        </p:nvSpPr>
+        <p:spPr>
+          <a:xfrm>
+            <a:off x="1028700" y="9658350"/>
+            <a:ext cx="11430000" cy="295275"/>
+          </a:xfrm>
+          <a:prstGeom prst="rect">
+            <a:avLst/>
+          </a:prstGeom>
+          <a:noFill/>
+        </p:spPr>
+        <p:txBody>
+          <a:bodyPr wrap="none">
+            <a:spAutoFit/>
+          </a:bodyPr>
+          <a:lstStyle/>
+          <a:p>
+            <a:pPr>
+              <a:defRPr sz="1275">
+                <a:solidFill>
+                  <a:srgbClr val="7B8A9B"/>
+                </a:solidFill>
+                <a:latin typeface="프리텐다드"/>
+              </a:defRPr>
+            </a:pPr>
+            <a:r>
+              <a:t>Medi Q  /  합성 데이터 · 비임상 기술 PoC  ·  아키텍처 모션 워크스루</a:t>
+            </a:r>
+          </a:p>
+        </p:txBody>
+      </p:sp>
+      <p:sp>
+        <p:nvSpPr>
+          <p:cNvPr id="10" name="TextBox 9"/>
+          <p:cNvSpPr txBox="1"/>
+          <p:nvPr/>
+        </p:nvSpPr>
+        <p:spPr>
+          <a:xfrm>
+            <a:off x="15240000" y="9658350"/>
+            <a:ext cx="2019300" cy="295275"/>
+          </a:xfrm>
+          <a:prstGeom prst="rect">
+            <a:avLst/>
+          </a:prstGeom>
+          <a:noFill/>
+        </p:spPr>
+        <p:txBody>
+          <a:bodyPr wrap="none">
+            <a:spAutoFit/>
+          </a:bodyPr>
+          <a:lstStyle/>
+          <a:p>
+            <a:pPr algn="r">
+              <a:defRPr sz="1275" b="1">
+                <a:solidFill>
+                  <a:srgbClr val="7B8A9B"/>
+                </a:solidFill>
+                <a:latin typeface="프리텐다드"/>
+              </a:defRPr>
+            </a:pPr>
+            <a:r>
+              <a:t>15  /  16</a:t>
+            </a:r>
+          </a:p>
+        </p:txBody>
+      </p:sp>
+      <p:sp>
+        <p:nvSpPr>
+          <p:cNvPr id="11" name="Rounded Rectangle 10"/>
+          <p:cNvSpPr/>
+          <p:nvPr/>
+        </p:nvSpPr>
+        <p:spPr>
+          <a:xfrm>
+            <a:off x="1028700" y="3333750"/>
+            <a:ext cx="9144000" cy="5810250"/>
+          </a:xfrm>
+          <a:prstGeom prst="roundRect">
+            <a:avLst/>
+          </a:prstGeom>
+          <a:solidFill>
+            <a:srgbClr val="FFFFFF"/>
+          </a:solidFill>
+          <a:ln w="19050">
+            <a:solidFill>
+              <a:srgbClr val="D8E0E9"/>
+            </a:solidFill>
+          </a:ln>
+        </p:spPr>
+        <p:style>
+          <a:lnRef idx="1">
+            <a:schemeClr val="accent1"/>
+          </a:lnRef>
+          <a:fillRef idx="3">
+            <a:schemeClr val="accent1"/>
+          </a:fillRef>
+          <a:effectRef idx="2">
+            <a:schemeClr val="accent1"/>
+          </a:effectRef>
+          <a:fontRef idx="minor">
+            <a:schemeClr val="lt1"/>
+          </a:fontRef>
+        </p:style>
+        <p:txBody>
+          <a:bodyPr rtlCol="0" anchor="ctr"/>
+          <a:lstStyle/>
+          <a:p>
+            <a:pPr algn="ctr"/>
+          </a:p>
+        </p:txBody>
+      </p:sp>
+      <p:pic>
+        <p:nvPicPr>
+          <p:cNvPr id="12" name="Picture 11" descr="08_security_audit_console.png"/>
+          <p:cNvPicPr>
+            <a:picLocks noChangeAspect="1"/>
+          </p:cNvPicPr>
+          <p:nvPr/>
+        </p:nvPicPr>
+        <p:blipFill>
+          <a:blip r:embed="rId2"/>
+          <a:stretch>
+            <a:fillRect/>
+          </a:stretch>
+        </p:blipFill>
+        <p:spPr>
+          <a:xfrm>
+            <a:off x="1219200" y="3524250"/>
+            <a:ext cx="8763000" cy="13383491"/>
+          </a:xfrm>
+          <a:prstGeom prst="rect">
+            <a:avLst/>
+          </a:prstGeom>
+        </p:spPr>
+      </p:pic>
+      <p:sp>
+        <p:nvSpPr>
+          <p:cNvPr id="13" name="Rounded Rectangle 12"/>
+          <p:cNvSpPr/>
+          <p:nvPr/>
+        </p:nvSpPr>
+        <p:spPr>
+          <a:xfrm>
+            <a:off x="10477500" y="3333750"/>
+            <a:ext cx="6781800" cy="5810250"/>
+          </a:xfrm>
+          <a:prstGeom prst="roundRect">
+            <a:avLst/>
+          </a:prstGeom>
+          <a:solidFill>
+            <a:srgbClr val="F3F6FA"/>
+          </a:solidFill>
+          <a:ln w="19050">
+            <a:solidFill>
+              <a:srgbClr val="D8E0E9"/>
+            </a:solidFill>
+          </a:ln>
+        </p:spPr>
+        <p:style>
+          <a:lnRef idx="1">
+            <a:schemeClr val="accent1"/>
+          </a:lnRef>
+          <a:fillRef idx="3">
+            <a:schemeClr val="accent1"/>
+          </a:fillRef>
+          <a:effectRef idx="2">
+            <a:schemeClr val="accent1"/>
+          </a:effectRef>
+          <a:fontRef idx="minor">
+            <a:schemeClr val="lt1"/>
+          </a:fontRef>
+        </p:style>
+        <p:txBody>
+          <a:bodyPr rtlCol="0" anchor="ctr"/>
+          <a:lstStyle/>
+          <a:p>
+            <a:pPr algn="ctr"/>
+          </a:p>
+        </p:txBody>
+      </p:sp>
+      <p:sp>
+        <p:nvSpPr>
+          <p:cNvPr id="14" name="Rounded Rectangle 13"/>
+          <p:cNvSpPr/>
+          <p:nvPr/>
+        </p:nvSpPr>
+        <p:spPr>
+          <a:xfrm>
+            <a:off x="10763250" y="3619500"/>
+            <a:ext cx="1905000" cy="400050"/>
+          </a:xfrm>
+          <a:prstGeom prst="roundRect">
+            <a:avLst/>
+          </a:prstGeom>
+          <a:solidFill>
+            <a:srgbClr val="C64A4A"/>
+          </a:solidFill>
+          <a:ln>
+            <a:noFill/>
+          </a:ln>
+        </p:spPr>
+        <p:style>
+          <a:lnRef idx="1">
+            <a:schemeClr val="accent1"/>
+          </a:lnRef>
+          <a:fillRef idx="3">
+            <a:schemeClr val="accent1"/>
+          </a:fillRef>
+          <a:effectRef idx="2">
+            <a:schemeClr val="accent1"/>
+          </a:effectRef>
+          <a:fontRef idx="minor">
+            <a:schemeClr val="lt1"/>
+          </a:fontRef>
+        </p:style>
+        <p:txBody>
+          <a:bodyPr rtlCol="0" anchor="ctr"/>
+          <a:lstStyle/>
+          <a:p>
+            <a:pPr algn="ctr">
+              <a:defRPr sz="1425" b="1">
+                <a:solidFill>
+                  <a:srgbClr val="FFFFFF"/>
+                </a:solidFill>
+                <a:latin typeface="프리텐다드"/>
+              </a:defRPr>
+            </a:pPr>
+            <a:r>
+              <a:t>보안 관제실</a:t>
+            </a:r>
+          </a:p>
+        </p:txBody>
+      </p:sp>
+      <p:sp>
+        <p:nvSpPr>
+          <p:cNvPr id="15" name="TextBox 14"/>
+          <p:cNvSpPr txBox="1"/>
+          <p:nvPr/>
+        </p:nvSpPr>
+        <p:spPr>
+          <a:xfrm>
+            <a:off x="12858750" y="3600450"/>
+            <a:ext cx="4190999" cy="428625"/>
+          </a:xfrm>
+          <a:prstGeom prst="rect">
+            <a:avLst/>
+          </a:prstGeom>
+          <a:noFill/>
+        </p:spPr>
+        <p:txBody>
+          <a:bodyPr wrap="none">
+            <a:spAutoFit/>
+          </a:bodyPr>
+          <a:lstStyle/>
+          <a:p>
+            <a:pPr>
+              <a:defRPr sz="1875" b="1">
+                <a:solidFill>
+                  <a:srgbClr val="17263A"/>
+                </a:solidFill>
+                <a:latin typeface="프리텐다드"/>
+              </a:defRPr>
+            </a:pPr>
+            <a:r>
+              <a:t>불변 감사로그와 이상행위 탐지</a:t>
+            </a:r>
+          </a:p>
+        </p:txBody>
+      </p:sp>
+      <p:sp>
+        <p:nvSpPr>
+          <p:cNvPr id="16" name="TextBox 15"/>
+          <p:cNvSpPr txBox="1"/>
+          <p:nvPr/>
+        </p:nvSpPr>
+        <p:spPr>
+          <a:xfrm>
+            <a:off x="10763250" y="4238625"/>
+            <a:ext cx="6191250" cy="4762500"/>
+          </a:xfrm>
+          <a:prstGeom prst="rect">
+            <a:avLst/>
+          </a:prstGeom>
+          <a:noFill/>
+        </p:spPr>
+        <p:txBody>
+          <a:bodyPr wrap="none">
+            <a:spAutoFit/>
+          </a:bodyPr>
+          <a:lstStyle/>
+          <a:p/>
+          <a:p>
+            <a:pPr>
+              <a:defRPr sz="1575" b="1">
+                <a:solidFill>
+                  <a:srgbClr val="C64A4A"/>
+                </a:solidFill>
+                <a:latin typeface="프리텐다드"/>
+              </a:defRPr>
+            </a:pPr>
+            <a:r>
+              <a:t>✔  15대 주요 행위 전수 로깅</a:t>
+            </a:r>
+          </a:p>
+          <a:p>
+            <a:pPr>
+              <a:spcAft>
+                <a:spcPts val="1000"/>
+              </a:spcAft>
+              <a:defRPr sz="1350">
+                <a:solidFill>
+                  <a:srgbClr val="17263A"/>
+                </a:solidFill>
+                <a:latin typeface="프리텐다드"/>
+              </a:defRPr>
+            </a:pPr>
+            <a:r>
+              <a:t>     로그인, 동의 생성, 토큰 발급, 프레임 조회, 접근 거부 등 실시간 기록</a:t>
+            </a:r>
+          </a:p>
+          <a:p>
+            <a:pPr>
+              <a:defRPr sz="1575" b="1">
+                <a:solidFill>
+                  <a:srgbClr val="C64A4A"/>
+                </a:solidFill>
+                <a:latin typeface="프리텐다드"/>
+              </a:defRPr>
+            </a:pPr>
+            <a:r>
+              <a:t>✔  사유 코드 기반 거부</a:t>
+            </a:r>
+          </a:p>
+          <a:p>
+            <a:pPr>
+              <a:spcAft>
+                <a:spcPts val="1000"/>
+              </a:spcAft>
+              <a:defRPr sz="1350">
+                <a:solidFill>
+                  <a:srgbClr val="17263A"/>
+                </a:solidFill>
+                <a:latin typeface="프리텐다드"/>
+              </a:defRPr>
+            </a:pPr>
+            <a:r>
+              <a:t>     DOCTOR_HOSPITAL_MISMATCH 등 명확한 원인 추적</a:t>
+            </a:r>
+          </a:p>
+          <a:p>
+            <a:pPr>
+              <a:defRPr sz="1575" b="1">
+                <a:solidFill>
+                  <a:srgbClr val="C64A4A"/>
+                </a:solidFill>
+                <a:latin typeface="프리텐다드"/>
+              </a:defRPr>
+            </a:pPr>
+            <a:r>
+              <a:t>✔  감사 세션 체인 상관</a:t>
+            </a:r>
+          </a:p>
+          <a:p>
+            <a:pPr>
+              <a:spcAft>
+                <a:spcPts val="1000"/>
+              </a:spcAft>
+              <a:defRPr sz="1350">
+                <a:solidFill>
+                  <a:srgbClr val="17263A"/>
+                </a:solidFill>
+                <a:latin typeface="프리텐다드"/>
+              </a:defRPr>
+            </a:pPr>
+            <a:r>
+              <a:t>     하나의 감사 세션 ID로 토큰 발급부터 PACS 조회까지 종단 추적</a:t>
+            </a:r>
+          </a:p>
+          <a:p>
+            <a:pPr>
+              <a:defRPr sz="1575" b="1">
+                <a:solidFill>
+                  <a:srgbClr val="C64A4A"/>
+                </a:solidFill>
+                <a:latin typeface="프리텐다드"/>
+              </a:defRPr>
+            </a:pPr>
+            <a:r>
+              <a:t>✔  실시간 이상행위 탐지</a:t>
+            </a:r>
+          </a:p>
+          <a:p>
+            <a:pPr>
+              <a:spcAft>
+                <a:spcPts val="1000"/>
+              </a:spcAft>
+              <a:defRPr sz="1350">
+                <a:solidFill>
+                  <a:srgbClr val="17263A"/>
+                </a:solidFill>
+                <a:latin typeface="프리텐다드"/>
+              </a:defRPr>
+            </a:pPr>
+            <a:r>
+              <a:t>     단시간 대량 조회, 만료 토큰 반복 사용, 비진료 부서 접근 실시간 경보</a:t>
+            </a:r>
+          </a:p>
+          <a:p>
+            <a:pPr>
+              <a:defRPr sz="1575" b="1">
+                <a:solidFill>
+                  <a:srgbClr val="C64A4A"/>
+                </a:solidFill>
+                <a:latin typeface="프리텐다드"/>
+              </a:defRPr>
+            </a:pPr>
+            <a:r>
+              <a:t>✔  관리자 임의 삭제 금지</a:t>
+            </a:r>
+          </a:p>
+          <a:p>
+            <a:pPr>
+              <a:spcAft>
+                <a:spcPts val="1000"/>
+              </a:spcAft>
+              <a:defRPr sz="1350">
+                <a:solidFill>
+                  <a:srgbClr val="17263A"/>
+                </a:solidFill>
+                <a:latin typeface="프리텐다드"/>
+              </a:defRPr>
+            </a:pPr>
+            <a:r>
+              <a:t>     감사로그 자체의 무결성을 보장하여 법적 증거력 확보</a:t>
+            </a:r>
+          </a:p>
+        </p:txBody>
+      </p:sp>
+    </p:spTree>
+  </p:cSld>
+  <p:clrMapOvr>
+    <a:masterClrMapping/>
+  </p:clrMapOvr>
+</p:sld>
+</file>
+
+<file path=ppt/slides/slide16.xml><?xml version="1.0" encoding="utf-8"?>
+<p:sld xmlns:a="http://schemas.openxmlformats.org/drawingml/2006/main" xmlns:p="http://schemas.openxmlformats.org/presentationml/2006/main" xmlns:r="http://schemas.openxmlformats.org/officeDocument/2006/relationships">
+  <p:cSld>
+    <p:spTree>
+      <p:nvGrpSpPr>
+        <p:cNvPr id="1" name=""/>
+        <p:cNvGrpSpPr/>
+        <p:nvPr/>
+      </p:nvGrpSpPr>
+      <p:grpSpPr/>
+      <p:sp>
+        <p:nvSpPr>
+          <p:cNvPr id="2" name="Rectangle 1"/>
+          <p:cNvSpPr/>
+          <p:nvPr/>
+        </p:nvSpPr>
+        <p:spPr>
+          <a:xfrm>
+            <a:off x="0" y="0"/>
+            <a:ext cx="18288000" cy="10287000"/>
+          </a:xfrm>
+          <a:prstGeom prst="rect">
+            <a:avLst/>
+          </a:prstGeom>
+          <a:solidFill>
             <a:srgbClr val="0B2342"/>
           </a:solidFill>
           <a:ln>
@@ -5531,7 +10453,7 @@
           </a:fontRef>
         </p:style>
         <p:txBody>
-          <a:bodyPr rtlCol="0" anchor="ctr" wrap="none" lIns="0" tIns="0" rIns="0" bIns="0"/>
+          <a:bodyPr rtlCol="0" anchor="ctr"/>
           <a:lstStyle/>
           <a:p>
             <a:pPr algn="ctr">
@@ -5796,7 +10718,7 @@
           </a:fontRef>
         </p:style>
         <p:txBody>
-          <a:bodyPr rtlCol="0" anchor="ctr" wrap="none" lIns="0" tIns="0" rIns="0" bIns="0"/>
+          <a:bodyPr rtlCol="0" anchor="ctr"/>
           <a:lstStyle/>
           <a:p>
             <a:pPr algn="ctr">
@@ -6061,7 +10983,7 @@
           </a:fontRef>
         </p:style>
         <p:txBody>
-          <a:bodyPr rtlCol="0" anchor="ctr" wrap="none" lIns="0" tIns="0" rIns="0" bIns="0"/>
+          <a:bodyPr rtlCol="0" anchor="ctr"/>
           <a:lstStyle/>
           <a:p>
             <a:pPr algn="ctr">
@@ -6326,7 +11248,7 @@
           </a:fontRef>
         </p:style>
         <p:txBody>
-          <a:bodyPr rtlCol="0" anchor="ctr" wrap="none" lIns="0" tIns="0" rIns="0" bIns="0"/>
+          <a:bodyPr rtlCol="0" anchor="ctr"/>
           <a:lstStyle/>
           <a:p>
             <a:pPr algn="ctr">
@@ -6584,7 +11506,7 @@
               </a:defRPr>
             </a:pPr>
             <a:r>
-              <a:t>Medi Q  /  합성 데이터 · 비임상 기술 PoC  ·  10  /  10  ·  Q&amp;A</a:t>
+              <a:t>Medi Q  /  합성 데이터 · 비임상 기술 PoC  ·  16  /  16  ·  Q&amp;A</a:t>
             </a:r>
           </a:p>
         </p:txBody>
@@ -6753,7 +11675,7 @@
           <a:noFill/>
         </p:spPr>
         <p:txBody>
-          <a:bodyPr wrap="square" lIns="0" tIns="0" rIns="0" bIns="0">
+          <a:bodyPr wrap="square">
             <a:spAutoFit/>
           </a:bodyPr>
           <a:lstStyle/>
@@ -6789,13 +11711,13 @@
           <a:noFill/>
         </p:spPr>
         <p:txBody>
-          <a:bodyPr wrap="square" lIns="0" tIns="0" rIns="0" bIns="0">
+          <a:bodyPr wrap="square">
             <a:spAutoFit/>
           </a:bodyPr>
           <a:lstStyle/>
           <a:p>
             <a:pPr>
-              <a:defRPr sz="3900" b="1">
+              <a:defRPr sz="3750" b="1">
                 <a:solidFill>
                   <a:srgbClr val="17263A"/>
                 </a:solidFill>
@@ -6825,7 +11747,7 @@
           <a:noFill/>
         </p:spPr>
         <p:txBody>
-          <a:bodyPr wrap="square" lIns="0" tIns="0" rIns="0" bIns="0">
+          <a:bodyPr wrap="square">
             <a:spAutoFit/>
           </a:bodyPr>
           <a:lstStyle/>
@@ -6904,7 +11826,7 @@
           <a:noFill/>
         </p:spPr>
         <p:txBody>
-          <a:bodyPr wrap="none" lIns="0" tIns="0" rIns="0" bIns="0">
+          <a:bodyPr wrap="none">
             <a:spAutoFit/>
           </a:bodyPr>
           <a:lstStyle/>
@@ -6918,7 +11840,7 @@
               </a:defRPr>
             </a:pPr>
             <a:r>
-              <a:t>Medi Q  /  합성 데이터 · 비임상 기술 PoC  ·  5분 핵심 피칭</a:t>
+              <a:t>Medi Q  /  합성 데이터 · 비임상 기술 PoC  ·  아키텍처 모션 워크스루</a:t>
             </a:r>
           </a:p>
         </p:txBody>
@@ -6940,7 +11862,7 @@
           <a:noFill/>
         </p:spPr>
         <p:txBody>
-          <a:bodyPr wrap="none" lIns="0" tIns="0" rIns="0" bIns="0">
+          <a:bodyPr wrap="none">
             <a:spAutoFit/>
           </a:bodyPr>
           <a:lstStyle/>
@@ -6954,7 +11876,7 @@
               </a:defRPr>
             </a:pPr>
             <a:r>
-              <a:t>02  /  10</a:t>
+              <a:t>02  /  16</a:t>
             </a:r>
           </a:p>
         </p:txBody>
@@ -7040,7 +11962,7 @@
           </a:fontRef>
         </p:style>
         <p:txBody>
-          <a:bodyPr rtlCol="0" anchor="ctr" wrap="none" lIns="0" tIns="0" rIns="0" bIns="0"/>
+          <a:bodyPr rtlCol="0" anchor="ctr"/>
           <a:lstStyle/>
           <a:p>
             <a:pPr algn="ctr">
@@ -7341,7 +12263,7 @@
           </a:fontRef>
         </p:style>
         <p:txBody>
-          <a:bodyPr rtlCol="0" anchor="ctr" wrap="none" lIns="0" tIns="0" rIns="0" bIns="0"/>
+          <a:bodyPr rtlCol="0" anchor="ctr"/>
           <a:lstStyle/>
           <a:p>
             <a:pPr algn="ctr">
@@ -7642,7 +12564,7 @@
           </a:fontRef>
         </p:style>
         <p:txBody>
-          <a:bodyPr rtlCol="0" anchor="ctr" wrap="none" lIns="0" tIns="0" rIns="0" bIns="0"/>
+          <a:bodyPr rtlCol="0" anchor="ctr"/>
           <a:lstStyle/>
           <a:p>
             <a:pPr algn="ctr">
@@ -8026,7 +12948,7 @@
           <a:noFill/>
         </p:spPr>
         <p:txBody>
-          <a:bodyPr wrap="square" lIns="0" tIns="0" rIns="0" bIns="0">
+          <a:bodyPr wrap="square">
             <a:spAutoFit/>
           </a:bodyPr>
           <a:lstStyle/>
@@ -8062,13 +12984,13 @@
           <a:noFill/>
         </p:spPr>
         <p:txBody>
-          <a:bodyPr wrap="square" lIns="0" tIns="0" rIns="0" bIns="0">
+          <a:bodyPr wrap="square">
             <a:spAutoFit/>
           </a:bodyPr>
           <a:lstStyle/>
           <a:p>
             <a:pPr>
-              <a:defRPr sz="3900" b="1">
+              <a:defRPr sz="3750" b="1">
                 <a:solidFill>
                   <a:srgbClr val="17263A"/>
                 </a:solidFill>
@@ -8098,7 +13020,7 @@
           <a:noFill/>
         </p:spPr>
         <p:txBody>
-          <a:bodyPr wrap="square" lIns="0" tIns="0" rIns="0" bIns="0">
+          <a:bodyPr wrap="square">
             <a:spAutoFit/>
           </a:bodyPr>
           <a:lstStyle/>
@@ -8177,7 +13099,7 @@
           <a:noFill/>
         </p:spPr>
         <p:txBody>
-          <a:bodyPr wrap="none" lIns="0" tIns="0" rIns="0" bIns="0">
+          <a:bodyPr wrap="none">
             <a:spAutoFit/>
           </a:bodyPr>
           <a:lstStyle/>
@@ -8191,7 +13113,7 @@
               </a:defRPr>
             </a:pPr>
             <a:r>
-              <a:t>Medi Q  /  합성 데이터 · 비임상 기술 PoC  ·  5분 핵심 피칭</a:t>
+              <a:t>Medi Q  /  합성 데이터 · 비임상 기술 PoC  ·  아키텍처 모션 워크스루</a:t>
             </a:r>
           </a:p>
         </p:txBody>
@@ -8213,7 +13135,7 @@
           <a:noFill/>
         </p:spPr>
         <p:txBody>
-          <a:bodyPr wrap="none" lIns="0" tIns="0" rIns="0" bIns="0">
+          <a:bodyPr wrap="none">
             <a:spAutoFit/>
           </a:bodyPr>
           <a:lstStyle/>
@@ -8227,7 +13149,7 @@
               </a:defRPr>
             </a:pPr>
             <a:r>
-              <a:t>03  /  10</a:t>
+              <a:t>03  /  16</a:t>
             </a:r>
           </a:p>
         </p:txBody>
@@ -8313,7 +13235,7 @@
           </a:fontRef>
         </p:style>
         <p:txBody>
-          <a:bodyPr rtlCol="0" anchor="ctr" wrap="none" lIns="0" tIns="0" rIns="0" bIns="0"/>
+          <a:bodyPr rtlCol="0" anchor="ctr"/>
           <a:lstStyle/>
           <a:p>
             <a:pPr algn="ctr">
@@ -8462,42 +13384,7 @@
       </p:sp>
       <p:sp>
         <p:nvSpPr>
-          <p:cNvPr id="16" name="TextBox 15"/>
-          <p:cNvSpPr txBox="1"/>
-          <p:nvPr/>
-        </p:nvSpPr>
-        <p:spPr>
-          <a:xfrm>
-            <a:off x="4124325" y="4524375"/>
-            <a:ext cx="428625" cy="476250"/>
-          </a:xfrm>
-          <a:prstGeom prst="rect">
-            <a:avLst/>
-          </a:prstGeom>
-          <a:noFill/>
-        </p:spPr>
-        <p:txBody>
-          <a:bodyPr wrap="none">
-            <a:spAutoFit/>
-          </a:bodyPr>
-          <a:lstStyle/>
-          <a:p>
-            <a:pPr>
-              <a:defRPr sz="1650">
-                <a:solidFill>
-                  <a:srgbClr val="DCA83D"/>
-                </a:solidFill>
-              </a:defRPr>
-            </a:pPr>
-            <a:r>
-              <a:t>➔</a:t>
-            </a:r>
-          </a:p>
-        </p:txBody>
-      </p:sp>
-      <p:sp>
-        <p:nvSpPr>
-          <p:cNvPr id="17" name="Rounded Rectangle 16"/>
+          <p:cNvPr id="16" name="Rounded Rectangle 15"/>
           <p:cNvSpPr/>
           <p:nvPr/>
         </p:nvSpPr>
@@ -8542,7 +13429,7 @@
       </p:sp>
       <p:sp>
         <p:nvSpPr>
-          <p:cNvPr id="18" name="TextBox 17"/>
+          <p:cNvPr id="17" name="TextBox 16"/>
           <p:cNvSpPr txBox="1"/>
           <p:nvPr/>
         </p:nvSpPr>
@@ -8591,42 +13478,7 @@
       </p:sp>
       <p:sp>
         <p:nvSpPr>
-          <p:cNvPr id="19" name="TextBox 18"/>
-          <p:cNvSpPr txBox="1"/>
-          <p:nvPr/>
-        </p:nvSpPr>
-        <p:spPr>
-          <a:xfrm>
-            <a:off x="7343775" y="4524375"/>
-            <a:ext cx="428625" cy="476250"/>
-          </a:xfrm>
-          <a:prstGeom prst="rect">
-            <a:avLst/>
-          </a:prstGeom>
-          <a:noFill/>
-        </p:spPr>
-        <p:txBody>
-          <a:bodyPr wrap="none">
-            <a:spAutoFit/>
-          </a:bodyPr>
-          <a:lstStyle/>
-          <a:p>
-            <a:pPr>
-              <a:defRPr sz="1650">
-                <a:solidFill>
-                  <a:srgbClr val="DCA83D"/>
-                </a:solidFill>
-              </a:defRPr>
-            </a:pPr>
-            <a:r>
-              <a:t>➔</a:t>
-            </a:r>
-          </a:p>
-        </p:txBody>
-      </p:sp>
-      <p:sp>
-        <p:nvSpPr>
-          <p:cNvPr id="20" name="Rounded Rectangle 19"/>
+          <p:cNvPr id="18" name="Rounded Rectangle 17"/>
           <p:cNvSpPr/>
           <p:nvPr/>
         </p:nvSpPr>
@@ -8671,7 +13523,7 @@
       </p:sp>
       <p:sp>
         <p:nvSpPr>
-          <p:cNvPr id="21" name="TextBox 20"/>
+          <p:cNvPr id="19" name="TextBox 18"/>
           <p:cNvSpPr txBox="1"/>
           <p:nvPr/>
         </p:nvSpPr>
@@ -8720,42 +13572,7 @@
       </p:sp>
       <p:sp>
         <p:nvSpPr>
-          <p:cNvPr id="22" name="TextBox 21"/>
-          <p:cNvSpPr txBox="1"/>
-          <p:nvPr/>
-        </p:nvSpPr>
-        <p:spPr>
-          <a:xfrm>
-            <a:off x="10563225" y="4524375"/>
-            <a:ext cx="428625" cy="476250"/>
-          </a:xfrm>
-          <a:prstGeom prst="rect">
-            <a:avLst/>
-          </a:prstGeom>
-          <a:noFill/>
-        </p:spPr>
-        <p:txBody>
-          <a:bodyPr wrap="none">
-            <a:spAutoFit/>
-          </a:bodyPr>
-          <a:lstStyle/>
-          <a:p>
-            <a:pPr>
-              <a:defRPr sz="1650">
-                <a:solidFill>
-                  <a:srgbClr val="DCA83D"/>
-                </a:solidFill>
-              </a:defRPr>
-            </a:pPr>
-            <a:r>
-              <a:t>➔</a:t>
-            </a:r>
-          </a:p>
-        </p:txBody>
-      </p:sp>
-      <p:sp>
-        <p:nvSpPr>
-          <p:cNvPr id="23" name="Rounded Rectangle 22"/>
+          <p:cNvPr id="20" name="Rounded Rectangle 19"/>
           <p:cNvSpPr/>
           <p:nvPr/>
         </p:nvSpPr>
@@ -8800,7 +13617,7 @@
       </p:sp>
       <p:sp>
         <p:nvSpPr>
-          <p:cNvPr id="24" name="TextBox 23"/>
+          <p:cNvPr id="21" name="TextBox 20"/>
           <p:cNvSpPr txBox="1"/>
           <p:nvPr/>
         </p:nvSpPr>
@@ -8849,42 +13666,7 @@
       </p:sp>
       <p:sp>
         <p:nvSpPr>
-          <p:cNvPr id="25" name="TextBox 24"/>
-          <p:cNvSpPr txBox="1"/>
-          <p:nvPr/>
-        </p:nvSpPr>
-        <p:spPr>
-          <a:xfrm>
-            <a:off x="13782675" y="4524375"/>
-            <a:ext cx="428625" cy="476250"/>
-          </a:xfrm>
-          <a:prstGeom prst="rect">
-            <a:avLst/>
-          </a:prstGeom>
-          <a:noFill/>
-        </p:spPr>
-        <p:txBody>
-          <a:bodyPr wrap="none">
-            <a:spAutoFit/>
-          </a:bodyPr>
-          <a:lstStyle/>
-          <a:p>
-            <a:pPr>
-              <a:defRPr sz="1650">
-                <a:solidFill>
-                  <a:srgbClr val="DCA83D"/>
-                </a:solidFill>
-              </a:defRPr>
-            </a:pPr>
-            <a:r>
-              <a:t>➔</a:t>
-            </a:r>
-          </a:p>
-        </p:txBody>
-      </p:sp>
-      <p:sp>
-        <p:nvSpPr>
-          <p:cNvPr id="26" name="Rounded Rectangle 25"/>
+          <p:cNvPr id="22" name="Rounded Rectangle 21"/>
           <p:cNvSpPr/>
           <p:nvPr/>
         </p:nvSpPr>
@@ -8929,7 +13711,7 @@
       </p:sp>
       <p:sp>
         <p:nvSpPr>
-          <p:cNvPr id="27" name="TextBox 26"/>
+          <p:cNvPr id="23" name="TextBox 22"/>
           <p:cNvSpPr txBox="1"/>
           <p:nvPr/>
         </p:nvSpPr>
@@ -8978,7 +13760,7 @@
       </p:sp>
       <p:sp>
         <p:nvSpPr>
-          <p:cNvPr id="28" name="Rounded Rectangle 27"/>
+          <p:cNvPr id="24" name="Rounded Rectangle 23"/>
           <p:cNvSpPr/>
           <p:nvPr/>
         </p:nvSpPr>
@@ -9023,7 +13805,7 @@
       </p:sp>
       <p:sp>
         <p:nvSpPr>
-          <p:cNvPr id="29" name="Rounded Rectangle 28"/>
+          <p:cNvPr id="25" name="Rounded Rectangle 24"/>
           <p:cNvSpPr/>
           <p:nvPr/>
         </p:nvSpPr>
@@ -9057,7 +13839,7 @@
           </a:fontRef>
         </p:style>
         <p:txBody>
-          <a:bodyPr rtlCol="0" anchor="ctr" wrap="none" lIns="0" tIns="0" rIns="0" bIns="0"/>
+          <a:bodyPr rtlCol="0" anchor="ctr"/>
           <a:lstStyle/>
           <a:p>
             <a:pPr algn="ctr">
@@ -9076,7 +13858,7 @@
       </p:sp>
       <p:sp>
         <p:nvSpPr>
-          <p:cNvPr id="30" name="TextBox 29"/>
+          <p:cNvPr id="26" name="TextBox 25"/>
           <p:cNvSpPr txBox="1"/>
           <p:nvPr/>
         </p:nvSpPr>
@@ -9112,7 +13894,7 @@
       </p:sp>
       <p:sp>
         <p:nvSpPr>
-          <p:cNvPr id="31" name="Rounded Rectangle 30"/>
+          <p:cNvPr id="27" name="Rounded Rectangle 26"/>
           <p:cNvSpPr/>
           <p:nvPr/>
         </p:nvSpPr>
@@ -9157,7 +13939,7 @@
       </p:sp>
       <p:sp>
         <p:nvSpPr>
-          <p:cNvPr id="32" name="TextBox 31"/>
+          <p:cNvPr id="28" name="TextBox 27"/>
           <p:cNvSpPr txBox="1"/>
           <p:nvPr/>
         </p:nvSpPr>
@@ -9206,42 +13988,7 @@
       </p:sp>
       <p:sp>
         <p:nvSpPr>
-          <p:cNvPr id="33" name="TextBox 32"/>
-          <p:cNvSpPr txBox="1"/>
-          <p:nvPr/>
-        </p:nvSpPr>
-        <p:spPr>
-          <a:xfrm>
-            <a:off x="4886325" y="7334250"/>
-            <a:ext cx="428625" cy="476250"/>
-          </a:xfrm>
-          <a:prstGeom prst="rect">
-            <a:avLst/>
-          </a:prstGeom>
-          <a:noFill/>
-        </p:spPr>
-        <p:txBody>
-          <a:bodyPr wrap="none">
-            <a:spAutoFit/>
-          </a:bodyPr>
-          <a:lstStyle/>
-          <a:p>
-            <a:pPr>
-              <a:defRPr sz="1950" b="1">
-                <a:solidFill>
-                  <a:srgbClr val="168B82"/>
-                </a:solidFill>
-              </a:defRPr>
-            </a:pPr>
-            <a:r>
-              <a:t>➔</a:t>
-            </a:r>
-          </a:p>
-        </p:txBody>
-      </p:sp>
-      <p:sp>
-        <p:nvSpPr>
-          <p:cNvPr id="34" name="Rounded Rectangle 33"/>
+          <p:cNvPr id="29" name="Rounded Rectangle 28"/>
           <p:cNvSpPr/>
           <p:nvPr/>
         </p:nvSpPr>
@@ -9286,7 +14033,7 @@
       </p:sp>
       <p:sp>
         <p:nvSpPr>
-          <p:cNvPr id="35" name="TextBox 34"/>
+          <p:cNvPr id="30" name="TextBox 29"/>
           <p:cNvSpPr txBox="1"/>
           <p:nvPr/>
         </p:nvSpPr>
@@ -9335,42 +14082,7 @@
       </p:sp>
       <p:sp>
         <p:nvSpPr>
-          <p:cNvPr id="36" name="TextBox 35"/>
-          <p:cNvSpPr txBox="1"/>
-          <p:nvPr/>
-        </p:nvSpPr>
-        <p:spPr>
-          <a:xfrm>
-            <a:off x="8886825" y="7334250"/>
-            <a:ext cx="428625" cy="476250"/>
-          </a:xfrm>
-          <a:prstGeom prst="rect">
-            <a:avLst/>
-          </a:prstGeom>
-          <a:noFill/>
-        </p:spPr>
-        <p:txBody>
-          <a:bodyPr wrap="none">
-            <a:spAutoFit/>
-          </a:bodyPr>
-          <a:lstStyle/>
-          <a:p>
-            <a:pPr>
-              <a:defRPr sz="1950" b="1">
-                <a:solidFill>
-                  <a:srgbClr val="168B82"/>
-                </a:solidFill>
-              </a:defRPr>
-            </a:pPr>
-            <a:r>
-              <a:t>➔</a:t>
-            </a:r>
-          </a:p>
-        </p:txBody>
-      </p:sp>
-      <p:sp>
-        <p:nvSpPr>
-          <p:cNvPr id="37" name="Rounded Rectangle 36"/>
+          <p:cNvPr id="31" name="Rounded Rectangle 30"/>
           <p:cNvSpPr/>
           <p:nvPr/>
         </p:nvSpPr>
@@ -9415,7 +14127,7 @@
       </p:sp>
       <p:sp>
         <p:nvSpPr>
-          <p:cNvPr id="38" name="TextBox 37"/>
+          <p:cNvPr id="32" name="TextBox 31"/>
           <p:cNvSpPr txBox="1"/>
           <p:nvPr/>
         </p:nvSpPr>
@@ -9464,42 +14176,7 @@
       </p:sp>
       <p:sp>
         <p:nvSpPr>
-          <p:cNvPr id="39" name="TextBox 38"/>
-          <p:cNvSpPr txBox="1"/>
-          <p:nvPr/>
-        </p:nvSpPr>
-        <p:spPr>
-          <a:xfrm>
-            <a:off x="12887325" y="7334250"/>
-            <a:ext cx="428625" cy="476250"/>
-          </a:xfrm>
-          <a:prstGeom prst="rect">
-            <a:avLst/>
-          </a:prstGeom>
-          <a:noFill/>
-        </p:spPr>
-        <p:txBody>
-          <a:bodyPr wrap="none">
-            <a:spAutoFit/>
-          </a:bodyPr>
-          <a:lstStyle/>
-          <a:p>
-            <a:pPr>
-              <a:defRPr sz="1950" b="1">
-                <a:solidFill>
-                  <a:srgbClr val="168B82"/>
-                </a:solidFill>
-              </a:defRPr>
-            </a:pPr>
-            <a:r>
-              <a:t>➔</a:t>
-            </a:r>
-          </a:p>
-        </p:txBody>
-      </p:sp>
-      <p:sp>
-        <p:nvSpPr>
-          <p:cNvPr id="40" name="Rounded Rectangle 39"/>
+          <p:cNvPr id="33" name="Rounded Rectangle 32"/>
           <p:cNvSpPr/>
           <p:nvPr/>
         </p:nvSpPr>
@@ -9544,7 +14221,7 @@
       </p:sp>
       <p:sp>
         <p:nvSpPr>
-          <p:cNvPr id="41" name="TextBox 40"/>
+          <p:cNvPr id="34" name="TextBox 33"/>
           <p:cNvSpPr txBox="1"/>
           <p:nvPr/>
         </p:nvSpPr>
@@ -9593,7 +14270,7 @@
       </p:sp>
       <p:sp>
         <p:nvSpPr>
-          <p:cNvPr id="42" name="TextBox 41"/>
+          <p:cNvPr id="35" name="TextBox 34"/>
           <p:cNvSpPr txBox="1"/>
           <p:nvPr/>
         </p:nvSpPr>
@@ -9791,7 +14468,7 @@
           <a:noFill/>
         </p:spPr>
         <p:txBody>
-          <a:bodyPr wrap="square" lIns="0" tIns="0" rIns="0" bIns="0">
+          <a:bodyPr wrap="square">
             <a:spAutoFit/>
           </a:bodyPr>
           <a:lstStyle/>
@@ -9827,13 +14504,13 @@
           <a:noFill/>
         </p:spPr>
         <p:txBody>
-          <a:bodyPr wrap="square" lIns="0" tIns="0" rIns="0" bIns="0">
+          <a:bodyPr wrap="square">
             <a:spAutoFit/>
           </a:bodyPr>
           <a:lstStyle/>
           <a:p>
             <a:pPr>
-              <a:defRPr sz="3900" b="1">
+              <a:defRPr sz="3750" b="1">
                 <a:solidFill>
                   <a:srgbClr val="17263A"/>
                 </a:solidFill>
@@ -9863,7 +14540,7 @@
           <a:noFill/>
         </p:spPr>
         <p:txBody>
-          <a:bodyPr wrap="square" lIns="0" tIns="0" rIns="0" bIns="0">
+          <a:bodyPr wrap="square">
             <a:spAutoFit/>
           </a:bodyPr>
           <a:lstStyle/>
@@ -9877,7 +14554,7 @@
               </a:defRPr>
             </a:pPr>
             <a:r>
-              <a:t>의료영상 원본을 클라우드 DB에 영구 보관하지 않는 Zero Cloud Storage 원칙 준수</a:t>
+              <a:t>Azure Control Plane (신원·동의·인가·감사) + 병원 분산 Data Plane (원본 보관·스트리밍)</a:t>
             </a:r>
           </a:p>
         </p:txBody>
@@ -9942,7 +14619,7 @@
           <a:noFill/>
         </p:spPr>
         <p:txBody>
-          <a:bodyPr wrap="none" lIns="0" tIns="0" rIns="0" bIns="0">
+          <a:bodyPr wrap="none">
             <a:spAutoFit/>
           </a:bodyPr>
           <a:lstStyle/>
@@ -9956,7 +14633,7 @@
               </a:defRPr>
             </a:pPr>
             <a:r>
-              <a:t>Medi Q  /  합성 데이터 · 비임상 기술 PoC  ·  5분 핵심 피칭</a:t>
+              <a:t>Medi Q  /  합성 데이터 · 비임상 기술 PoC  ·  아키텍처 모션 워크스루</a:t>
             </a:r>
           </a:p>
         </p:txBody>
@@ -9978,7 +14655,7 @@
           <a:noFill/>
         </p:spPr>
         <p:txBody>
-          <a:bodyPr wrap="none" lIns="0" tIns="0" rIns="0" bIns="0">
+          <a:bodyPr wrap="none">
             <a:spAutoFit/>
           </a:bodyPr>
           <a:lstStyle/>
@@ -9992,7 +14669,7 @@
               </a:defRPr>
             </a:pPr>
             <a:r>
-              <a:t>04  /  10</a:t>
+              <a:t>04  /  16</a:t>
             </a:r>
           </a:p>
         </p:txBody>
@@ -10006,7 +14683,7 @@
         <p:spPr>
           <a:xfrm>
             <a:off x="1028700" y="3333750"/>
-            <a:ext cx="9144000" cy="5810250"/>
+            <a:ext cx="10477500" cy="5905500"/>
           </a:xfrm>
           <a:prstGeom prst="roundRect">
             <a:avLst/>
@@ -10044,7 +14721,7 @@
       </p:sp>
       <p:pic>
         <p:nvPicPr>
-          <p:cNvPr id="12" name="Picture 11" descr="highpass_architecture_full.png"/>
+          <p:cNvPr id="12" name="Picture 11" descr="mediq_architecture_flow.png"/>
           <p:cNvPicPr>
             <a:picLocks noChangeAspect="1"/>
           </p:cNvPicPr>
@@ -10058,8 +14735,8 @@
         </p:blipFill>
         <p:spPr>
           <a:xfrm>
-            <a:off x="1219200" y="3524250"/>
-            <a:ext cx="8763000" cy="4929188"/>
+            <a:off x="1123950" y="3429000"/>
+            <a:ext cx="10287000" cy="5789514"/>
           </a:xfrm>
           <a:prstGeom prst="rect">
             <a:avLst/>
@@ -10074,8 +14751,8 @@
         </p:nvSpPr>
         <p:spPr>
           <a:xfrm>
-            <a:off x="10477500" y="3333750"/>
-            <a:ext cx="6781800" cy="1809750"/>
+            <a:off x="11811000" y="3333750"/>
+            <a:ext cx="5448300" cy="5905500"/>
           </a:xfrm>
           <a:prstGeom prst="roundRect">
             <a:avLst/>
@@ -10119,8 +14796,8 @@
         </p:nvSpPr>
         <p:spPr>
           <a:xfrm>
-            <a:off x="10763250" y="3571875"/>
-            <a:ext cx="571500" cy="342900"/>
+            <a:off x="12096750" y="3619500"/>
+            <a:ext cx="1905000" cy="400050"/>
           </a:xfrm>
           <a:prstGeom prst="roundRect">
             <a:avLst/>
@@ -10147,11 +14824,11 @@
           </a:fontRef>
         </p:style>
         <p:txBody>
-          <a:bodyPr rtlCol="0" anchor="ctr" wrap="none" lIns="0" tIns="0" rIns="0" bIns="0"/>
+          <a:bodyPr rtlCol="0" anchor="ctr"/>
           <a:lstStyle/>
           <a:p>
             <a:pPr algn="ctr">
-              <a:defRPr sz="1350" b="1">
+              <a:defRPr sz="1425" b="1">
                 <a:solidFill>
                   <a:srgbClr val="FFFFFF"/>
                 </a:solidFill>
@@ -10159,7 +14836,7 @@
               </a:defRPr>
             </a:pPr>
             <a:r>
-              <a:t>01</a:t>
+              <a:t>아키텍처 조망</a:t>
             </a:r>
           </a:p>
         </p:txBody>
@@ -10172,8 +14849,8 @@
         </p:nvSpPr>
         <p:spPr>
           <a:xfrm>
-            <a:off x="11525250" y="3543300"/>
-            <a:ext cx="5524500" cy="428625"/>
+            <a:off x="12096750" y="4190999"/>
+            <a:ext cx="4876800" cy="476250"/>
           </a:xfrm>
           <a:prstGeom prst="rect">
             <a:avLst/>
@@ -10187,15 +14864,15 @@
           <a:lstStyle/>
           <a:p>
             <a:pPr>
-              <a:defRPr sz="1800" b="1">
-                <a:solidFill>
-                  <a:srgbClr val="2F68B5"/>
-                </a:solidFill>
-                <a:latin typeface="프리텐다드"/>
-              </a:defRPr>
-            </a:pPr>
-            <a:r>
-              <a:t>Zero Cloud Storage (불변 원칙)</a:t>
+              <a:defRPr sz="2100" b="1">
+                <a:solidFill>
+                  <a:srgbClr val="17263A"/>
+                </a:solidFill>
+                <a:latin typeface="프리텐다드"/>
+              </a:defRPr>
+            </a:pPr>
+            <a:r>
+              <a:t>8단계 종단 워크플로우</a:t>
             </a:r>
           </a:p>
         </p:txBody>
@@ -10208,8 +14885,8 @@
         </p:nvSpPr>
         <p:spPr>
           <a:xfrm>
-            <a:off x="10763250" y="4048124"/>
-            <a:ext cx="6191250" cy="952500"/>
+            <a:off x="12096750" y="4810125"/>
+            <a:ext cx="4876800" cy="4190999"/>
           </a:xfrm>
           <a:prstGeom prst="rect">
             <a:avLst/>
@@ -10221,9 +14898,26 @@
             <a:spAutoFit/>
           </a:bodyPr>
           <a:lstStyle/>
-          <a:p>
-            <a:pPr>
-              <a:defRPr sz="1500">
+          <a:p/>
+          <a:p>
+            <a:pPr>
+              <a:defRPr sz="1575" b="1">
+                <a:solidFill>
+                  <a:srgbClr val="2F68B5"/>
+                </a:solidFill>
+                <a:latin typeface="프리텐다드"/>
+              </a:defRPr>
+            </a:pPr>
+            <a:r>
+              <a:t>✔  Zero Cloud Storage</a:t>
+            </a:r>
+          </a:p>
+          <a:p>
+            <a:pPr>
+              <a:spcAft>
+                <a:spcPts val="1000"/>
+              </a:spcAft>
+              <a:defRPr sz="1350">
                 <a:solidFill>
                   <a:srgbClr val="17263A"/>
                 </a:solidFill>
@@ -10231,133 +14925,12 @@
               </a:defRPr>
             </a:pPr>
             <a:r>
-              <a:t>의료영상 원본은 각 병원 PACS(Orthanc)에만 분산 보관하며, 중앙 클라우드 DB에는 DICOM 원본을 절대 지속 저장하지 않습니다.</a:t>
-            </a:r>
-          </a:p>
-        </p:txBody>
-      </p:sp>
-      <p:sp>
-        <p:nvSpPr>
-          <p:cNvPr id="17" name="Rounded Rectangle 16"/>
-          <p:cNvSpPr/>
-          <p:nvPr/>
-        </p:nvSpPr>
-        <p:spPr>
-          <a:xfrm>
-            <a:off x="10477500" y="5286375"/>
-            <a:ext cx="6781800" cy="1809750"/>
-          </a:xfrm>
-          <a:prstGeom prst="roundRect">
-            <a:avLst/>
-          </a:prstGeom>
-          <a:solidFill>
-            <a:srgbClr val="F3F6FA"/>
-          </a:solidFill>
-          <a:ln w="19050">
-            <a:solidFill>
-              <a:srgbClr val="D8E0E9"/>
-            </a:solidFill>
-          </a:ln>
-        </p:spPr>
-        <p:style>
-          <a:lnRef idx="1">
-            <a:schemeClr val="accent1"/>
-          </a:lnRef>
-          <a:fillRef idx="3">
-            <a:schemeClr val="accent1"/>
-          </a:fillRef>
-          <a:effectRef idx="2">
-            <a:schemeClr val="accent1"/>
-          </a:effectRef>
-          <a:fontRef idx="minor">
-            <a:schemeClr val="lt1"/>
-          </a:fontRef>
-        </p:style>
-        <p:txBody>
-          <a:bodyPr rtlCol="0" anchor="ctr"/>
-          <a:lstStyle/>
-          <a:p>
-            <a:pPr algn="ctr"/>
-          </a:p>
-        </p:txBody>
-      </p:sp>
-      <p:sp>
-        <p:nvSpPr>
-          <p:cNvPr id="18" name="Rounded Rectangle 17"/>
-          <p:cNvSpPr/>
-          <p:nvPr/>
-        </p:nvSpPr>
-        <p:spPr>
-          <a:xfrm>
-            <a:off x="10763250" y="5524500"/>
-            <a:ext cx="571500" cy="342900"/>
-          </a:xfrm>
-          <a:prstGeom prst="roundRect">
-            <a:avLst/>
-          </a:prstGeom>
-          <a:solidFill>
-            <a:srgbClr val="2F68B5"/>
-          </a:solidFill>
-          <a:ln>
-            <a:noFill/>
-          </a:ln>
-        </p:spPr>
-        <p:style>
-          <a:lnRef idx="1">
-            <a:schemeClr val="accent1"/>
-          </a:lnRef>
-          <a:fillRef idx="3">
-            <a:schemeClr val="accent1"/>
-          </a:fillRef>
-          <a:effectRef idx="2">
-            <a:schemeClr val="accent1"/>
-          </a:effectRef>
-          <a:fontRef idx="minor">
-            <a:schemeClr val="lt1"/>
-          </a:fontRef>
-        </p:style>
-        <p:txBody>
-          <a:bodyPr rtlCol="0" anchor="ctr" wrap="none" lIns="0" tIns="0" rIns="0" bIns="0"/>
-          <a:lstStyle/>
-          <a:p>
-            <a:pPr algn="ctr">
-              <a:defRPr sz="1350" b="1">
-                <a:solidFill>
-                  <a:srgbClr val="FFFFFF"/>
-                </a:solidFill>
-                <a:latin typeface="프리텐다드"/>
-              </a:defRPr>
-            </a:pPr>
-            <a:r>
-              <a:t>02</a:t>
-            </a:r>
-          </a:p>
-        </p:txBody>
-      </p:sp>
-      <p:sp>
-        <p:nvSpPr>
-          <p:cNvPr id="19" name="TextBox 18"/>
-          <p:cNvSpPr txBox="1"/>
-          <p:nvPr/>
-        </p:nvSpPr>
-        <p:spPr>
-          <a:xfrm>
-            <a:off x="11525250" y="5495925"/>
-            <a:ext cx="5524500" cy="428625"/>
-          </a:xfrm>
-          <a:prstGeom prst="rect">
-            <a:avLst/>
-          </a:prstGeom>
-          <a:noFill/>
-        </p:spPr>
-        <p:txBody>
-          <a:bodyPr wrap="none">
-            <a:spAutoFit/>
-          </a:bodyPr>
-          <a:lstStyle/>
-          <a:p>
-            <a:pPr>
-              <a:defRPr sz="1800" b="1">
+              <a:t>     클라우드 중앙 DB에 DICOM 원본 영구 비보관</a:t>
+            </a:r>
+          </a:p>
+          <a:p>
+            <a:pPr>
+              <a:defRPr sz="1575" b="1">
                 <a:solidFill>
                   <a:srgbClr val="2F68B5"/>
                 </a:solidFill>
@@ -10365,35 +14938,15 @@
               </a:defRPr>
             </a:pPr>
             <a:r>
-              <a:t>Control vs Data Plane 물리적 분리</a:t>
-            </a:r>
-          </a:p>
-        </p:txBody>
-      </p:sp>
-      <p:sp>
-        <p:nvSpPr>
-          <p:cNvPr id="20" name="TextBox 19"/>
-          <p:cNvSpPr txBox="1"/>
-          <p:nvPr/>
-        </p:nvSpPr>
-        <p:spPr>
-          <a:xfrm>
-            <a:off x="10763250" y="6000750"/>
-            <a:ext cx="6191250" cy="952500"/>
-          </a:xfrm>
-          <a:prstGeom prst="rect">
-            <a:avLst/>
-          </a:prstGeom>
-          <a:noFill/>
-        </p:spPr>
-        <p:txBody>
-          <a:bodyPr wrap="none">
-            <a:spAutoFit/>
-          </a:bodyPr>
-          <a:lstStyle/>
-          <a:p>
-            <a:pPr>
-              <a:defRPr sz="1500">
+              <a:t>✔  인증과 인가의 분리</a:t>
+            </a:r>
+          </a:p>
+          <a:p>
+            <a:pPr>
+              <a:spcAft>
+                <a:spcPts val="1000"/>
+              </a:spcAft>
+              <a:defRPr sz="1350">
                 <a:solidFill>
                   <a:srgbClr val="17263A"/>
                 </a:solidFill>
@@ -10401,133 +14954,12 @@
               </a:defRPr>
             </a:pPr>
             <a:r>
-              <a:t>Azure Control Plane은 환자 동의, ABAC 인가, 단기 토큰 발급, 감사로그만을 담당하며, 영상 픽셀 데이터는 경유하지 않습니다.</a:t>
-            </a:r>
-          </a:p>
-        </p:txBody>
-      </p:sp>
-      <p:sp>
-        <p:nvSpPr>
-          <p:cNvPr id="21" name="Rounded Rectangle 20"/>
-          <p:cNvSpPr/>
-          <p:nvPr/>
-        </p:nvSpPr>
-        <p:spPr>
-          <a:xfrm>
-            <a:off x="10477500" y="7239000"/>
-            <a:ext cx="6781800" cy="1809750"/>
-          </a:xfrm>
-          <a:prstGeom prst="roundRect">
-            <a:avLst/>
-          </a:prstGeom>
-          <a:solidFill>
-            <a:srgbClr val="F3F6FA"/>
-          </a:solidFill>
-          <a:ln w="19050">
-            <a:solidFill>
-              <a:srgbClr val="D8E0E9"/>
-            </a:solidFill>
-          </a:ln>
-        </p:spPr>
-        <p:style>
-          <a:lnRef idx="1">
-            <a:schemeClr val="accent1"/>
-          </a:lnRef>
-          <a:fillRef idx="3">
-            <a:schemeClr val="accent1"/>
-          </a:fillRef>
-          <a:effectRef idx="2">
-            <a:schemeClr val="accent1"/>
-          </a:effectRef>
-          <a:fontRef idx="minor">
-            <a:schemeClr val="lt1"/>
-          </a:fontRef>
-        </p:style>
-        <p:txBody>
-          <a:bodyPr rtlCol="0" anchor="ctr"/>
-          <a:lstStyle/>
-          <a:p>
-            <a:pPr algn="ctr"/>
-          </a:p>
-        </p:txBody>
-      </p:sp>
-      <p:sp>
-        <p:nvSpPr>
-          <p:cNvPr id="22" name="Rounded Rectangle 21"/>
-          <p:cNvSpPr/>
-          <p:nvPr/>
-        </p:nvSpPr>
-        <p:spPr>
-          <a:xfrm>
-            <a:off x="10763250" y="7477125"/>
-            <a:ext cx="571500" cy="342900"/>
-          </a:xfrm>
-          <a:prstGeom prst="roundRect">
-            <a:avLst/>
-          </a:prstGeom>
-          <a:solidFill>
-            <a:srgbClr val="2F68B5"/>
-          </a:solidFill>
-          <a:ln>
-            <a:noFill/>
-          </a:ln>
-        </p:spPr>
-        <p:style>
-          <a:lnRef idx="1">
-            <a:schemeClr val="accent1"/>
-          </a:lnRef>
-          <a:fillRef idx="3">
-            <a:schemeClr val="accent1"/>
-          </a:fillRef>
-          <a:effectRef idx="2">
-            <a:schemeClr val="accent1"/>
-          </a:effectRef>
-          <a:fontRef idx="minor">
-            <a:schemeClr val="lt1"/>
-          </a:fontRef>
-        </p:style>
-        <p:txBody>
-          <a:bodyPr rtlCol="0" anchor="ctr" wrap="none" lIns="0" tIns="0" rIns="0" bIns="0"/>
-          <a:lstStyle/>
-          <a:p>
-            <a:pPr algn="ctr">
-              <a:defRPr sz="1350" b="1">
-                <a:solidFill>
-                  <a:srgbClr val="FFFFFF"/>
-                </a:solidFill>
-                <a:latin typeface="프리텐다드"/>
-              </a:defRPr>
-            </a:pPr>
-            <a:r>
-              <a:t>03</a:t>
-            </a:r>
-          </a:p>
-        </p:txBody>
-      </p:sp>
-      <p:sp>
-        <p:nvSpPr>
-          <p:cNvPr id="23" name="TextBox 22"/>
-          <p:cNvSpPr txBox="1"/>
-          <p:nvPr/>
-        </p:nvSpPr>
-        <p:spPr>
-          <a:xfrm>
-            <a:off x="11525250" y="7448550"/>
-            <a:ext cx="5524500" cy="428625"/>
-          </a:xfrm>
-          <a:prstGeom prst="rect">
-            <a:avLst/>
-          </a:prstGeom>
-          <a:noFill/>
-        </p:spPr>
-        <p:txBody>
-          <a:bodyPr wrap="none">
-            <a:spAutoFit/>
-          </a:bodyPr>
-          <a:lstStyle/>
-          <a:p>
-            <a:pPr>
-              <a:defRPr sz="1800" b="1">
+              <a:t>     Entra ID 로그인과 의료영상 접근권한은 별도 단계</a:t>
+            </a:r>
+          </a:p>
+          <a:p>
+            <a:pPr>
+              <a:defRPr sz="1575" b="1">
                 <a:solidFill>
                   <a:srgbClr val="2F68B5"/>
                 </a:solidFill>
@@ -10535,35 +14967,15 @@
               </a:defRPr>
             </a:pPr>
             <a:r>
-              <a:t>필요 최소 전송 (Lazy Loading)</a:t>
-            </a:r>
-          </a:p>
-        </p:txBody>
-      </p:sp>
-      <p:sp>
-        <p:nvSpPr>
-          <p:cNvPr id="24" name="TextBox 23"/>
-          <p:cNvSpPr txBox="1"/>
-          <p:nvPr/>
-        </p:nvSpPr>
-        <p:spPr>
-          <a:xfrm>
-            <a:off x="10763250" y="7953374"/>
-            <a:ext cx="6191250" cy="952500"/>
-          </a:xfrm>
-          <a:prstGeom prst="rect">
-            <a:avLst/>
-          </a:prstGeom>
-          <a:noFill/>
-        </p:spPr>
-        <p:txBody>
-          <a:bodyPr wrap="none">
-            <a:spAutoFit/>
-          </a:bodyPr>
-          <a:lstStyle/>
-          <a:p>
-            <a:pPr>
-              <a:defRPr sz="1500">
+              <a:t>✔  Fail-Closed ABAC</a:t>
+            </a:r>
+          </a:p>
+          <a:p>
+            <a:pPr>
+              <a:spcAft>
+                <a:spcPts val="1000"/>
+              </a:spcAft>
+              <a:defRPr sz="1350">
                 <a:solidFill>
                   <a:srgbClr val="17263A"/>
                 </a:solidFill>
@@ -10571,7 +14983,65 @@
               </a:defRPr>
             </a:pPr>
             <a:r>
-              <a:t>전체 Study를 무차별 다운로드하지 않고, WADO-RS 표준 기반으로 Study ➔ Series ➔ Instance 프레임 단위로 필요한 만큼만 직접 전송합니다.</a:t>
+              <a:t>     11단계 교집합 전수 검증 통과 시 단기 토큰 발급</a:t>
+            </a:r>
+          </a:p>
+          <a:p>
+            <a:pPr>
+              <a:defRPr sz="1575" b="1">
+                <a:solidFill>
+                  <a:srgbClr val="2F68B5"/>
+                </a:solidFill>
+                <a:latin typeface="프리텐다드"/>
+              </a:defRPr>
+            </a:pPr>
+            <a:r>
+              <a:t>✔  병원 간 직통 스트리밍</a:t>
+            </a:r>
+          </a:p>
+          <a:p>
+            <a:pPr>
+              <a:spcAft>
+                <a:spcPts val="1000"/>
+              </a:spcAft>
+              <a:defRPr sz="1350">
+                <a:solidFill>
+                  <a:srgbClr val="17263A"/>
+                </a:solidFill>
+                <a:latin typeface="프리텐다드"/>
+              </a:defRPr>
+            </a:pPr>
+            <a:r>
+              <a:t>     WireGuard 사설망 기반 700 Slices CT Lazy Loading</a:t>
+            </a:r>
+          </a:p>
+          <a:p>
+            <a:pPr>
+              <a:defRPr sz="1575" b="1">
+                <a:solidFill>
+                  <a:srgbClr val="2F68B5"/>
+                </a:solidFill>
+                <a:latin typeface="프리텐다드"/>
+              </a:defRPr>
+            </a:pPr>
+            <a:r>
+              <a:t>✔  불변 감사로그 체인</a:t>
+            </a:r>
+          </a:p>
+          <a:p>
+            <a:pPr>
+              <a:spcAft>
+                <a:spcPts val="1000"/>
+              </a:spcAft>
+              <a:defRPr sz="1350">
+                <a:solidFill>
+                  <a:srgbClr val="17263A"/>
+                </a:solidFill>
+                <a:latin typeface="프리텐다드"/>
+              </a:defRPr>
+            </a:pPr>
+            <a:r>
+              <a:t>     모든 열람 및 거부 이력 1초 단위 감사 세션 기록</a:t>
             </a:r>
           </a:p>
         </p:txBody>
@@ -10740,7 +15210,7 @@
           <a:noFill/>
         </p:spPr>
         <p:txBody>
-          <a:bodyPr wrap="square" lIns="0" tIns="0" rIns="0" bIns="0">
+          <a:bodyPr wrap="square">
             <a:spAutoFit/>
           </a:bodyPr>
           <a:lstStyle/>
@@ -10754,7 +15224,7 @@
               </a:defRPr>
             </a:pPr>
             <a:r>
-              <a:t>04. SECURITY &amp; AI GOVERNANCE</a:t>
+              <a:t>❶ 환자·의료진 Microsoft 로그인</a:t>
             </a:r>
           </a:p>
         </p:txBody>
@@ -10776,13 +15246,13 @@
           <a:noFill/>
         </p:spPr>
         <p:txBody>
-          <a:bodyPr wrap="square" lIns="0" tIns="0" rIns="0" bIns="0">
+          <a:bodyPr wrap="square">
             <a:spAutoFit/>
           </a:bodyPr>
           <a:lstStyle/>
           <a:p>
             <a:pPr>
-              <a:defRPr sz="3900" b="1">
+              <a:defRPr sz="3750" b="1">
                 <a:solidFill>
                   <a:srgbClr val="17263A"/>
                 </a:solidFill>
@@ -10790,7 +15260,7 @@
               </a:defRPr>
             </a:pPr>
             <a:r>
-              <a:t>11단계 교집합 정책 검증과 비임상 AI 안전 가드레일</a:t>
+              <a:t>❶ 환자·의료진 Microsoft 로그인 : 신원 인증</a:t>
             </a:r>
           </a:p>
         </p:txBody>
@@ -10812,7 +15282,7 @@
           <a:noFill/>
         </p:spPr>
         <p:txBody>
-          <a:bodyPr wrap="square" lIns="0" tIns="0" rIns="0" bIns="0">
+          <a:bodyPr wrap="square">
             <a:spAutoFit/>
           </a:bodyPr>
           <a:lstStyle/>
@@ -10826,7 +15296,7 @@
               </a:defRPr>
             </a:pPr>
             <a:r>
-              <a:t>단 하나의 조건이라도 불충족 시 즉시 차단(Fail-Closed) 및 공인 코퍼스 기반 비임상 RAG</a:t>
+              <a:t>Microsoft Entra ID 기반의 신원 확인과 접근 권한의 물리적 분리</a:t>
             </a:r>
           </a:p>
         </p:txBody>
@@ -10891,7 +15361,7 @@
           <a:noFill/>
         </p:spPr>
         <p:txBody>
-          <a:bodyPr wrap="none" lIns="0" tIns="0" rIns="0" bIns="0">
+          <a:bodyPr wrap="none">
             <a:spAutoFit/>
           </a:bodyPr>
           <a:lstStyle/>
@@ -10905,7 +15375,7 @@
               </a:defRPr>
             </a:pPr>
             <a:r>
-              <a:t>Medi Q  /  합성 데이터 · 비임상 기술 PoC  ·  5분 핵심 피칭</a:t>
+              <a:t>Medi Q  /  합성 데이터 · 비임상 기술 PoC  ·  아키텍처 모션 워크스루</a:t>
             </a:r>
           </a:p>
         </p:txBody>
@@ -10927,7 +15397,7 @@
           <a:noFill/>
         </p:spPr>
         <p:txBody>
-          <a:bodyPr wrap="none" lIns="0" tIns="0" rIns="0" bIns="0">
+          <a:bodyPr wrap="none">
             <a:spAutoFit/>
           </a:bodyPr>
           <a:lstStyle/>
@@ -10941,7 +15411,7 @@
               </a:defRPr>
             </a:pPr>
             <a:r>
-              <a:t>05  /  10</a:t>
+              <a:t>05  /  16</a:t>
             </a:r>
           </a:p>
         </p:txBody>
@@ -10955,7 +15425,119 @@
         <p:spPr>
           <a:xfrm>
             <a:off x="1028700" y="3333750"/>
-            <a:ext cx="7924799" cy="5810250"/>
+            <a:ext cx="10477500" cy="5905500"/>
+          </a:xfrm>
+          <a:prstGeom prst="roundRect">
+            <a:avLst/>
+          </a:prstGeom>
+          <a:solidFill>
+            <a:srgbClr val="FFFFFF"/>
+          </a:solidFill>
+          <a:ln w="19050">
+            <a:solidFill>
+              <a:srgbClr val="D8E0E9"/>
+            </a:solidFill>
+          </a:ln>
+        </p:spPr>
+        <p:style>
+          <a:lnRef idx="1">
+            <a:schemeClr val="accent1"/>
+          </a:lnRef>
+          <a:fillRef idx="3">
+            <a:schemeClr val="accent1"/>
+          </a:fillRef>
+          <a:effectRef idx="2">
+            <a:schemeClr val="accent1"/>
+          </a:effectRef>
+          <a:fontRef idx="minor">
+            <a:schemeClr val="lt1"/>
+          </a:fontRef>
+        </p:style>
+        <p:txBody>
+          <a:bodyPr rtlCol="0" anchor="ctr"/>
+          <a:lstStyle/>
+          <a:p>
+            <a:pPr algn="ctr"/>
+          </a:p>
+        </p:txBody>
+      </p:sp>
+      <p:pic>
+        <p:nvPicPr>
+          <p:cNvPr id="12" name="Picture 11" descr="mediq_architecture_flow.png"/>
+          <p:cNvPicPr>
+            <a:picLocks noChangeAspect="1"/>
+          </p:cNvPicPr>
+          <p:nvPr/>
+        </p:nvPicPr>
+        <p:blipFill>
+          <a:blip r:embed="rId2"/>
+          <a:stretch>
+            <a:fillRect/>
+          </a:stretch>
+        </p:blipFill>
+        <p:spPr>
+          <a:xfrm>
+            <a:off x="1123950" y="3429000"/>
+            <a:ext cx="10287000" cy="5789514"/>
+          </a:xfrm>
+          <a:prstGeom prst="rect">
+            <a:avLst/>
+          </a:prstGeom>
+        </p:spPr>
+      </p:pic>
+      <p:sp>
+        <p:nvSpPr>
+          <p:cNvPr id="13" name="Rectangle 12"/>
+          <p:cNvSpPr/>
+          <p:nvPr/>
+        </p:nvSpPr>
+        <p:spPr>
+          <a:xfrm>
+            <a:off x="3246566" y="3951963"/>
+            <a:ext cx="4522096" cy="738301"/>
+          </a:xfrm>
+          <a:prstGeom prst="rect">
+            <a:avLst/>
+          </a:prstGeom>
+          <a:noFill/>
+          <a:ln w="44450">
+            <a:solidFill>
+              <a:srgbClr val="2F68B5"/>
+            </a:solidFill>
+          </a:ln>
+        </p:spPr>
+        <p:style>
+          <a:lnRef idx="1">
+            <a:schemeClr val="accent1"/>
+          </a:lnRef>
+          <a:fillRef idx="3">
+            <a:schemeClr val="accent1"/>
+          </a:fillRef>
+          <a:effectRef idx="2">
+            <a:schemeClr val="accent1"/>
+          </a:effectRef>
+          <a:fontRef idx="minor">
+            <a:schemeClr val="lt1"/>
+          </a:fontRef>
+        </p:style>
+        <p:txBody>
+          <a:bodyPr rtlCol="0" anchor="ctr"/>
+          <a:lstStyle/>
+          <a:p>
+            <a:pPr algn="ctr"/>
+          </a:p>
+        </p:txBody>
+      </p:sp>
+      <p:sp>
+        <p:nvSpPr>
+          <p:cNvPr id="14" name="Rounded Rectangle 13"/>
+          <p:cNvSpPr/>
+          <p:nvPr/>
+        </p:nvSpPr>
+        <p:spPr>
+          <a:xfrm>
+            <a:off x="11811000" y="3333750"/>
+            <a:ext cx="5448300" cy="5905500"/>
           </a:xfrm>
           <a:prstGeom prst="roundRect">
             <a:avLst/>
@@ -10993,14 +15575,14 @@
       </p:sp>
       <p:sp>
         <p:nvSpPr>
-          <p:cNvPr id="12" name="Rounded Rectangle 11"/>
+          <p:cNvPr id="15" name="Rounded Rectangle 14"/>
           <p:cNvSpPr/>
           <p:nvPr/>
         </p:nvSpPr>
         <p:spPr>
           <a:xfrm>
-            <a:off x="1314450" y="3619500"/>
-            <a:ext cx="1905000" cy="400050"/>
+            <a:off x="12096750" y="3619500"/>
+            <a:ext cx="1714500" cy="400050"/>
           </a:xfrm>
           <a:prstGeom prst="roundRect">
             <a:avLst/>
@@ -11027,7 +15609,7 @@
           </a:fontRef>
         </p:style>
         <p:txBody>
-          <a:bodyPr rtlCol="0" anchor="ctr" wrap="none" lIns="0" tIns="0" rIns="0" bIns="0"/>
+          <a:bodyPr rtlCol="0" anchor="ctr"/>
           <a:lstStyle/>
           <a:p>
             <a:pPr algn="ctr">
@@ -11039,21 +15621,21 @@
               </a:defRPr>
             </a:pPr>
             <a:r>
-              <a:t>접근통제 엔진</a:t>
-            </a:r>
-          </a:p>
-        </p:txBody>
-      </p:sp>
-      <p:sp>
-        <p:nvSpPr>
-          <p:cNvPr id="13" name="TextBox 12"/>
+              <a:t>STEP 01 / 08</a:t>
+            </a:r>
+          </a:p>
+        </p:txBody>
+      </p:sp>
+      <p:sp>
+        <p:nvSpPr>
+          <p:cNvPr id="16" name="TextBox 15"/>
           <p:cNvSpPr txBox="1"/>
           <p:nvPr/>
         </p:nvSpPr>
         <p:spPr>
           <a:xfrm>
-            <a:off x="3429000" y="3600450"/>
-            <a:ext cx="5238750" cy="428625"/>
+            <a:off x="12096750" y="4190999"/>
+            <a:ext cx="4876800" cy="476250"/>
           </a:xfrm>
           <a:prstGeom prst="rect">
             <a:avLst/>
@@ -11067,7 +15649,7 @@
           <a:lstStyle/>
           <a:p>
             <a:pPr>
-              <a:defRPr sz="1950" b="1">
+              <a:defRPr sz="2025" b="1">
                 <a:solidFill>
                   <a:srgbClr val="17263A"/>
                 </a:solidFill>
@@ -11075,21 +15657,21 @@
               </a:defRPr>
             </a:pPr>
             <a:r>
-              <a:t>11-Factor Fail-Closed ABAC Gate</a:t>
-            </a:r>
-          </a:p>
-        </p:txBody>
-      </p:sp>
-      <p:sp>
-        <p:nvSpPr>
-          <p:cNvPr id="14" name="TextBox 13"/>
+              <a:t>Microsoft Entra ID (IdP)</a:t>
+            </a:r>
+          </a:p>
+        </p:txBody>
+      </p:sp>
+      <p:sp>
+        <p:nvSpPr>
+          <p:cNvPr id="17" name="TextBox 16"/>
           <p:cNvSpPr txBox="1"/>
           <p:nvPr/>
         </p:nvSpPr>
         <p:spPr>
           <a:xfrm>
-            <a:off x="1314450" y="4190999"/>
-            <a:ext cx="7334250" cy="4762500"/>
+            <a:off x="12096750" y="4714875"/>
+            <a:ext cx="4876800" cy="714375"/>
           </a:xfrm>
           <a:prstGeom prst="rect">
             <a:avLst/>
@@ -11101,205 +15683,41 @@
             <a:spAutoFit/>
           </a:bodyPr>
           <a:lstStyle/>
-          <a:p/>
-          <a:p>
-            <a:pPr>
-              <a:spcAft>
-                <a:spcPts val="400"/>
-              </a:spcAft>
-              <a:defRPr sz="1500">
-                <a:solidFill>
-                  <a:srgbClr val="17263A"/>
-                </a:solidFill>
-                <a:latin typeface="프리텐다드"/>
-              </a:defRPr>
-            </a:pPr>
-            <a:r>
-              <a:t>•  1. consentId 고유 식별자 유효성</a:t>
-            </a:r>
-          </a:p>
-          <a:p>
-            <a:pPr>
-              <a:spcAft>
-                <a:spcPts val="400"/>
-              </a:spcAft>
-              <a:defRPr sz="1500">
-                <a:solidFill>
-                  <a:srgbClr val="17263A"/>
-                </a:solidFill>
-                <a:latin typeface="프리텐다드"/>
-              </a:defRPr>
-            </a:pPr>
-            <a:r>
-              <a:t>•  2. 동의 상태 ACTIVE 여부</a:t>
-            </a:r>
-          </a:p>
-          <a:p>
-            <a:pPr>
-              <a:spcAft>
-                <a:spcPts val="400"/>
-              </a:spcAft>
-              <a:defRPr sz="1500">
-                <a:solidFill>
-                  <a:srgbClr val="17263A"/>
-                </a:solidFill>
-                <a:latin typeface="프리텐다드"/>
-              </a:defRPr>
-            </a:pPr>
-            <a:r>
-              <a:t>•  3. 현재 시각이 validFrom/Until 내인가</a:t>
-            </a:r>
-          </a:p>
-          <a:p>
-            <a:pPr>
-              <a:spcAft>
-                <a:spcPts val="400"/>
-              </a:spcAft>
-              <a:defRPr sz="1500">
-                <a:solidFill>
-                  <a:srgbClr val="17263A"/>
-                </a:solidFill>
-                <a:latin typeface="프리텐다드"/>
-              </a:defRPr>
-            </a:pPr>
-            <a:r>
-              <a:t>•  4. 요청 병원 == 동의된 수신 병원</a:t>
-            </a:r>
-          </a:p>
-          <a:p>
-            <a:pPr>
-              <a:spcAft>
-                <a:spcPts val="400"/>
-              </a:spcAft>
-              <a:defRPr sz="1500">
-                <a:solidFill>
-                  <a:srgbClr val="17263A"/>
-                </a:solidFill>
-                <a:latin typeface="프리텐다드"/>
-              </a:defRPr>
-            </a:pPr>
-            <a:r>
-              <a:t>•  5. 요청 의사 소속 병원 일치</a:t>
-            </a:r>
-          </a:p>
-          <a:p>
-            <a:pPr>
-              <a:spcAft>
-                <a:spcPts val="400"/>
-              </a:spcAft>
-              <a:defRPr sz="1500">
-                <a:solidFill>
-                  <a:srgbClr val="17263A"/>
-                </a:solidFill>
-                <a:latin typeface="프리텐다드"/>
-              </a:defRPr>
-            </a:pPr>
-            <a:r>
-              <a:t>•  6. 요청 Study UID 허용 범위</a:t>
-            </a:r>
-          </a:p>
-          <a:p>
-            <a:pPr>
-              <a:spcAft>
-                <a:spcPts val="400"/>
-              </a:spcAft>
-              <a:defRPr sz="1500">
-                <a:solidFill>
-                  <a:srgbClr val="17263A"/>
-                </a:solidFill>
-                <a:latin typeface="프리텐다드"/>
-              </a:defRPr>
-            </a:pPr>
-            <a:r>
-              <a:t>•  7. 요청 Series UID 허용 범위</a:t>
-            </a:r>
-          </a:p>
-          <a:p>
-            <a:pPr>
-              <a:spcAft>
-                <a:spcPts val="400"/>
-              </a:spcAft>
-              <a:defRPr sz="1500">
-                <a:solidFill>
-                  <a:srgbClr val="17263A"/>
-                </a:solidFill>
-                <a:latin typeface="프리텐다드"/>
-              </a:defRPr>
-            </a:pPr>
-            <a:r>
-              <a:t>•  8. 요청 목적 == 동의 목적</a:t>
-            </a:r>
-          </a:p>
-          <a:p>
-            <a:pPr>
-              <a:spcAft>
-                <a:spcPts val="400"/>
-              </a:spcAft>
-              <a:defRPr sz="1500">
-                <a:solidFill>
-                  <a:srgbClr val="17263A"/>
-                </a:solidFill>
-                <a:latin typeface="프리텐다드"/>
-              </a:defRPr>
-            </a:pPr>
-            <a:r>
-              <a:t>•  9. VIEW_ONLY vs DOWNLOAD 권한</a:t>
-            </a:r>
-          </a:p>
-          <a:p>
-            <a:pPr>
-              <a:spcAft>
-                <a:spcPts val="400"/>
-              </a:spcAft>
-              <a:defRPr sz="1500">
-                <a:solidFill>
-                  <a:srgbClr val="17263A"/>
-                </a:solidFill>
-                <a:latin typeface="프리텐다드"/>
-              </a:defRPr>
-            </a:pPr>
-            <a:r>
-              <a:t>•  10. 단기 토큰 유효시간 (5~10분)</a:t>
-            </a:r>
-          </a:p>
-          <a:p>
-            <a:pPr>
-              <a:spcAft>
-                <a:spcPts val="400"/>
-              </a:spcAft>
-              <a:defRPr sz="1500">
-                <a:solidFill>
-                  <a:srgbClr val="17263A"/>
-                </a:solidFill>
-                <a:latin typeface="프리텐다드"/>
-              </a:defRPr>
-            </a:pPr>
-            <a:r>
-              <a:t>•  11. 토큰 범위 및 HMAC 무결성 서명</a:t>
-            </a:r>
-          </a:p>
-        </p:txBody>
-      </p:sp>
-      <p:sp>
-        <p:nvSpPr>
-          <p:cNvPr id="15" name="Rounded Rectangle 14"/>
+          <a:p>
+            <a:pPr>
+              <a:defRPr sz="1425">
+                <a:solidFill>
+                  <a:srgbClr val="53657B"/>
+                </a:solidFill>
+                <a:latin typeface="프리텐다드"/>
+              </a:defRPr>
+            </a:pPr>
+            <a:r>
+              <a:t>환자 및 의료진의 디지털 신원(Identity)을 검증하고 사내 연합 계정으로 안전하게 매핑합니다.</a:t>
+            </a:r>
+          </a:p>
+        </p:txBody>
+      </p:sp>
+      <p:sp>
+        <p:nvSpPr>
+          <p:cNvPr id="18" name="Rounded Rectangle 17"/>
           <p:cNvSpPr/>
           <p:nvPr/>
         </p:nvSpPr>
         <p:spPr>
           <a:xfrm>
-            <a:off x="9334500" y="3333750"/>
-            <a:ext cx="7924799" cy="5810250"/>
+            <a:off x="12096750" y="5524500"/>
+            <a:ext cx="4876800" cy="1143000"/>
           </a:xfrm>
           <a:prstGeom prst="roundRect">
             <a:avLst/>
           </a:prstGeom>
           <a:solidFill>
-            <a:srgbClr val="E7F4F1"/>
+            <a:srgbClr val="FFFFFF"/>
           </a:solidFill>
           <a:ln w="19050">
             <a:solidFill>
-              <a:srgbClr val="168B82"/>
+              <a:srgbClr val="2F68B5"/>
             </a:solidFill>
           </a:ln>
         </p:spPr>
@@ -11318,76 +15736,46 @@
           </a:fontRef>
         </p:style>
         <p:txBody>
-          <a:bodyPr rtlCol="0" anchor="ctr"/>
-          <a:lstStyle/>
-          <a:p>
-            <a:pPr algn="ctr"/>
-          </a:p>
-        </p:txBody>
-      </p:sp>
-      <p:sp>
-        <p:nvSpPr>
-          <p:cNvPr id="16" name="Rounded Rectangle 15"/>
-          <p:cNvSpPr/>
-          <p:nvPr/>
-        </p:nvSpPr>
-        <p:spPr>
-          <a:xfrm>
-            <a:off x="9620250" y="3619500"/>
-            <a:ext cx="1905000" cy="400050"/>
-          </a:xfrm>
-          <a:prstGeom prst="roundRect">
-            <a:avLst/>
-          </a:prstGeom>
-          <a:solidFill>
-            <a:srgbClr val="168B82"/>
-          </a:solidFill>
-          <a:ln>
-            <a:noFill/>
-          </a:ln>
-        </p:spPr>
-        <p:style>
-          <a:lnRef idx="1">
-            <a:schemeClr val="accent1"/>
-          </a:lnRef>
-          <a:fillRef idx="3">
-            <a:schemeClr val="accent1"/>
-          </a:fillRef>
-          <a:effectRef idx="2">
-            <a:schemeClr val="accent1"/>
-          </a:effectRef>
-          <a:fontRef idx="minor">
-            <a:schemeClr val="lt1"/>
-          </a:fontRef>
-        </p:style>
-        <p:txBody>
-          <a:bodyPr rtlCol="0" anchor="ctr" wrap="none" lIns="0" tIns="0" rIns="0" bIns="0"/>
+          <a:bodyPr rtlCol="0" anchor="ctr" lIns="152400" tIns="152400"/>
           <a:lstStyle/>
           <a:p>
             <a:pPr algn="ctr">
-              <a:defRPr sz="1425" b="1">
-                <a:solidFill>
-                  <a:srgbClr val="FFFFFF"/>
-                </a:solidFill>
-                <a:latin typeface="프리텐다드"/>
-              </a:defRPr>
-            </a:pPr>
-            <a:r>
-              <a:t>AI 가드레일</a:t>
-            </a:r>
-          </a:p>
-        </p:txBody>
-      </p:sp>
-      <p:sp>
-        <p:nvSpPr>
-          <p:cNvPr id="17" name="TextBox 16"/>
+              <a:defRPr sz="1350" b="1">
+                <a:solidFill>
+                  <a:srgbClr val="2F68B5"/>
+                </a:solidFill>
+                <a:latin typeface="프리텐다드"/>
+              </a:defRPr>
+            </a:pPr>
+            <a:r>
+              <a:t>[보안 원칙] 인증 ≠ 인가 분리</a:t>
+            </a:r>
+          </a:p>
+          <a:p>
+            <a:pPr>
+              <a:defRPr sz="1200">
+                <a:solidFill>
+                  <a:srgbClr val="17263A"/>
+                </a:solidFill>
+                <a:latin typeface="프리텐다드"/>
+              </a:defRPr>
+            </a:pPr>
+            <a:r>
+              <a:t>'누구인가?(로그인 인증)'와 '무엇을 볼 수 있는가?(접근 권한)'를 엄격히 분리하여 계정이 탈취되더라도 영상이 무단 노출되지 않습니다.</a:t>
+            </a:r>
+          </a:p>
+        </p:txBody>
+      </p:sp>
+      <p:sp>
+        <p:nvSpPr>
+          <p:cNvPr id="19" name="TextBox 18"/>
           <p:cNvSpPr txBox="1"/>
           <p:nvPr/>
         </p:nvSpPr>
         <p:spPr>
           <a:xfrm>
-            <a:off x="11715750" y="3600450"/>
-            <a:ext cx="5238750" cy="428625"/>
+            <a:off x="12096750" y="6810375"/>
+            <a:ext cx="4876800" cy="2190750"/>
           </a:xfrm>
           <a:prstGeom prst="rect">
             <a:avLst/>
@@ -11399,9 +15787,13 @@
             <a:spAutoFit/>
           </a:bodyPr>
           <a:lstStyle/>
-          <a:p>
-            <a:pPr>
-              <a:defRPr sz="1950" b="1">
+          <a:p/>
+          <a:p>
+            <a:pPr>
+              <a:spcAft>
+                <a:spcPts val="800"/>
+              </a:spcAft>
+              <a:defRPr sz="1387">
                 <a:solidFill>
                   <a:srgbClr val="17263A"/>
                 </a:solidFill>
@@ -11409,39 +15801,15 @@
               </a:defRPr>
             </a:pPr>
             <a:r>
-              <a:t>2-Layer Non-Clinical AI RAG</a:t>
-            </a:r>
-          </a:p>
-        </p:txBody>
-      </p:sp>
-      <p:sp>
-        <p:nvSpPr>
-          <p:cNvPr id="18" name="TextBox 17"/>
-          <p:cNvSpPr txBox="1"/>
-          <p:nvPr/>
-        </p:nvSpPr>
-        <p:spPr>
-          <a:xfrm>
-            <a:off x="9620250" y="4190999"/>
-            <a:ext cx="7334250" cy="4762500"/>
-          </a:xfrm>
-          <a:prstGeom prst="rect">
-            <a:avLst/>
-          </a:prstGeom>
-          <a:noFill/>
-        </p:spPr>
-        <p:txBody>
-          <a:bodyPr wrap="none">
-            <a:spAutoFit/>
-          </a:bodyPr>
-          <a:lstStyle/>
-          <a:p/>
+              <a:t>•  Microsoft 계정 연동 및 사내 연합형 계정 매핑</a:t>
+            </a:r>
+          </a:p>
           <a:p>
             <a:pPr>
               <a:spcAft>
-                <a:spcPts val="1400"/>
+                <a:spcPts val="800"/>
               </a:spcAft>
-              <a:defRPr sz="1500">
+              <a:defRPr sz="1387">
                 <a:solidFill>
                   <a:srgbClr val="17263A"/>
                 </a:solidFill>
@@ -11449,15 +15817,15 @@
               </a:defRPr>
             </a:pPr>
             <a:r>
-              <a:t>•  공인 코퍼스: MedlinePlus 및 간학회 1,019개 검사 토픽 연계</a:t>
+              <a:t>•  로그인 성공 시에도 의료영상 접근 권한은 자동 부여되지 않음</a:t>
             </a:r>
           </a:p>
           <a:p>
             <a:pPr>
               <a:spcAft>
-                <a:spcPts val="1400"/>
+                <a:spcPts val="800"/>
               </a:spcAft>
-              <a:defRPr sz="1500">
+              <a:defRPr sz="1387">
                 <a:solidFill>
                   <a:srgbClr val="17263A"/>
                 </a:solidFill>
@@ -11465,71 +15833,7 @@
               </a:defRPr>
             </a:pPr>
             <a:r>
-              <a:t>•  한국어 자모 분해 전처리: 조사(은/는/이/가/이란) 정밀 분리</a:t>
-            </a:r>
-          </a:p>
-          <a:p>
-            <a:pPr>
-              <a:spcAft>
-                <a:spcPts val="1400"/>
-              </a:spcAft>
-              <a:defRPr sz="1500">
-                <a:solidFill>
-                  <a:srgbClr val="17263A"/>
-                </a:solidFill>
-                <a:latin typeface="프리텐다드"/>
-              </a:defRPr>
-            </a:pPr>
-            <a:r>
-              <a:t>•  2-Layer 분류: 1차 토픽 감지 ➔ 2차 질문 의도(개념/원인/주의) 매핑</a:t>
-            </a:r>
-          </a:p>
-          <a:p>
-            <a:pPr>
-              <a:spcAft>
-                <a:spcPts val="1400"/>
-              </a:spcAft>
-              <a:defRPr sz="1500">
-                <a:solidFill>
-                  <a:srgbClr val="17263A"/>
-                </a:solidFill>
-                <a:latin typeface="프리텐다드"/>
-              </a:defRPr>
-            </a:pPr>
-            <a:r>
-              <a:t>•  표제어 단독 입력 시 안전한 기본값(DEFINITION) 자동 반환</a:t>
-            </a:r>
-          </a:p>
-          <a:p>
-            <a:pPr>
-              <a:spcAft>
-                <a:spcPts val="1400"/>
-              </a:spcAft>
-              <a:defRPr sz="1500">
-                <a:solidFill>
-                  <a:srgbClr val="17263A"/>
-                </a:solidFill>
-                <a:latin typeface="프리텐다드"/>
-              </a:defRPr>
-            </a:pPr>
-            <a:r>
-              <a:t>•  의료 진단/처방 차단: 약물 용량, 확진 판단 질의 안전 안내 전환</a:t>
-            </a:r>
-          </a:p>
-          <a:p>
-            <a:pPr>
-              <a:spcAft>
-                <a:spcPts val="1400"/>
-              </a:spcAft>
-              <a:defRPr sz="1500">
-                <a:solidFill>
-                  <a:srgbClr val="17263A"/>
-                </a:solidFill>
-                <a:latin typeface="프리텐다드"/>
-              </a:defRPr>
-            </a:pPr>
-            <a:r>
-              <a:t>•  의사 상담 리허설: 진료실에서 주치의에게 물어볼 질문 자동 생성</a:t>
+              <a:t>•  환자 동의와 진료 목적 검증은 완전히 별개 단계로 격리</a:t>
             </a:r>
           </a:p>
         </p:txBody>
@@ -11539,6 +15843,13 @@
   <p:clrMapOvr>
     <a:masterClrMapping/>
   </p:clrMapOvr>
+  <p:transition xmlns:p15="http://schemas.microsoft.com/office/powerpoint/2012/main">
+    <p:extLst>
+      <p:ext uri="{EFA19261-F742-4948-AE17-10779776E6A2}">
+        <p15:morph option="byObject"/>
+      </p:ext>
+    </p:extLst>
+  </p:transition>
 </p:sld>
 </file>
 
@@ -11698,7 +16009,7 @@
           <a:noFill/>
         </p:spPr>
         <p:txBody>
-          <a:bodyPr wrap="square" lIns="0" tIns="0" rIns="0" bIns="0">
+          <a:bodyPr wrap="square">
             <a:spAutoFit/>
           </a:bodyPr>
           <a:lstStyle/>
@@ -11712,7 +16023,7 @@
               </a:defRPr>
             </a:pPr>
             <a:r>
-              <a:t>05. LIVE SERVICE · PATIENT PORTAL</a:t>
+              <a:t>❷ 환자 공유 범위·병원·기간·검사 선택</a:t>
             </a:r>
           </a:p>
         </p:txBody>
@@ -11734,13 +16045,13 @@
           <a:noFill/>
         </p:spPr>
         <p:txBody>
-          <a:bodyPr wrap="square" lIns="0" tIns="0" rIns="0" bIns="0">
+          <a:bodyPr wrap="square">
             <a:spAutoFit/>
           </a:bodyPr>
           <a:lstStyle/>
           <a:p>
             <a:pPr>
-              <a:defRPr sz="3900" b="1">
+              <a:defRPr sz="3750" b="1">
                 <a:solidFill>
                   <a:srgbClr val="17263A"/>
                 </a:solidFill>
@@ -11748,7 +16059,7 @@
               </a:defRPr>
             </a:pPr>
             <a:r>
-              <a:t>직관적인 4대 역할 게이트와 환자 맞춤형 동의 지갑</a:t>
+              <a:t>❷ 환자 공유 범위·병원·기간·검사 선택</a:t>
             </a:r>
           </a:p>
         </p:txBody>
@@ -11770,7 +16081,7 @@
           <a:noFill/>
         </p:spPr>
         <p:txBody>
-          <a:bodyPr wrap="square" lIns="0" tIns="0" rIns="0" bIns="0">
+          <a:bodyPr wrap="square">
             <a:spAutoFit/>
           </a:bodyPr>
           <a:lstStyle/>
@@ -11784,7 +16095,7 @@
               </a:defRPr>
             </a:pPr>
             <a:r>
-              <a:t>환자가 직접 수신 병원, 진료 목적, 유효기간, 허용할 복부 CT 검사 범위를 지정하고 언제든 철회</a:t>
+              <a:t>환자 웹·모바일 PWA에서 필요한 검사 단위만 좁혀서 명시적 동의 생성</a:t>
             </a:r>
           </a:p>
         </p:txBody>
@@ -11849,7 +16160,7 @@
           <a:noFill/>
         </p:spPr>
         <p:txBody>
-          <a:bodyPr wrap="none" lIns="0" tIns="0" rIns="0" bIns="0">
+          <a:bodyPr wrap="none">
             <a:spAutoFit/>
           </a:bodyPr>
           <a:lstStyle/>
@@ -11863,7 +16174,7 @@
               </a:defRPr>
             </a:pPr>
             <a:r>
-              <a:t>Medi Q  /  합성 데이터 · 비임상 기술 PoC  ·  5분 핵심 피칭</a:t>
+              <a:t>Medi Q  /  합성 데이터 · 비임상 기술 PoC  ·  아키텍처 모션 워크스루</a:t>
             </a:r>
           </a:p>
         </p:txBody>
@@ -11885,7 +16196,7 @@
           <a:noFill/>
         </p:spPr>
         <p:txBody>
-          <a:bodyPr wrap="none" lIns="0" tIns="0" rIns="0" bIns="0">
+          <a:bodyPr wrap="none">
             <a:spAutoFit/>
           </a:bodyPr>
           <a:lstStyle/>
@@ -11899,7 +16210,7 @@
               </a:defRPr>
             </a:pPr>
             <a:r>
-              <a:t>06  /  10</a:t>
+              <a:t>06  /  16</a:t>
             </a:r>
           </a:p>
         </p:txBody>
@@ -11913,7 +16224,7 @@
         <p:spPr>
           <a:xfrm>
             <a:off x="1028700" y="3333750"/>
-            <a:ext cx="9144000" cy="5810250"/>
+            <a:ext cx="10477500" cy="5905500"/>
           </a:xfrm>
           <a:prstGeom prst="roundRect">
             <a:avLst/>
@@ -11951,7 +16262,7 @@
       </p:sp>
       <p:pic>
         <p:nvPicPr>
-          <p:cNvPr id="12" name="Picture 11" descr="06_patient_consent_wallet.png"/>
+          <p:cNvPr id="12" name="Picture 11" descr="mediq_architecture_flow.png"/>
           <p:cNvPicPr>
             <a:picLocks noChangeAspect="1"/>
           </p:cNvPicPr>
@@ -11965,8 +16276,8 @@
         </p:blipFill>
         <p:spPr>
           <a:xfrm>
-            <a:off x="1219200" y="3524250"/>
-            <a:ext cx="8763000" cy="4862606"/>
+            <a:off x="1123950" y="3429000"/>
+            <a:ext cx="10287000" cy="5789514"/>
           </a:xfrm>
           <a:prstGeom prst="rect">
             <a:avLst/>
@@ -11975,14 +16286,57 @@
       </p:pic>
       <p:sp>
         <p:nvSpPr>
-          <p:cNvPr id="13" name="Rounded Rectangle 12"/>
+          <p:cNvPr id="13" name="Rectangle 12"/>
           <p:cNvSpPr/>
           <p:nvPr/>
         </p:nvSpPr>
         <p:spPr>
           <a:xfrm>
-            <a:off x="10477500" y="3333750"/>
-            <a:ext cx="6781800" cy="5810250"/>
+            <a:off x="3831055" y="5520854"/>
+            <a:ext cx="1599653" cy="1045927"/>
+          </a:xfrm>
+          <a:prstGeom prst="rect">
+            <a:avLst/>
+          </a:prstGeom>
+          <a:noFill/>
+          <a:ln w="44450">
+            <a:solidFill>
+              <a:srgbClr val="2F68B5"/>
+            </a:solidFill>
+          </a:ln>
+        </p:spPr>
+        <p:style>
+          <a:lnRef idx="1">
+            <a:schemeClr val="accent1"/>
+          </a:lnRef>
+          <a:fillRef idx="3">
+            <a:schemeClr val="accent1"/>
+          </a:fillRef>
+          <a:effectRef idx="2">
+            <a:schemeClr val="accent1"/>
+          </a:effectRef>
+          <a:fontRef idx="minor">
+            <a:schemeClr val="lt1"/>
+          </a:fontRef>
+        </p:style>
+        <p:txBody>
+          <a:bodyPr rtlCol="0" anchor="ctr"/>
+          <a:lstStyle/>
+          <a:p>
+            <a:pPr algn="ctr"/>
+          </a:p>
+        </p:txBody>
+      </p:sp>
+      <p:sp>
+        <p:nvSpPr>
+          <p:cNvPr id="14" name="Rounded Rectangle 13"/>
+          <p:cNvSpPr/>
+          <p:nvPr/>
+        </p:nvSpPr>
+        <p:spPr>
+          <a:xfrm>
+            <a:off x="11811000" y="3333750"/>
+            <a:ext cx="5448300" cy="5905500"/>
           </a:xfrm>
           <a:prstGeom prst="roundRect">
             <a:avLst/>
@@ -12020,14 +16374,14 @@
       </p:sp>
       <p:sp>
         <p:nvSpPr>
-          <p:cNvPr id="14" name="Rounded Rectangle 13"/>
+          <p:cNvPr id="15" name="Rounded Rectangle 14"/>
           <p:cNvSpPr/>
           <p:nvPr/>
         </p:nvSpPr>
         <p:spPr>
           <a:xfrm>
-            <a:off x="10763250" y="3619500"/>
-            <a:ext cx="2095499" cy="400050"/>
+            <a:off x="12096750" y="3619500"/>
+            <a:ext cx="1714500" cy="400050"/>
           </a:xfrm>
           <a:prstGeom prst="roundRect">
             <a:avLst/>
@@ -12054,7 +16408,7 @@
           </a:fontRef>
         </p:style>
         <p:txBody>
-          <a:bodyPr rtlCol="0" anchor="ctr" wrap="none" lIns="0" tIns="0" rIns="0" bIns="0"/>
+          <a:bodyPr rtlCol="0" anchor="ctr"/>
           <a:lstStyle/>
           <a:p>
             <a:pPr algn="ctr">
@@ -12066,21 +16420,21 @@
               </a:defRPr>
             </a:pPr>
             <a:r>
-              <a:t>환자 동의 지갑</a:t>
-            </a:r>
-          </a:p>
-        </p:txBody>
-      </p:sp>
-      <p:sp>
-        <p:nvSpPr>
-          <p:cNvPr id="15" name="TextBox 14"/>
+              <a:t>STEP 02 / 08</a:t>
+            </a:r>
+          </a:p>
+        </p:txBody>
+      </p:sp>
+      <p:sp>
+        <p:nvSpPr>
+          <p:cNvPr id="16" name="TextBox 15"/>
           <p:cNvSpPr txBox="1"/>
           <p:nvPr/>
         </p:nvSpPr>
         <p:spPr>
           <a:xfrm>
-            <a:off x="13049250" y="3600450"/>
-            <a:ext cx="4000500" cy="428625"/>
+            <a:off x="12096750" y="4190999"/>
+            <a:ext cx="4876800" cy="476250"/>
           </a:xfrm>
           <a:prstGeom prst="rect">
             <a:avLst/>
@@ -12094,7 +16448,7 @@
           <a:lstStyle/>
           <a:p>
             <a:pPr>
-              <a:defRPr sz="1950" b="1">
+              <a:defRPr sz="2025" b="1">
                 <a:solidFill>
                   <a:srgbClr val="17263A"/>
                 </a:solidFill>
@@ -12102,21 +16456,21 @@
               </a:defRPr>
             </a:pPr>
             <a:r>
-              <a:t>환자 중심의 공유 통제</a:t>
-            </a:r>
-          </a:p>
-        </p:txBody>
-      </p:sp>
-      <p:sp>
-        <p:nvSpPr>
-          <p:cNvPr id="16" name="TextBox 15"/>
+              <a:t>환자 PWA &amp; HTTPS Edge</a:t>
+            </a:r>
+          </a:p>
+        </p:txBody>
+      </p:sp>
+      <p:sp>
+        <p:nvSpPr>
+          <p:cNvPr id="17" name="TextBox 16"/>
           <p:cNvSpPr txBox="1"/>
           <p:nvPr/>
         </p:nvSpPr>
         <p:spPr>
           <a:xfrm>
-            <a:off x="10763250" y="4238625"/>
-            <a:ext cx="6191250" cy="4762500"/>
+            <a:off x="12096750" y="4714875"/>
+            <a:ext cx="4876800" cy="714375"/>
           </a:xfrm>
           <a:prstGeom prst="rect">
             <a:avLst/>
@@ -12128,26 +16482,117 @@
             <a:spAutoFit/>
           </a:bodyPr>
           <a:lstStyle/>
+          <a:p>
+            <a:pPr>
+              <a:defRPr sz="1425">
+                <a:solidFill>
+                  <a:srgbClr val="53657B"/>
+                </a:solidFill>
+                <a:latin typeface="프리텐다드"/>
+              </a:defRPr>
+            </a:pPr>
+            <a:r>
+              <a:t>환자가 스마트폰 의료지갑에서 수신 병원(B병원), 진료 목적, 유효기간, 복부 CT 검사를 직접 선택합니다.</a:t>
+            </a:r>
+          </a:p>
+        </p:txBody>
+      </p:sp>
+      <p:sp>
+        <p:nvSpPr>
+          <p:cNvPr id="18" name="Rounded Rectangle 17"/>
+          <p:cNvSpPr/>
+          <p:nvPr/>
+        </p:nvSpPr>
+        <p:spPr>
+          <a:xfrm>
+            <a:off x="12096750" y="5524500"/>
+            <a:ext cx="4876800" cy="1143000"/>
+          </a:xfrm>
+          <a:prstGeom prst="roundRect">
+            <a:avLst/>
+          </a:prstGeom>
+          <a:solidFill>
+            <a:srgbClr val="FFFFFF"/>
+          </a:solidFill>
+          <a:ln w="19050">
+            <a:solidFill>
+              <a:srgbClr val="2F68B5"/>
+            </a:solidFill>
+          </a:ln>
+        </p:spPr>
+        <p:style>
+          <a:lnRef idx="1">
+            <a:schemeClr val="accent1"/>
+          </a:lnRef>
+          <a:fillRef idx="3">
+            <a:schemeClr val="accent1"/>
+          </a:fillRef>
+          <a:effectRef idx="2">
+            <a:schemeClr val="accent1"/>
+          </a:effectRef>
+          <a:fontRef idx="minor">
+            <a:schemeClr val="lt1"/>
+          </a:fontRef>
+        </p:style>
+        <p:txBody>
+          <a:bodyPr rtlCol="0" anchor="ctr" lIns="152400" tIns="152400"/>
+          <a:lstStyle/>
+          <a:p>
+            <a:pPr algn="ctr">
+              <a:defRPr sz="1350" b="1">
+                <a:solidFill>
+                  <a:srgbClr val="2F68B5"/>
+                </a:solidFill>
+                <a:latin typeface="프리텐다드"/>
+              </a:defRPr>
+            </a:pPr>
+            <a:r>
+              <a:t>[보안 통제] 포괄적 동의 금지</a:t>
+            </a:r>
+          </a:p>
+          <a:p>
+            <a:pPr>
+              <a:defRPr sz="1200">
+                <a:solidFill>
+                  <a:srgbClr val="17263A"/>
+                </a:solidFill>
+                <a:latin typeface="프리텐다드"/>
+              </a:defRPr>
+            </a:pPr>
+            <a:r>
+              <a:t>전체 진료기록을 무차별 개방하지 않고, 이번 진료에 필요한 특정 Study 및 Series UID 단위로만 공유 범위를 한정합니다.</a:t>
+            </a:r>
+          </a:p>
+        </p:txBody>
+      </p:sp>
+      <p:sp>
+        <p:nvSpPr>
+          <p:cNvPr id="19" name="TextBox 18"/>
+          <p:cNvSpPr txBox="1"/>
+          <p:nvPr/>
+        </p:nvSpPr>
+        <p:spPr>
+          <a:xfrm>
+            <a:off x="12096750" y="6810375"/>
+            <a:ext cx="4876800" cy="2190750"/>
+          </a:xfrm>
+          <a:prstGeom prst="rect">
+            <a:avLst/>
+          </a:prstGeom>
+          <a:noFill/>
+        </p:spPr>
+        <p:txBody>
+          <a:bodyPr wrap="none">
+            <a:spAutoFit/>
+          </a:bodyPr>
+          <a:lstStyle/>
           <a:p/>
           <a:p>
             <a:pPr>
-              <a:defRPr sz="1575" b="1">
-                <a:solidFill>
-                  <a:srgbClr val="2F68B5"/>
-                </a:solidFill>
-                <a:latin typeface="프리텐다드"/>
-              </a:defRPr>
-            </a:pPr>
-            <a:r>
-              <a:t>✔  4대 역할 게이트 분리</a:t>
-            </a:r>
-          </a:p>
-          <a:p>
-            <a:pPr>
               <a:spcAft>
-                <a:spcPts val="1000"/>
+                <a:spcPts val="800"/>
               </a:spcAft>
-              <a:defRPr sz="1350">
+              <a:defRPr sz="1387">
                 <a:solidFill>
                   <a:srgbClr val="17263A"/>
                 </a:solidFill>
@@ -12155,28 +16600,15 @@
               </a:defRPr>
             </a:pPr>
             <a:r>
-              <a:t>     환자, 의료진, 병원 관리자, 보안 운영자 전용 로그인 화면 제공</a:t>
-            </a:r>
-          </a:p>
-          <a:p>
-            <a:pPr>
-              <a:defRPr sz="1575" b="1">
-                <a:solidFill>
-                  <a:srgbClr val="2F68B5"/>
-                </a:solidFill>
-                <a:latin typeface="프리텐다드"/>
-              </a:defRPr>
-            </a:pPr>
-            <a:r>
-              <a:t>✔  수신 병원 선택</a:t>
+              <a:t>•  A대학병원에서 B대학병원으로 수신 기관 명확히 지정</a:t>
             </a:r>
           </a:p>
           <a:p>
             <a:pPr>
               <a:spcAft>
-                <a:spcPts val="1000"/>
+                <a:spcPts val="800"/>
               </a:spcAft>
-              <a:defRPr sz="1350">
+              <a:defRPr sz="1387">
                 <a:solidFill>
                   <a:srgbClr val="17263A"/>
                 </a:solidFill>
@@ -12184,28 +16616,15 @@
               </a:defRPr>
             </a:pPr>
             <a:r>
-              <a:t>     A대학병원에서 B대학병원으로 공유 대상 병원 명확히 지정</a:t>
-            </a:r>
-          </a:p>
-          <a:p>
-            <a:pPr>
-              <a:defRPr sz="1575" b="1">
-                <a:solidFill>
-                  <a:srgbClr val="2F68B5"/>
-                </a:solidFill>
-                <a:latin typeface="프리텐다드"/>
-              </a:defRPr>
-            </a:pPr>
-            <a:r>
-              <a:t>✔  열람 목적 및 기간</a:t>
+              <a:t>•  진료 목적으로 한정, 1일~30일 사이 유효기간 설정</a:t>
             </a:r>
           </a:p>
           <a:p>
             <a:pPr>
               <a:spcAft>
-                <a:spcPts val="1000"/>
+                <a:spcPts val="800"/>
               </a:spcAft>
-              <a:defRPr sz="1350">
+              <a:defRPr sz="1387">
                 <a:solidFill>
                   <a:srgbClr val="17263A"/>
                 </a:solidFill>
@@ -12213,65 +16632,7 @@
               </a:defRPr>
             </a:pPr>
             <a:r>
-              <a:t>     진료 목적으로 한정, 1일~30일 사이 유효기간 설정</a:t>
-            </a:r>
-          </a:p>
-          <a:p>
-            <a:pPr>
-              <a:defRPr sz="1575" b="1">
-                <a:solidFill>
-                  <a:srgbClr val="2F68B5"/>
-                </a:solidFill>
-                <a:latin typeface="프리텐다드"/>
-              </a:defRPr>
-            </a:pPr>
-            <a:r>
-              <a:t>✔  검사 단위 선택</a:t>
-            </a:r>
-          </a:p>
-          <a:p>
-            <a:pPr>
-              <a:spcAft>
-                <a:spcPts val="1000"/>
-              </a:spcAft>
-              <a:defRPr sz="1350">
-                <a:solidFill>
-                  <a:srgbClr val="17263A"/>
-                </a:solidFill>
-                <a:latin typeface="프리텐다드"/>
-              </a:defRPr>
-            </a:pPr>
-            <a:r>
-              <a:t>     전체 진료기록이 아닌, 필요한 특정 복부 CT Study/Series만 선택</a:t>
-            </a:r>
-          </a:p>
-          <a:p>
-            <a:pPr>
-              <a:defRPr sz="1575" b="1">
-                <a:solidFill>
-                  <a:srgbClr val="2F68B5"/>
-                </a:solidFill>
-                <a:latin typeface="프리텐다드"/>
-              </a:defRPr>
-            </a:pPr>
-            <a:r>
-              <a:t>✔  원클릭 동의 철회</a:t>
-            </a:r>
-          </a:p>
-          <a:p>
-            <a:pPr>
-              <a:spcAft>
-                <a:spcPts val="1000"/>
-              </a:spcAft>
-              <a:defRPr sz="1350">
-                <a:solidFill>
-                  <a:srgbClr val="17263A"/>
-                </a:solidFill>
-                <a:latin typeface="프리텐다드"/>
-              </a:defRPr>
-            </a:pPr>
-            <a:r>
-              <a:t>     언제든 환자가 원할 때 즉시 권한을 파기하는 Revoke 지원</a:t>
+              <a:t>•  NSG 443 포트만 개방 및 OWASP CRS Caddy/Coraza WAF 보호</a:t>
             </a:r>
           </a:p>
         </p:txBody>
@@ -12281,6 +16642,13 @@
   <p:clrMapOvr>
     <a:masterClrMapping/>
   </p:clrMapOvr>
+  <p:transition xmlns:p15="http://schemas.microsoft.com/office/powerpoint/2012/main">
+    <p:extLst>
+      <p:ext uri="{EFA19261-F742-4948-AE17-10779776E6A2}">
+        <p15:morph option="byObject"/>
+      </p:ext>
+    </p:extLst>
+  </p:transition>
 </p:sld>
 </file>
 
@@ -12440,7 +16808,7 @@
           <a:noFill/>
         </p:spPr>
         <p:txBody>
-          <a:bodyPr wrap="square" lIns="0" tIns="0" rIns="0" bIns="0">
+          <a:bodyPr wrap="square">
             <a:spAutoFit/>
           </a:bodyPr>
           <a:lstStyle/>
@@ -12454,7 +16822,7 @@
               </a:defRPr>
             </a:pPr>
             <a:r>
-              <a:t>06. LIVE SERVICE · HEALTH HELPER</a:t>
+              <a:t>❸ 동의 저장 및 QR 티켓 발급</a:t>
             </a:r>
           </a:p>
         </p:txBody>
@@ -12476,13 +16844,13 @@
           <a:noFill/>
         </p:spPr>
         <p:txBody>
-          <a:bodyPr wrap="square" lIns="0" tIns="0" rIns="0" bIns="0">
+          <a:bodyPr wrap="square">
             <a:spAutoFit/>
           </a:bodyPr>
           <a:lstStyle/>
           <a:p>
             <a:pPr>
-              <a:defRPr sz="3900" b="1">
+              <a:defRPr sz="3750" b="1">
                 <a:solidFill>
                   <a:srgbClr val="17263A"/>
                 </a:solidFill>
@@ -12490,7 +16858,7 @@
               </a:defRPr>
             </a:pPr>
             <a:r>
-              <a:t>어려운 검사 결과를 눈높이 설명으로: AI 건강도우미</a:t>
+              <a:t>❸ 동의 저장 및 QR 티켓 발급</a:t>
             </a:r>
           </a:p>
         </p:txBody>
@@ -12512,7 +16880,7 @@
           <a:noFill/>
         </p:spPr>
         <p:txBody>
-          <a:bodyPr wrap="square" lIns="0" tIns="0" rIns="0" bIns="0">
+          <a:bodyPr wrap="square">
             <a:spAutoFit/>
           </a:bodyPr>
           <a:lstStyle/>
@@ -12526,7 +16894,7 @@
               </a:defRPr>
             </a:pPr>
             <a:r>
-              <a:t>혈청 알파태아단백(AFP) 검사 결과 연동, 쉬운 개념 해설 및 진료실 의사 상담 리허설</a:t>
+              <a:t>동의 조건을 암호화 저장하고 영상 원본은 보관하지 않는 Zero Cloud Storage</a:t>
             </a:r>
           </a:p>
         </p:txBody>
@@ -12591,7 +16959,7 @@
           <a:noFill/>
         </p:spPr>
         <p:txBody>
-          <a:bodyPr wrap="none" lIns="0" tIns="0" rIns="0" bIns="0">
+          <a:bodyPr wrap="none">
             <a:spAutoFit/>
           </a:bodyPr>
           <a:lstStyle/>
@@ -12605,7 +16973,7 @@
               </a:defRPr>
             </a:pPr>
             <a:r>
-              <a:t>Medi Q  /  합성 데이터 · 비임상 기술 PoC  ·  5분 핵심 피칭</a:t>
+              <a:t>Medi Q  /  합성 데이터 · 비임상 기술 PoC  ·  아키텍처 모션 워크스루</a:t>
             </a:r>
           </a:p>
         </p:txBody>
@@ -12627,7 +16995,7 @@
           <a:noFill/>
         </p:spPr>
         <p:txBody>
-          <a:bodyPr wrap="none" lIns="0" tIns="0" rIns="0" bIns="0">
+          <a:bodyPr wrap="none">
             <a:spAutoFit/>
           </a:bodyPr>
           <a:lstStyle/>
@@ -12641,7 +17009,7 @@
               </a:defRPr>
             </a:pPr>
             <a:r>
-              <a:t>07  /  10</a:t>
+              <a:t>07  /  16</a:t>
             </a:r>
           </a:p>
         </p:txBody>
@@ -12655,7 +17023,7 @@
         <p:spPr>
           <a:xfrm>
             <a:off x="1028700" y="3333750"/>
-            <a:ext cx="7143750" cy="5810250"/>
+            <a:ext cx="10477500" cy="5905500"/>
           </a:xfrm>
           <a:prstGeom prst="roundRect">
             <a:avLst/>
@@ -12693,7 +17061,7 @@
       </p:sp>
       <p:pic>
         <p:nvPicPr>
-          <p:cNvPr id="12" name="Picture 11" descr="05_health_helper_rag.png"/>
+          <p:cNvPr id="12" name="Picture 11" descr="mediq_architecture_flow.png"/>
           <p:cNvPicPr>
             <a:picLocks noChangeAspect="1"/>
           </p:cNvPicPr>
@@ -12707,8 +17075,8 @@
         </p:blipFill>
         <p:spPr>
           <a:xfrm>
-            <a:off x="1219200" y="3476625"/>
-            <a:ext cx="6762750" cy="6974086"/>
+            <a:off x="1123950" y="3429000"/>
+            <a:ext cx="10287000" cy="5789514"/>
           </a:xfrm>
           <a:prstGeom prst="rect">
             <a:avLst/>
@@ -12717,20 +17085,233 @@
       </p:pic>
       <p:sp>
         <p:nvSpPr>
-          <p:cNvPr id="13" name="Rounded Rectangle 12"/>
+          <p:cNvPr id="13" name="Rectangle 12"/>
           <p:cNvSpPr/>
           <p:nvPr/>
         </p:nvSpPr>
         <p:spPr>
           <a:xfrm>
-            <a:off x="8477250" y="3333750"/>
-            <a:ext cx="8782050" cy="5810250"/>
+            <a:off x="4384781" y="5582379"/>
+            <a:ext cx="3383881" cy="2707105"/>
+          </a:xfrm>
+          <a:prstGeom prst="rect">
+            <a:avLst/>
+          </a:prstGeom>
+          <a:noFill/>
+          <a:ln w="44450">
+            <a:solidFill>
+              <a:srgbClr val="168B82"/>
+            </a:solidFill>
+          </a:ln>
+        </p:spPr>
+        <p:style>
+          <a:lnRef idx="1">
+            <a:schemeClr val="accent1"/>
+          </a:lnRef>
+          <a:fillRef idx="3">
+            <a:schemeClr val="accent1"/>
+          </a:fillRef>
+          <a:effectRef idx="2">
+            <a:schemeClr val="accent1"/>
+          </a:effectRef>
+          <a:fontRef idx="minor">
+            <a:schemeClr val="lt1"/>
+          </a:fontRef>
+        </p:style>
+        <p:txBody>
+          <a:bodyPr rtlCol="0" anchor="ctr"/>
+          <a:lstStyle/>
+          <a:p>
+            <a:pPr algn="ctr"/>
+          </a:p>
+        </p:txBody>
+      </p:sp>
+      <p:sp>
+        <p:nvSpPr>
+          <p:cNvPr id="14" name="Rounded Rectangle 13"/>
+          <p:cNvSpPr/>
+          <p:nvPr/>
+        </p:nvSpPr>
+        <p:spPr>
+          <a:xfrm>
+            <a:off x="11811000" y="3333750"/>
+            <a:ext cx="5448300" cy="5905500"/>
           </a:xfrm>
           <a:prstGeom prst="roundRect">
             <a:avLst/>
           </a:prstGeom>
           <a:solidFill>
-            <a:srgbClr val="E7F4F1"/>
+            <a:srgbClr val="F3F6FA"/>
+          </a:solidFill>
+          <a:ln w="19050">
+            <a:solidFill>
+              <a:srgbClr val="D8E0E9"/>
+            </a:solidFill>
+          </a:ln>
+        </p:spPr>
+        <p:style>
+          <a:lnRef idx="1">
+            <a:schemeClr val="accent1"/>
+          </a:lnRef>
+          <a:fillRef idx="3">
+            <a:schemeClr val="accent1"/>
+          </a:fillRef>
+          <a:effectRef idx="2">
+            <a:schemeClr val="accent1"/>
+          </a:effectRef>
+          <a:fontRef idx="minor">
+            <a:schemeClr val="lt1"/>
+          </a:fontRef>
+        </p:style>
+        <p:txBody>
+          <a:bodyPr rtlCol="0" anchor="ctr"/>
+          <a:lstStyle/>
+          <a:p>
+            <a:pPr algn="ctr"/>
+          </a:p>
+        </p:txBody>
+      </p:sp>
+      <p:sp>
+        <p:nvSpPr>
+          <p:cNvPr id="15" name="Rounded Rectangle 14"/>
+          <p:cNvSpPr/>
+          <p:nvPr/>
+        </p:nvSpPr>
+        <p:spPr>
+          <a:xfrm>
+            <a:off x="12096750" y="3619500"/>
+            <a:ext cx="1714500" cy="400050"/>
+          </a:xfrm>
+          <a:prstGeom prst="roundRect">
+            <a:avLst/>
+          </a:prstGeom>
+          <a:solidFill>
+            <a:srgbClr val="168B82"/>
+          </a:solidFill>
+          <a:ln>
+            <a:noFill/>
+          </a:ln>
+        </p:spPr>
+        <p:style>
+          <a:lnRef idx="1">
+            <a:schemeClr val="accent1"/>
+          </a:lnRef>
+          <a:fillRef idx="3">
+            <a:schemeClr val="accent1"/>
+          </a:fillRef>
+          <a:effectRef idx="2">
+            <a:schemeClr val="accent1"/>
+          </a:effectRef>
+          <a:fontRef idx="minor">
+            <a:schemeClr val="lt1"/>
+          </a:fontRef>
+        </p:style>
+        <p:txBody>
+          <a:bodyPr rtlCol="0" anchor="ctr"/>
+          <a:lstStyle/>
+          <a:p>
+            <a:pPr algn="ctr">
+              <a:defRPr sz="1425" b="1">
+                <a:solidFill>
+                  <a:srgbClr val="FFFFFF"/>
+                </a:solidFill>
+                <a:latin typeface="프리텐다드"/>
+              </a:defRPr>
+            </a:pPr>
+            <a:r>
+              <a:t>STEP 03 / 08</a:t>
+            </a:r>
+          </a:p>
+        </p:txBody>
+      </p:sp>
+      <p:sp>
+        <p:nvSpPr>
+          <p:cNvPr id="16" name="TextBox 15"/>
+          <p:cNvSpPr txBox="1"/>
+          <p:nvPr/>
+        </p:nvSpPr>
+        <p:spPr>
+          <a:xfrm>
+            <a:off x="12096750" y="4190999"/>
+            <a:ext cx="4876800" cy="476250"/>
+          </a:xfrm>
+          <a:prstGeom prst="rect">
+            <a:avLst/>
+          </a:prstGeom>
+          <a:noFill/>
+        </p:spPr>
+        <p:txBody>
+          <a:bodyPr wrap="none">
+            <a:spAutoFit/>
+          </a:bodyPr>
+          <a:lstStyle/>
+          <a:p>
+            <a:pPr>
+              <a:defRPr sz="2025" b="1">
+                <a:solidFill>
+                  <a:srgbClr val="17263A"/>
+                </a:solidFill>
+                <a:latin typeface="프리텐다드"/>
+              </a:defRPr>
+            </a:pPr>
+            <a:r>
+              <a:t>Control Plane &amp; Key Vault</a:t>
+            </a:r>
+          </a:p>
+        </p:txBody>
+      </p:sp>
+      <p:sp>
+        <p:nvSpPr>
+          <p:cNvPr id="17" name="TextBox 16"/>
+          <p:cNvSpPr txBox="1"/>
+          <p:nvPr/>
+        </p:nvSpPr>
+        <p:spPr>
+          <a:xfrm>
+            <a:off x="12096750" y="4714875"/>
+            <a:ext cx="4876800" cy="714375"/>
+          </a:xfrm>
+          <a:prstGeom prst="rect">
+            <a:avLst/>
+          </a:prstGeom>
+          <a:noFill/>
+        </p:spPr>
+        <p:txBody>
+          <a:bodyPr wrap="none">
+            <a:spAutoFit/>
+          </a:bodyPr>
+          <a:lstStyle/>
+          <a:p>
+            <a:pPr>
+              <a:defRPr sz="1425">
+                <a:solidFill>
+                  <a:srgbClr val="53657B"/>
+                </a:solidFill>
+                <a:latin typeface="프리텐다드"/>
+              </a:defRPr>
+            </a:pPr>
+            <a:r>
+              <a:t>환자의 동의 조건(Study/Series 범위, 기간)을 PostgreSQL에 기록하고 Azure Key Vault로 암호화 티켓을 생성합니다.</a:t>
+            </a:r>
+          </a:p>
+        </p:txBody>
+      </p:sp>
+      <p:sp>
+        <p:nvSpPr>
+          <p:cNvPr id="18" name="Rounded Rectangle 17"/>
+          <p:cNvSpPr/>
+          <p:nvPr/>
+        </p:nvSpPr>
+        <p:spPr>
+          <a:xfrm>
+            <a:off x="12096750" y="5524500"/>
+            <a:ext cx="4876800" cy="1143000"/>
+          </a:xfrm>
+          <a:prstGeom prst="roundRect">
+            <a:avLst/>
+          </a:prstGeom>
+          <a:solidFill>
+            <a:srgbClr val="FFFFFF"/>
           </a:solidFill>
           <a:ln w="19050">
             <a:solidFill>
@@ -12753,76 +17334,46 @@
           </a:fontRef>
         </p:style>
         <p:txBody>
-          <a:bodyPr rtlCol="0" anchor="ctr"/>
-          <a:lstStyle/>
-          <a:p>
-            <a:pPr algn="ctr"/>
-          </a:p>
-        </p:txBody>
-      </p:sp>
-      <p:sp>
-        <p:nvSpPr>
-          <p:cNvPr id="14" name="Rounded Rectangle 13"/>
-          <p:cNvSpPr/>
-          <p:nvPr/>
-        </p:nvSpPr>
-        <p:spPr>
-          <a:xfrm>
-            <a:off x="8763000" y="3619500"/>
-            <a:ext cx="2095499" cy="400050"/>
-          </a:xfrm>
-          <a:prstGeom prst="roundRect">
-            <a:avLst/>
-          </a:prstGeom>
-          <a:solidFill>
-            <a:srgbClr val="168B82"/>
-          </a:solidFill>
-          <a:ln>
-            <a:noFill/>
-          </a:ln>
-        </p:spPr>
-        <p:style>
-          <a:lnRef idx="1">
-            <a:schemeClr val="accent1"/>
-          </a:lnRef>
-          <a:fillRef idx="3">
-            <a:schemeClr val="accent1"/>
-          </a:fillRef>
-          <a:effectRef idx="2">
-            <a:schemeClr val="accent1"/>
-          </a:effectRef>
-          <a:fontRef idx="minor">
-            <a:schemeClr val="lt1"/>
-          </a:fontRef>
-        </p:style>
-        <p:txBody>
-          <a:bodyPr rtlCol="0" anchor="ctr" wrap="none" lIns="0" tIns="0" rIns="0" bIns="0"/>
+          <a:bodyPr rtlCol="0" anchor="ctr" lIns="152400" tIns="152400"/>
           <a:lstStyle/>
           <a:p>
             <a:pPr algn="ctr">
-              <a:defRPr sz="1425" b="1">
-                <a:solidFill>
-                  <a:srgbClr val="FFFFFF"/>
-                </a:solidFill>
-                <a:latin typeface="프리텐다드"/>
-              </a:defRPr>
-            </a:pPr>
-            <a:r>
-              <a:t>AI 건강도우미</a:t>
-            </a:r>
-          </a:p>
-        </p:txBody>
-      </p:sp>
-      <p:sp>
-        <p:nvSpPr>
-          <p:cNvPr id="15" name="TextBox 14"/>
+              <a:defRPr sz="1350" b="1">
+                <a:solidFill>
+                  <a:srgbClr val="168B82"/>
+                </a:solidFill>
+                <a:latin typeface="프리텐다드"/>
+              </a:defRPr>
+            </a:pPr>
+            <a:r>
+              <a:t>[아키텍처 불변식] Zero Storage</a:t>
+            </a:r>
+          </a:p>
+          <a:p>
+            <a:pPr>
+              <a:defRPr sz="1200">
+                <a:solidFill>
+                  <a:srgbClr val="17263A"/>
+                </a:solidFill>
+                <a:latin typeface="프리텐다드"/>
+              </a:defRPr>
+            </a:pPr>
+            <a:r>
+              <a:t>'별도 DICOM 지속 저장 없음!' 원본 영상 파일은 클라우드로 올라오지 않으며 오직 동의 메타데이터와 감사로그만 보관됩니다.</a:t>
+            </a:r>
+          </a:p>
+        </p:txBody>
+      </p:sp>
+      <p:sp>
+        <p:nvSpPr>
+          <p:cNvPr id="19" name="TextBox 18"/>
           <p:cNvSpPr txBox="1"/>
           <p:nvPr/>
         </p:nvSpPr>
         <p:spPr>
           <a:xfrm>
-            <a:off x="11049000" y="3600450"/>
-            <a:ext cx="6000750" cy="428625"/>
+            <a:off x="12096750" y="6810375"/>
+            <a:ext cx="4876800" cy="2190750"/>
           </a:xfrm>
           <a:prstGeom prst="rect">
             <a:avLst/>
@@ -12834,9 +17385,13 @@
             <a:spAutoFit/>
           </a:bodyPr>
           <a:lstStyle/>
-          <a:p>
-            <a:pPr>
-              <a:defRPr sz="1950" b="1">
+          <a:p/>
+          <a:p>
+            <a:pPr>
+              <a:spcAft>
+                <a:spcPts val="800"/>
+              </a:spcAft>
+              <a:defRPr sz="1387">
                 <a:solidFill>
                   <a:srgbClr val="17263A"/>
                 </a:solidFill>
@@ -12844,52 +17399,15 @@
               </a:defRPr>
             </a:pPr>
             <a:r>
-              <a:t>혈청 알파태아단백(AFP) 검사 질의응답 연동</a:t>
-            </a:r>
-          </a:p>
-        </p:txBody>
-      </p:sp>
-      <p:sp>
-        <p:nvSpPr>
-          <p:cNvPr id="16" name="TextBox 15"/>
-          <p:cNvSpPr txBox="1"/>
-          <p:nvPr/>
-        </p:nvSpPr>
-        <p:spPr>
-          <a:xfrm>
-            <a:off x="8763000" y="4238625"/>
-            <a:ext cx="8191500" cy="4762500"/>
-          </a:xfrm>
-          <a:prstGeom prst="rect">
-            <a:avLst/>
-          </a:prstGeom>
-          <a:noFill/>
-        </p:spPr>
-        <p:txBody>
-          <a:bodyPr wrap="none">
-            <a:spAutoFit/>
-          </a:bodyPr>
-          <a:lstStyle/>
-          <a:p/>
-          <a:p>
-            <a:pPr>
-              <a:defRPr sz="1575" b="1">
-                <a:solidFill>
-                  <a:srgbClr val="168B82"/>
-                </a:solidFill>
-                <a:latin typeface="프리텐다드"/>
-              </a:defRPr>
-            </a:pPr>
-            <a:r>
-              <a:t>✔  쉬운 의학 개념 해설</a:t>
+              <a:t>•  PostgreSQL에 최소 메타데이터(동의 상태, Study UID)만 기록</a:t>
             </a:r>
           </a:p>
           <a:p>
             <a:pPr>
               <a:spcAft>
-                <a:spcPts val="1000"/>
+                <a:spcPts val="800"/>
               </a:spcAft>
-              <a:defRPr sz="1350">
+              <a:defRPr sz="1387">
                 <a:solidFill>
                   <a:srgbClr val="17263A"/>
                 </a:solidFill>
@@ -12897,28 +17415,15 @@
               </a:defRPr>
             </a:pPr>
             <a:r>
-              <a:t>     AFP 정상 수치와 간암/간경화 선별검사 목적을 비임상 환자 언어로 해설</a:t>
-            </a:r>
-          </a:p>
-          <a:p>
-            <a:pPr>
-              <a:defRPr sz="1575" b="1">
-                <a:solidFill>
-                  <a:srgbClr val="168B82"/>
-                </a:solidFill>
-                <a:latin typeface="프리텐다드"/>
-              </a:defRPr>
-            </a:pPr>
-            <a:r>
-              <a:t>✔  추천 질문 스튜디오</a:t>
+              <a:t>•  Azure Key Vault의 wrap/unwrap 키 보호로 데이터 무결성 보장</a:t>
             </a:r>
           </a:p>
           <a:p>
             <a:pPr>
               <a:spcAft>
-                <a:spcPts val="1000"/>
+                <a:spcPts val="800"/>
               </a:spcAft>
-              <a:defRPr sz="1350">
+              <a:defRPr sz="1387">
                 <a:solidFill>
                   <a:srgbClr val="17263A"/>
                 </a:solidFill>
@@ -12926,94 +17431,7 @@
               </a:defRPr>
             </a:pPr>
             <a:r>
-              <a:t>     'AFP 검사가 뭔가요?', '초음파와 차이점', '주의사항' 등 원클릭 퀵 질의</a:t>
-            </a:r>
-          </a:p>
-          <a:p>
-            <a:pPr>
-              <a:defRPr sz="1575" b="1">
-                <a:solidFill>
-                  <a:srgbClr val="168B82"/>
-                </a:solidFill>
-                <a:latin typeface="프리텐다드"/>
-              </a:defRPr>
-            </a:pPr>
-            <a:r>
-              <a:t>✔  의사 상담 리허설 박스</a:t>
-            </a:r>
-          </a:p>
-          <a:p>
-            <a:pPr>
-              <a:spcAft>
-                <a:spcPts val="1000"/>
-              </a:spcAft>
-              <a:defRPr sz="1350">
-                <a:solidFill>
-                  <a:srgbClr val="17263A"/>
-                </a:solidFill>
-                <a:latin typeface="프리텐다드"/>
-              </a:defRPr>
-            </a:pPr>
-            <a:r>
-              <a:t>     진료실에서 주치의에게 물어봐야 할 맞춤 질문 3가지를 자동 정리</a:t>
-            </a:r>
-          </a:p>
-          <a:p>
-            <a:pPr>
-              <a:defRPr sz="1575" b="1">
-                <a:solidFill>
-                  <a:srgbClr val="168B82"/>
-                </a:solidFill>
-                <a:latin typeface="프리텐다드"/>
-              </a:defRPr>
-            </a:pPr>
-            <a:r>
-              <a:t>✔  공인 학술 출처 투명 표기</a:t>
-            </a:r>
-          </a:p>
-          <a:p>
-            <a:pPr>
-              <a:spcAft>
-                <a:spcPts val="1000"/>
-              </a:spcAft>
-              <a:defRPr sz="1350">
-                <a:solidFill>
-                  <a:srgbClr val="17263A"/>
-                </a:solidFill>
-                <a:latin typeface="프리텐다드"/>
-              </a:defRPr>
-            </a:pPr>
-            <a:r>
-              <a:t>     MedlinePlus 및 간학회 가이드라인 출처 링크를 명확히 제시하여 신뢰 확보</a:t>
-            </a:r>
-          </a:p>
-          <a:p>
-            <a:pPr>
-              <a:defRPr sz="1575" b="1">
-                <a:solidFill>
-                  <a:srgbClr val="168B82"/>
-                </a:solidFill>
-                <a:latin typeface="프리텐다드"/>
-              </a:defRPr>
-            </a:pPr>
-            <a:r>
-              <a:t>✔  한국어 형태소 전처리</a:t>
-            </a:r>
-          </a:p>
-          <a:p>
-            <a:pPr>
-              <a:spcAft>
-                <a:spcPts val="1000"/>
-              </a:spcAft>
-              <a:defRPr sz="1350">
-                <a:solidFill>
-                  <a:srgbClr val="17263A"/>
-                </a:solidFill>
-                <a:latin typeface="프리텐다드"/>
-              </a:defRPr>
-            </a:pPr>
-            <a:r>
-              <a:t>     체언과 조사를 분리하여 'AFP란', '초음파에 대해서' 등 구어체 질문 완벽 처리</a:t>
+              <a:t>•  환자에게 접수용 고유 QR 공유 티켓 발급</a:t>
             </a:r>
           </a:p>
         </p:txBody>
@@ -13023,6 +17441,13 @@
   <p:clrMapOvr>
     <a:masterClrMapping/>
   </p:clrMapOvr>
+  <p:transition xmlns:p15="http://schemas.microsoft.com/office/powerpoint/2012/main">
+    <p:extLst>
+      <p:ext uri="{EFA19261-F742-4948-AE17-10779776E6A2}">
+        <p15:morph option="byObject"/>
+      </p:ext>
+    </p:extLst>
+  </p:transition>
 </p:sld>
 </file>
 
@@ -13182,7 +17607,7 @@
           <a:noFill/>
         </p:spPr>
         <p:txBody>
-          <a:bodyPr wrap="square" lIns="0" tIns="0" rIns="0" bIns="0">
+          <a:bodyPr wrap="square">
             <a:spAutoFit/>
           </a:bodyPr>
           <a:lstStyle/>
@@ -13196,7 +17621,7 @@
               </a:defRPr>
             </a:pPr>
             <a:r>
-              <a:t>07. LIVE SERVICE · CLINICIAN VIEWER</a:t>
+              <a:t>❹ 의료진 QR 접수 및 요청 시작</a:t>
             </a:r>
           </a:p>
         </p:txBody>
@@ -13218,13 +17643,13 @@
           <a:noFill/>
         </p:spPr>
         <p:txBody>
-          <a:bodyPr wrap="square" lIns="0" tIns="0" rIns="0" bIns="0">
+          <a:bodyPr wrap="square">
             <a:spAutoFit/>
           </a:bodyPr>
           <a:lstStyle/>
           <a:p>
             <a:pPr>
-              <a:defRPr sz="3900" b="1">
+              <a:defRPr sz="3750" b="1">
                 <a:solidFill>
                   <a:srgbClr val="17263A"/>
                 </a:solidFill>
@@ -13232,7 +17657,7 @@
               </a:defRPr>
             </a:pPr>
             <a:r>
-              <a:t>5분 단기 토큰 기반 700 Slices 복부 CT 뷰어</a:t>
+              <a:t>❹ 의료진 QR 접수 및 요청 시작</a:t>
             </a:r>
           </a:p>
         </p:txBody>
@@ -13254,7 +17679,7 @@
           <a:noFill/>
         </p:spPr>
         <p:txBody>
-          <a:bodyPr wrap="square" lIns="0" tIns="0" rIns="0" bIns="0">
+          <a:bodyPr wrap="square">
             <a:spAutoFit/>
           </a:bodyPr>
           <a:lstStyle/>
@@ -13268,7 +17693,7 @@
               </a:defRPr>
             </a:pPr>
             <a:r>
-              <a:t>로컬 PC 무단 다운로드 차단, 5분 유효 단기 토큰 기반 WADO-RS 프레임 지연 스트리밍</a:t>
+              <a:t>의료진 전용 웹에서 환자 QR 접수 후 안전한 L4 중계 터널링 통신</a:t>
             </a:r>
           </a:p>
         </p:txBody>
@@ -13333,7 +17758,7 @@
           <a:noFill/>
         </p:spPr>
         <p:txBody>
-          <a:bodyPr wrap="none" lIns="0" tIns="0" rIns="0" bIns="0">
+          <a:bodyPr wrap="none">
             <a:spAutoFit/>
           </a:bodyPr>
           <a:lstStyle/>
@@ -13347,7 +17772,7 @@
               </a:defRPr>
             </a:pPr>
             <a:r>
-              <a:t>Medi Q  /  합성 데이터 · 비임상 기술 PoC  ·  5분 핵심 피칭</a:t>
+              <a:t>Medi Q  /  합성 데이터 · 비임상 기술 PoC  ·  아키텍처 모션 워크스루</a:t>
             </a:r>
           </a:p>
         </p:txBody>
@@ -13369,7 +17794,7 @@
           <a:noFill/>
         </p:spPr>
         <p:txBody>
-          <a:bodyPr wrap="none" lIns="0" tIns="0" rIns="0" bIns="0">
+          <a:bodyPr wrap="none">
             <a:spAutoFit/>
           </a:bodyPr>
           <a:lstStyle/>
@@ -13383,7 +17808,7 @@
               </a:defRPr>
             </a:pPr>
             <a:r>
-              <a:t>08  /  10</a:t>
+              <a:t>08  /  16</a:t>
             </a:r>
           </a:p>
         </p:txBody>
@@ -13397,7 +17822,7 @@
         <p:spPr>
           <a:xfrm>
             <a:off x="1028700" y="3333750"/>
-            <a:ext cx="9906000" cy="5810250"/>
+            <a:ext cx="10477500" cy="5905500"/>
           </a:xfrm>
           <a:prstGeom prst="roundRect">
             <a:avLst/>
@@ -13435,7 +17860,7 @@
       </p:sp>
       <p:pic>
         <p:nvPicPr>
-          <p:cNvPr id="12" name="Picture 11" descr="07_clinician_dicom_viewer.png"/>
+          <p:cNvPr id="12" name="Picture 11" descr="mediq_architecture_flow.png"/>
           <p:cNvPicPr>
             <a:picLocks noChangeAspect="1"/>
           </p:cNvPicPr>
@@ -13449,8 +17874,8 @@
         </p:blipFill>
         <p:spPr>
           <a:xfrm>
-            <a:off x="1219200" y="3524250"/>
-            <a:ext cx="9525000" cy="6779121"/>
+            <a:off x="1123950" y="3429000"/>
+            <a:ext cx="10287000" cy="5789514"/>
           </a:xfrm>
           <a:prstGeom prst="rect">
             <a:avLst/>
@@ -13459,14 +17884,57 @@
       </p:pic>
       <p:sp>
         <p:nvSpPr>
-          <p:cNvPr id="13" name="Rounded Rectangle 12"/>
+          <p:cNvPr id="13" name="Rectangle 12"/>
           <p:cNvSpPr/>
           <p:nvPr/>
         </p:nvSpPr>
         <p:spPr>
           <a:xfrm>
-            <a:off x="11239500" y="3333750"/>
-            <a:ext cx="6019800" cy="5810250"/>
+            <a:off x="4507831" y="6628306"/>
+            <a:ext cx="1599653" cy="615251"/>
+          </a:xfrm>
+          <a:prstGeom prst="rect">
+            <a:avLst/>
+          </a:prstGeom>
+          <a:noFill/>
+          <a:ln w="44450">
+            <a:solidFill>
+              <a:srgbClr val="DCA83D"/>
+            </a:solidFill>
+          </a:ln>
+        </p:spPr>
+        <p:style>
+          <a:lnRef idx="1">
+            <a:schemeClr val="accent1"/>
+          </a:lnRef>
+          <a:fillRef idx="3">
+            <a:schemeClr val="accent1"/>
+          </a:fillRef>
+          <a:effectRef idx="2">
+            <a:schemeClr val="accent1"/>
+          </a:effectRef>
+          <a:fontRef idx="minor">
+            <a:schemeClr val="lt1"/>
+          </a:fontRef>
+        </p:style>
+        <p:txBody>
+          <a:bodyPr rtlCol="0" anchor="ctr"/>
+          <a:lstStyle/>
+          <a:p>
+            <a:pPr algn="ctr"/>
+          </a:p>
+        </p:txBody>
+      </p:sp>
+      <p:sp>
+        <p:nvSpPr>
+          <p:cNvPr id="14" name="Rounded Rectangle 13"/>
+          <p:cNvSpPr/>
+          <p:nvPr/>
+        </p:nvSpPr>
+        <p:spPr>
+          <a:xfrm>
+            <a:off x="11811000" y="3333750"/>
+            <a:ext cx="5448300" cy="5905500"/>
           </a:xfrm>
           <a:prstGeom prst="roundRect">
             <a:avLst/>
@@ -13504,20 +17972,20 @@
       </p:sp>
       <p:sp>
         <p:nvSpPr>
-          <p:cNvPr id="14" name="Rounded Rectangle 13"/>
+          <p:cNvPr id="15" name="Rounded Rectangle 14"/>
           <p:cNvSpPr/>
           <p:nvPr/>
         </p:nvSpPr>
         <p:spPr>
           <a:xfrm>
-            <a:off x="11525250" y="3619500"/>
-            <a:ext cx="1905000" cy="400050"/>
+            <a:off x="12096750" y="3619500"/>
+            <a:ext cx="1714500" cy="400050"/>
           </a:xfrm>
           <a:prstGeom prst="roundRect">
             <a:avLst/>
           </a:prstGeom>
           <a:solidFill>
-            <a:srgbClr val="2F68B5"/>
+            <a:srgbClr val="DCA83D"/>
           </a:solidFill>
           <a:ln>
             <a:noFill/>
@@ -13538,7 +18006,7 @@
           </a:fontRef>
         </p:style>
         <p:txBody>
-          <a:bodyPr rtlCol="0" anchor="ctr" wrap="none" lIns="0" tIns="0" rIns="0" bIns="0"/>
+          <a:bodyPr rtlCol="0" anchor="ctr"/>
           <a:lstStyle/>
           <a:p>
             <a:pPr algn="ctr">
@@ -13550,21 +18018,21 @@
               </a:defRPr>
             </a:pPr>
             <a:r>
-              <a:t>의료진 뷰어</a:t>
-            </a:r>
-          </a:p>
-        </p:txBody>
-      </p:sp>
-      <p:sp>
-        <p:nvSpPr>
-          <p:cNvPr id="15" name="TextBox 14"/>
+              <a:t>STEP 04 / 08</a:t>
+            </a:r>
+          </a:p>
+        </p:txBody>
+      </p:sp>
+      <p:sp>
+        <p:nvSpPr>
+          <p:cNvPr id="16" name="TextBox 15"/>
           <p:cNvSpPr txBox="1"/>
           <p:nvPr/>
         </p:nvSpPr>
         <p:spPr>
           <a:xfrm>
-            <a:off x="13620750" y="3600450"/>
-            <a:ext cx="3429000" cy="428625"/>
+            <a:off x="12096750" y="4190999"/>
+            <a:ext cx="4876800" cy="476250"/>
           </a:xfrm>
           <a:prstGeom prst="rect">
             <a:avLst/>
@@ -13578,7 +18046,7 @@
           <a:lstStyle/>
           <a:p>
             <a:pPr>
-              <a:defRPr sz="1875" b="1">
+              <a:defRPr sz="2025" b="1">
                 <a:solidFill>
                   <a:srgbClr val="17263A"/>
                 </a:solidFill>
@@ -13586,21 +18054,21 @@
               </a:defRPr>
             </a:pPr>
             <a:r>
-              <a:t>700 Slices 무지연 렌더링</a:t>
-            </a:r>
-          </a:p>
-        </p:txBody>
-      </p:sp>
-      <p:sp>
-        <p:nvSpPr>
-          <p:cNvPr id="16" name="TextBox 15"/>
+              <a:t>의료진 웹 &amp; TCP L4 중계</a:t>
+            </a:r>
+          </a:p>
+        </p:txBody>
+      </p:sp>
+      <p:sp>
+        <p:nvSpPr>
+          <p:cNvPr id="17" name="TextBox 16"/>
           <p:cNvSpPr txBox="1"/>
           <p:nvPr/>
         </p:nvSpPr>
         <p:spPr>
           <a:xfrm>
-            <a:off x="11525250" y="4238625"/>
-            <a:ext cx="5429250" cy="4762500"/>
+            <a:off x="12096750" y="4714875"/>
+            <a:ext cx="4876800" cy="714375"/>
           </a:xfrm>
           <a:prstGeom prst="rect">
             <a:avLst/>
@@ -13612,26 +18080,117 @@
             <a:spAutoFit/>
           </a:bodyPr>
           <a:lstStyle/>
+          <a:p>
+            <a:pPr>
+              <a:defRPr sz="1425">
+                <a:solidFill>
+                  <a:srgbClr val="53657B"/>
+                </a:solidFill>
+                <a:latin typeface="프리텐다드"/>
+              </a:defRPr>
+            </a:pPr>
+            <a:r>
+              <a:t>B병원 진료실 의사가 환자의 QR 티켓을 스캔하여 영상 조회 요청을 시작하며, L4 중계로 안전하게 전송됩니다.</a:t>
+            </a:r>
+          </a:p>
+        </p:txBody>
+      </p:sp>
+      <p:sp>
+        <p:nvSpPr>
+          <p:cNvPr id="18" name="Rounded Rectangle 17"/>
+          <p:cNvSpPr/>
+          <p:nvPr/>
+        </p:nvSpPr>
+        <p:spPr>
+          <a:xfrm>
+            <a:off x="12096750" y="5524500"/>
+            <a:ext cx="4876800" cy="1143000"/>
+          </a:xfrm>
+          <a:prstGeom prst="roundRect">
+            <a:avLst/>
+          </a:prstGeom>
+          <a:solidFill>
+            <a:srgbClr val="FFFFFF"/>
+          </a:solidFill>
+          <a:ln w="19050">
+            <a:solidFill>
+              <a:srgbClr val="DCA83D"/>
+            </a:solidFill>
+          </a:ln>
+        </p:spPr>
+        <p:style>
+          <a:lnRef idx="1">
+            <a:schemeClr val="accent1"/>
+          </a:lnRef>
+          <a:fillRef idx="3">
+            <a:schemeClr val="accent1"/>
+          </a:fillRef>
+          <a:effectRef idx="2">
+            <a:schemeClr val="accent1"/>
+          </a:effectRef>
+          <a:fontRef idx="minor">
+            <a:schemeClr val="lt1"/>
+          </a:fontRef>
+        </p:style>
+        <p:txBody>
+          <a:bodyPr rtlCol="0" anchor="ctr" lIns="152400" tIns="152400"/>
+          <a:lstStyle/>
+          <a:p>
+            <a:pPr algn="ctr">
+              <a:defRPr sz="1350" b="1">
+                <a:solidFill>
+                  <a:srgbClr val="DCA83D"/>
+                </a:solidFill>
+                <a:latin typeface="프리텐다드"/>
+              </a:defRPr>
+            </a:pPr>
+            <a:r>
+              <a:t>[보안 원칙] QR은 단순 접수 수단</a:t>
+            </a:r>
+          </a:p>
+          <a:p>
+            <a:pPr>
+              <a:defRPr sz="1200">
+                <a:solidFill>
+                  <a:srgbClr val="17263A"/>
+                </a:solidFill>
+                <a:latin typeface="프리텐다드"/>
+              </a:defRPr>
+            </a:pPr>
+            <a:r>
+              <a:t>QR 코드 자체에 영상이나 무제한 권한이 포함되어 있지 않으며, 반드시 백엔드 인가 엔진의 재검증을 거쳐야 합니다.</a:t>
+            </a:r>
+          </a:p>
+        </p:txBody>
+      </p:sp>
+      <p:sp>
+        <p:nvSpPr>
+          <p:cNvPr id="19" name="TextBox 18"/>
+          <p:cNvSpPr txBox="1"/>
+          <p:nvPr/>
+        </p:nvSpPr>
+        <p:spPr>
+          <a:xfrm>
+            <a:off x="12096750" y="6810375"/>
+            <a:ext cx="4876800" cy="2190750"/>
+          </a:xfrm>
+          <a:prstGeom prst="rect">
+            <a:avLst/>
+          </a:prstGeom>
+          <a:noFill/>
+        </p:spPr>
+        <p:txBody>
+          <a:bodyPr wrap="none">
+            <a:spAutoFit/>
+          </a:bodyPr>
+          <a:lstStyle/>
           <a:p/>
           <a:p>
             <a:pPr>
-              <a:defRPr sz="1575" b="1">
-                <a:solidFill>
-                  <a:srgbClr val="2F68B5"/>
-                </a:solidFill>
-                <a:latin typeface="프리텐다드"/>
-              </a:defRPr>
-            </a:pPr>
-            <a:r>
-              <a:t>✔  WADO-RS 스트리밍</a:t>
-            </a:r>
-          </a:p>
-          <a:p>
-            <a:pPr>
               <a:spcAft>
-                <a:spcPts val="1000"/>
+                <a:spcPts val="800"/>
               </a:spcAft>
-              <a:defRPr sz="1350">
+              <a:defRPr sz="1387">
                 <a:solidFill>
                   <a:srgbClr val="17263A"/>
                 </a:solidFill>
@@ -13639,28 +18198,15 @@
               </a:defRPr>
             </a:pPr>
             <a:r>
-              <a:t>     700장 대용량 CT를 다운로드 없이 프레임 단위 초고속 렌더링</a:t>
-            </a:r>
-          </a:p>
-          <a:p>
-            <a:pPr>
-              <a:defRPr sz="1575" b="1">
-                <a:solidFill>
-                  <a:srgbClr val="2F68B5"/>
-                </a:solidFill>
-                <a:latin typeface="프리텐다드"/>
-              </a:defRPr>
-            </a:pPr>
-            <a:r>
-              <a:t>✔  정밀 판독 도구</a:t>
+              <a:t>•  의료진 업무망과 외부 인터넷 간 L4 중계 및 TLS 터널링 보호</a:t>
             </a:r>
           </a:p>
           <a:p>
             <a:pPr>
               <a:spcAft>
-                <a:spcPts val="1000"/>
+                <a:spcPts val="800"/>
               </a:spcAft>
-              <a:defRPr sz="1350">
+              <a:defRPr sz="1387">
                 <a:solidFill>
                   <a:srgbClr val="17263A"/>
                 </a:solidFill>
@@ -13668,28 +18214,15 @@
               </a:defRPr>
             </a:pPr>
             <a:r>
-              <a:t>     간 병변 십자선, 다중 단면 연속 스크롤, 윈도우 레벨링, 시리즈 썸네일</a:t>
-            </a:r>
-          </a:p>
-          <a:p>
-            <a:pPr>
-              <a:defRPr sz="1575" b="1">
-                <a:solidFill>
-                  <a:srgbClr val="2F68B5"/>
-                </a:solidFill>
-                <a:latin typeface="프리텐다드"/>
-              </a:defRPr>
-            </a:pPr>
-            <a:r>
-              <a:t>✔  5분 단기 서명 토큰</a:t>
+              <a:t>•  Control Plane API 권한 위임 없이 접수 요청만 안전 전달</a:t>
             </a:r>
           </a:p>
           <a:p>
             <a:pPr>
               <a:spcAft>
-                <a:spcPts val="1000"/>
+                <a:spcPts val="800"/>
               </a:spcAft>
-              <a:defRPr sz="1350">
+              <a:defRPr sz="1387">
                 <a:solidFill>
                   <a:srgbClr val="17263A"/>
                 </a:solidFill>
@@ -13697,65 +18230,7 @@
               </a:defRPr>
             </a:pPr>
             <a:r>
-              <a:t>     시간 경과 시 세션 자동 만료로 장기 토큰 탈취 위험 원천 차단</a:t>
-            </a:r>
-          </a:p>
-          <a:p>
-            <a:pPr>
-              <a:defRPr sz="1575" b="1">
-                <a:solidFill>
-                  <a:srgbClr val="2F68B5"/>
-                </a:solidFill>
-                <a:latin typeface="프리텐다드"/>
-              </a:defRPr>
-            </a:pPr>
-            <a:r>
-              <a:t>✔  로컬 다운로드 금지</a:t>
-            </a:r>
-          </a:p>
-          <a:p>
-            <a:pPr>
-              <a:spcAft>
-                <a:spcPts val="1000"/>
-              </a:spcAft>
-              <a:defRPr sz="1350">
-                <a:solidFill>
-                  <a:srgbClr val="17263A"/>
-                </a:solidFill>
-                <a:latin typeface="프리텐다드"/>
-              </a:defRPr>
-            </a:pPr>
-            <a:r>
-              <a:t>     의료진 PC에 원본 DICOM 파일 무단 저장을 엄격히 차단</a:t>
-            </a:r>
-          </a:p>
-          <a:p>
-            <a:pPr>
-              <a:defRPr sz="1575" b="1">
-                <a:solidFill>
-                  <a:srgbClr val="2F68B5"/>
-                </a:solidFill>
-                <a:latin typeface="프리텐다드"/>
-              </a:defRPr>
-            </a:pPr>
-            <a:r>
-              <a:t>✔  DICOMweb 표준 준수</a:t>
-            </a:r>
-          </a:p>
-          <a:p>
-            <a:pPr>
-              <a:spcAft>
-                <a:spcPts val="1000"/>
-              </a:spcAft>
-              <a:defRPr sz="1350">
-                <a:solidFill>
-                  <a:srgbClr val="17263A"/>
-                </a:solidFill>
-                <a:latin typeface="프리텐다드"/>
-              </a:defRPr>
-            </a:pPr>
-            <a:r>
-              <a:t>     QIDO-RS / WADO-RS 표준으로 기존 병원 PACS와 완벽 호환</a:t>
+              <a:t>•  의사 면허 및 소속 병원 일치 여부 1차 확인</a:t>
             </a:r>
           </a:p>
         </p:txBody>
@@ -13765,6 +18240,13 @@
   <p:clrMapOvr>
     <a:masterClrMapping/>
   </p:clrMapOvr>
+  <p:transition xmlns:p15="http://schemas.microsoft.com/office/powerpoint/2012/main">
+    <p:extLst>
+      <p:ext uri="{EFA19261-F742-4948-AE17-10779776E6A2}">
+        <p15:morph option="byObject"/>
+      </p:ext>
+    </p:extLst>
+  </p:transition>
 </p:sld>
 </file>
 
@@ -13924,7 +18406,7 @@
           <a:noFill/>
         </p:spPr>
         <p:txBody>
-          <a:bodyPr wrap="square" lIns="0" tIns="0" rIns="0" bIns="0">
+          <a:bodyPr wrap="square">
             <a:spAutoFit/>
           </a:bodyPr>
           <a:lstStyle/>
@@ -13938,7 +18420,7 @@
               </a:defRPr>
             </a:pPr>
             <a:r>
-              <a:t>08. LIVE SERVICE · SECURITY CONSOLE</a:t>
+              <a:t>❺ ❻ 동의 조회 &amp; ABAC 11단계 인가</a:t>
             </a:r>
           </a:p>
         </p:txBody>
@@ -13960,13 +18442,13 @@
           <a:noFill/>
         </p:spPr>
         <p:txBody>
-          <a:bodyPr wrap="square" lIns="0" tIns="0" rIns="0" bIns="0">
+          <a:bodyPr wrap="square">
             <a:spAutoFit/>
           </a:bodyPr>
           <a:lstStyle/>
           <a:p>
             <a:pPr>
-              <a:defRPr sz="3900" b="1">
+              <a:defRPr sz="3750" b="1">
                 <a:solidFill>
                   <a:srgbClr val="17263A"/>
                 </a:solidFill>
@@ -13974,7 +18456,7 @@
               </a:defRPr>
             </a:pPr>
             <a:r>
-              <a:t>모든 접근을 불변 추적하는 통합 보안 관제 콘솔</a:t>
+              <a:t>❺ ❻ 동의 조회 &amp; ABAC 11단계 인가</a:t>
             </a:r>
           </a:p>
         </p:txBody>
@@ -13996,7 +18478,7 @@
           <a:noFill/>
         </p:spPr>
         <p:txBody>
-          <a:bodyPr wrap="square" lIns="0" tIns="0" rIns="0" bIns="0">
+          <a:bodyPr wrap="square">
             <a:spAutoFit/>
           </a:bodyPr>
           <a:lstStyle/>
@@ -14010,7 +18492,7 @@
               </a:defRPr>
             </a:pPr>
             <a:r>
-              <a:t>토큰 발급, WAF 규칙 이벤트, Key Vault 서명, 비정상 접근 시도 실시간 모니터링</a:t>
+              <a:t>11개 조건 교집합 전수 검증 통과 시 5분 유효 단기 HMAC 서명 토큰 발급</a:t>
             </a:r>
           </a:p>
         </p:txBody>
@@ -14075,7 +18557,7 @@
           <a:noFill/>
         </p:spPr>
         <p:txBody>
-          <a:bodyPr wrap="none" lIns="0" tIns="0" rIns="0" bIns="0">
+          <a:bodyPr wrap="none">
             <a:spAutoFit/>
           </a:bodyPr>
           <a:lstStyle/>
@@ -14089,7 +18571,7 @@
               </a:defRPr>
             </a:pPr>
             <a:r>
-              <a:t>Medi Q  /  합성 데이터 · 비임상 기술 PoC  ·  5분 핵심 피칭</a:t>
+              <a:t>Medi Q  /  합성 데이터 · 비임상 기술 PoC  ·  아키텍처 모션 워크스루</a:t>
             </a:r>
           </a:p>
         </p:txBody>
@@ -14111,7 +18593,7 @@
           <a:noFill/>
         </p:spPr>
         <p:txBody>
-          <a:bodyPr wrap="none" lIns="0" tIns="0" rIns="0" bIns="0">
+          <a:bodyPr wrap="none">
             <a:spAutoFit/>
           </a:bodyPr>
           <a:lstStyle/>
@@ -14125,7 +18607,7 @@
               </a:defRPr>
             </a:pPr>
             <a:r>
-              <a:t>09  /  10</a:t>
+              <a:t>09  /  16</a:t>
             </a:r>
           </a:p>
         </p:txBody>
@@ -14139,7 +18621,7 @@
         <p:spPr>
           <a:xfrm>
             <a:off x="1028700" y="3333750"/>
-            <a:ext cx="9144000" cy="5810250"/>
+            <a:ext cx="10477500" cy="5905500"/>
           </a:xfrm>
           <a:prstGeom prst="roundRect">
             <a:avLst/>
@@ -14177,7 +18659,7 @@
       </p:sp>
       <p:pic>
         <p:nvPicPr>
-          <p:cNvPr id="12" name="Picture 11" descr="08_security_audit_console.png"/>
+          <p:cNvPr id="12" name="Picture 11" descr="mediq_architecture_flow.png"/>
           <p:cNvPicPr>
             <a:picLocks noChangeAspect="1"/>
           </p:cNvPicPr>
@@ -14191,8 +18673,8 @@
         </p:blipFill>
         <p:spPr>
           <a:xfrm>
-            <a:off x="1219200" y="3524250"/>
-            <a:ext cx="8763000" cy="13383491"/>
+            <a:off x="1123950" y="3429000"/>
+            <a:ext cx="10287000" cy="5789514"/>
           </a:xfrm>
           <a:prstGeom prst="rect">
             <a:avLst/>
@@ -14201,14 +18683,57 @@
       </p:pic>
       <p:sp>
         <p:nvSpPr>
-          <p:cNvPr id="13" name="Rounded Rectangle 12"/>
+          <p:cNvPr id="13" name="Rectangle 12"/>
           <p:cNvSpPr/>
           <p:nvPr/>
         </p:nvSpPr>
         <p:spPr>
           <a:xfrm>
-            <a:off x="10477500" y="3333750"/>
-            <a:ext cx="6781800" cy="5810250"/>
+            <a:off x="6045959" y="5520854"/>
+            <a:ext cx="1045927" cy="1168977"/>
+          </a:xfrm>
+          <a:prstGeom prst="rect">
+            <a:avLst/>
+          </a:prstGeom>
+          <a:noFill/>
+          <a:ln w="44450">
+            <a:solidFill>
+              <a:srgbClr val="DCA83D"/>
+            </a:solidFill>
+          </a:ln>
+        </p:spPr>
+        <p:style>
+          <a:lnRef idx="1">
+            <a:schemeClr val="accent1"/>
+          </a:lnRef>
+          <a:fillRef idx="3">
+            <a:schemeClr val="accent1"/>
+          </a:fillRef>
+          <a:effectRef idx="2">
+            <a:schemeClr val="accent1"/>
+          </a:effectRef>
+          <a:fontRef idx="minor">
+            <a:schemeClr val="lt1"/>
+          </a:fontRef>
+        </p:style>
+        <p:txBody>
+          <a:bodyPr rtlCol="0" anchor="ctr"/>
+          <a:lstStyle/>
+          <a:p>
+            <a:pPr algn="ctr"/>
+          </a:p>
+        </p:txBody>
+      </p:sp>
+      <p:sp>
+        <p:nvSpPr>
+          <p:cNvPr id="14" name="Rounded Rectangle 13"/>
+          <p:cNvSpPr/>
+          <p:nvPr/>
+        </p:nvSpPr>
+        <p:spPr>
+          <a:xfrm>
+            <a:off x="11811000" y="3333750"/>
+            <a:ext cx="5448300" cy="5905500"/>
           </a:xfrm>
           <a:prstGeom prst="roundRect">
             <a:avLst/>
@@ -14246,20 +18771,20 @@
       </p:sp>
       <p:sp>
         <p:nvSpPr>
-          <p:cNvPr id="14" name="Rounded Rectangle 13"/>
+          <p:cNvPr id="15" name="Rounded Rectangle 14"/>
           <p:cNvSpPr/>
           <p:nvPr/>
         </p:nvSpPr>
         <p:spPr>
           <a:xfrm>
-            <a:off x="10763250" y="3619500"/>
-            <a:ext cx="1905000" cy="400050"/>
+            <a:off x="12096750" y="3619500"/>
+            <a:ext cx="1714500" cy="400050"/>
           </a:xfrm>
           <a:prstGeom prst="roundRect">
             <a:avLst/>
           </a:prstGeom>
           <a:solidFill>
-            <a:srgbClr val="C64A4A"/>
+            <a:srgbClr val="DCA83D"/>
           </a:solidFill>
           <a:ln>
             <a:noFill/>
@@ -14280,7 +18805,7 @@
           </a:fontRef>
         </p:style>
         <p:txBody>
-          <a:bodyPr rtlCol="0" anchor="ctr" wrap="none" lIns="0" tIns="0" rIns="0" bIns="0"/>
+          <a:bodyPr rtlCol="0" anchor="ctr"/>
           <a:lstStyle/>
           <a:p>
             <a:pPr algn="ctr">
@@ -14292,21 +18817,21 @@
               </a:defRPr>
             </a:pPr>
             <a:r>
-              <a:t>보안 관제실</a:t>
-            </a:r>
-          </a:p>
-        </p:txBody>
-      </p:sp>
-      <p:sp>
-        <p:nvSpPr>
-          <p:cNvPr id="15" name="TextBox 14"/>
+              <a:t>STEP 05 &amp; 06 / 08</a:t>
+            </a:r>
+          </a:p>
+        </p:txBody>
+      </p:sp>
+      <p:sp>
+        <p:nvSpPr>
+          <p:cNvPr id="16" name="TextBox 15"/>
           <p:cNvSpPr txBox="1"/>
           <p:nvPr/>
         </p:nvSpPr>
         <p:spPr>
           <a:xfrm>
-            <a:off x="12858750" y="3600450"/>
-            <a:ext cx="4190999" cy="428625"/>
+            <a:off x="12096750" y="4190999"/>
+            <a:ext cx="4876800" cy="476250"/>
           </a:xfrm>
           <a:prstGeom prst="rect">
             <a:avLst/>
@@ -14320,7 +18845,7 @@
           <a:lstStyle/>
           <a:p>
             <a:pPr>
-              <a:defRPr sz="1875" b="1">
+              <a:defRPr sz="2025" b="1">
                 <a:solidFill>
                   <a:srgbClr val="17263A"/>
                 </a:solidFill>
@@ -14328,21 +18853,21 @@
               </a:defRPr>
             </a:pPr>
             <a:r>
-              <a:t>불변 감사로그와 이상행위 탐지</a:t>
-            </a:r>
-          </a:p>
-        </p:txBody>
-      </p:sp>
-      <p:sp>
-        <p:nvSpPr>
-          <p:cNvPr id="16" name="TextBox 15"/>
+              <a:t>Control Plane API (ABAC 인가)</a:t>
+            </a:r>
+          </a:p>
+        </p:txBody>
+      </p:sp>
+      <p:sp>
+        <p:nvSpPr>
+          <p:cNvPr id="17" name="TextBox 16"/>
           <p:cNvSpPr txBox="1"/>
           <p:nvPr/>
         </p:nvSpPr>
         <p:spPr>
           <a:xfrm>
-            <a:off x="10763250" y="4238625"/>
-            <a:ext cx="6191250" cy="4762500"/>
+            <a:off x="12096750" y="4714875"/>
+            <a:ext cx="4876800" cy="714375"/>
           </a:xfrm>
           <a:prstGeom prst="rect">
             <a:avLst/>
@@ -14354,26 +18879,117 @@
             <a:spAutoFit/>
           </a:bodyPr>
           <a:lstStyle/>
+          <a:p>
+            <a:pPr>
+              <a:defRPr sz="1425">
+                <a:solidFill>
+                  <a:srgbClr val="53657B"/>
+                </a:solidFill>
+                <a:latin typeface="프리텐다드"/>
+              </a:defRPr>
+            </a:pPr>
+            <a:r>
+              <a:t>환자 동의 상태, 유효기간, 의사 소속병원, 요청 Study/Series UID 등 11개 조건을 교집합 전수 검증합니다.</a:t>
+            </a:r>
+          </a:p>
+        </p:txBody>
+      </p:sp>
+      <p:sp>
+        <p:nvSpPr>
+          <p:cNvPr id="18" name="Rounded Rectangle 17"/>
+          <p:cNvSpPr/>
+          <p:nvPr/>
+        </p:nvSpPr>
+        <p:spPr>
+          <a:xfrm>
+            <a:off x="12096750" y="5524500"/>
+            <a:ext cx="4876800" cy="1143000"/>
+          </a:xfrm>
+          <a:prstGeom prst="roundRect">
+            <a:avLst/>
+          </a:prstGeom>
+          <a:solidFill>
+            <a:srgbClr val="FFFFFF"/>
+          </a:solidFill>
+          <a:ln w="19050">
+            <a:solidFill>
+              <a:srgbClr val="DCA83D"/>
+            </a:solidFill>
+          </a:ln>
+        </p:spPr>
+        <p:style>
+          <a:lnRef idx="1">
+            <a:schemeClr val="accent1"/>
+          </a:lnRef>
+          <a:fillRef idx="3">
+            <a:schemeClr val="accent1"/>
+          </a:fillRef>
+          <a:effectRef idx="2">
+            <a:schemeClr val="accent1"/>
+          </a:effectRef>
+          <a:fontRef idx="minor">
+            <a:schemeClr val="lt1"/>
+          </a:fontRef>
+        </p:style>
+        <p:txBody>
+          <a:bodyPr rtlCol="0" anchor="ctr" lIns="152400" tIns="152400"/>
+          <a:lstStyle/>
+          <a:p>
+            <a:pPr algn="ctr">
+              <a:defRPr sz="1350" b="1">
+                <a:solidFill>
+                  <a:srgbClr val="DCA83D"/>
+                </a:solidFill>
+                <a:latin typeface="프리텐다드"/>
+              </a:defRPr>
+            </a:pPr>
+            <a:r>
+              <a:t>[보안 원칙] Fail-Closed 인가</a:t>
+            </a:r>
+          </a:p>
+          <a:p>
+            <a:pPr>
+              <a:defRPr sz="1200">
+                <a:solidFill>
+                  <a:srgbClr val="17263A"/>
+                </a:solidFill>
+                <a:latin typeface="프리텐다드"/>
+              </a:defRPr>
+            </a:pPr>
+            <a:r>
+              <a:t>11개 조건 중 단 하나라도 불일치하면 즉시 접근을 차단하고 상세 사유를 기록하며, 통과 시에만 5분 단기 토큰을 서명 발행합니다.</a:t>
+            </a:r>
+          </a:p>
+        </p:txBody>
+      </p:sp>
+      <p:sp>
+        <p:nvSpPr>
+          <p:cNvPr id="19" name="TextBox 18"/>
+          <p:cNvSpPr txBox="1"/>
+          <p:nvPr/>
+        </p:nvSpPr>
+        <p:spPr>
+          <a:xfrm>
+            <a:off x="12096750" y="6810375"/>
+            <a:ext cx="4876800" cy="2190750"/>
+          </a:xfrm>
+          <a:prstGeom prst="rect">
+            <a:avLst/>
+          </a:prstGeom>
+          <a:noFill/>
+        </p:spPr>
+        <p:txBody>
+          <a:bodyPr wrap="none">
+            <a:spAutoFit/>
+          </a:bodyPr>
+          <a:lstStyle/>
           <a:p/>
           <a:p>
             <a:pPr>
-              <a:defRPr sz="1575" b="1">
-                <a:solidFill>
-                  <a:srgbClr val="C64A4A"/>
-                </a:solidFill>
-                <a:latin typeface="프리텐다드"/>
-              </a:defRPr>
-            </a:pPr>
-            <a:r>
-              <a:t>✔  15대 주요 행위 전수 로깅</a:t>
-            </a:r>
-          </a:p>
-          <a:p>
-            <a:pPr>
               <a:spcAft>
-                <a:spcPts val="1000"/>
+                <a:spcPts val="800"/>
               </a:spcAft>
-              <a:defRPr sz="1350">
+              <a:defRPr sz="1387">
                 <a:solidFill>
                   <a:srgbClr val="17263A"/>
                 </a:solidFill>
@@ -14381,28 +18997,15 @@
               </a:defRPr>
             </a:pPr>
             <a:r>
-              <a:t>     로그인, 동의 생성, 토큰 발급, 프레임 조회, 접근 거부 등 실시간 기록</a:t>
-            </a:r>
-          </a:p>
-          <a:p>
-            <a:pPr>
-              <a:defRPr sz="1575" b="1">
-                <a:solidFill>
-                  <a:srgbClr val="C64A4A"/>
-                </a:solidFill>
-                <a:latin typeface="프리텐다드"/>
-              </a:defRPr>
-            </a:pPr>
-            <a:r>
-              <a:t>✔  사유 코드 기반 거부</a:t>
+              <a:t>•  ACTIVE 상태, 유효기간, 요청병원, 의사소속, UID 전수 일치 확인</a:t>
             </a:r>
           </a:p>
           <a:p>
             <a:pPr>
               <a:spcAft>
-                <a:spcPts val="1000"/>
+                <a:spcPts val="800"/>
               </a:spcAft>
-              <a:defRPr sz="1350">
+              <a:defRPr sz="1387">
                 <a:solidFill>
                   <a:srgbClr val="17263A"/>
                 </a:solidFill>
@@ -14410,28 +19013,15 @@
               </a:defRPr>
             </a:pPr>
             <a:r>
-              <a:t>     DOCTOR_HOSPITAL_MISMATCH 등 명확한 원인 추적</a:t>
-            </a:r>
-          </a:p>
-          <a:p>
-            <a:pPr>
-              <a:defRPr sz="1575" b="1">
-                <a:solidFill>
-                  <a:srgbClr val="C64A4A"/>
-                </a:solidFill>
-                <a:latin typeface="프리텐다드"/>
-              </a:defRPr>
-            </a:pPr>
-            <a:r>
-              <a:t>✔  감사 세션 체인 상관</a:t>
+              <a:t>•  영구 고정 URL 금지 ➔ 5~10분 유효 단기 HMAC-SHA256 토큰 발급</a:t>
             </a:r>
           </a:p>
           <a:p>
             <a:pPr>
               <a:spcAft>
-                <a:spcPts val="1000"/>
+                <a:spcPts val="800"/>
               </a:spcAft>
-              <a:defRPr sz="1350">
+              <a:defRPr sz="1387">
                 <a:solidFill>
                   <a:srgbClr val="17263A"/>
                 </a:solidFill>
@@ -14439,65 +19029,7 @@
               </a:defRPr>
             </a:pPr>
             <a:r>
-              <a:t>     하나의 감사 세션 ID로 토큰 발급부터 PACS 조회까지 종단 추적</a:t>
-            </a:r>
-          </a:p>
-          <a:p>
-            <a:pPr>
-              <a:defRPr sz="1575" b="1">
-                <a:solidFill>
-                  <a:srgbClr val="C64A4A"/>
-                </a:solidFill>
-                <a:latin typeface="프리텐다드"/>
-              </a:defRPr>
-            </a:pPr>
-            <a:r>
-              <a:t>✔  실시간 이상행위 탐지</a:t>
-            </a:r>
-          </a:p>
-          <a:p>
-            <a:pPr>
-              <a:spcAft>
-                <a:spcPts val="1000"/>
-              </a:spcAft>
-              <a:defRPr sz="1350">
-                <a:solidFill>
-                  <a:srgbClr val="17263A"/>
-                </a:solidFill>
-                <a:latin typeface="프리텐다드"/>
-              </a:defRPr>
-            </a:pPr>
-            <a:r>
-              <a:t>     단시간 대량 조회, 만료 토큰 반복 사용, 비진료 부서 접근 실시간 경보</a:t>
-            </a:r>
-          </a:p>
-          <a:p>
-            <a:pPr>
-              <a:defRPr sz="1575" b="1">
-                <a:solidFill>
-                  <a:srgbClr val="C64A4A"/>
-                </a:solidFill>
-                <a:latin typeface="프리텐다드"/>
-              </a:defRPr>
-            </a:pPr>
-            <a:r>
-              <a:t>✔  관리자 임의 삭제 금지</a:t>
-            </a:r>
-          </a:p>
-          <a:p>
-            <a:pPr>
-              <a:spcAft>
-                <a:spcPts val="1000"/>
-              </a:spcAft>
-              <a:defRPr sz="1350">
-                <a:solidFill>
-                  <a:srgbClr val="17263A"/>
-                </a:solidFill>
-                <a:latin typeface="프리텐다드"/>
-              </a:defRPr>
-            </a:pPr>
-            <a:r>
-              <a:t>     감사로그 자체의 무결성을 보장하여 법적 증거력 확보</a:t>
+              <a:t>•  모든 거부 사유(DOCTOR_MISMATCH 등) 실시간 감사로그 기록</a:t>
             </a:r>
           </a:p>
         </p:txBody>
@@ -14507,6 +19039,13 @@
   <p:clrMapOvr>
     <a:masterClrMapping/>
   </p:clrMapOvr>
+  <p:transition xmlns:p15="http://schemas.microsoft.com/office/powerpoint/2012/main">
+    <p:extLst>
+      <p:ext uri="{EFA19261-F742-4948-AE17-10779776E6A2}">
+        <p15:morph option="byObject"/>
+      </p:ext>
+    </p:extLst>
+  </p:transition>
 </p:sld>
 </file>
 
